--- a/IT PROJECT MANAGEMENT - 21MGH303P/Unit-5/1_Scrum_Agile_Framework.pptx
+++ b/IT PROJECT MANAGEMENT - 21MGH303P/Unit-5/1_Scrum_Agile_Framework.pptx
@@ -72,20 +72,21 @@
             <a:noAutofit/>
           </a:bodyPr>
           <a:p>
+            <a:pPr algn="ctr"/>
             <a:r>
-              <a:rPr b="0" lang="en-US" sz="1800" spc="-1" strike="noStrike">
-                <a:solidFill>
-                  <a:schemeClr val="dk1"/>
-                </a:solidFill>
-                <a:latin typeface="Calibri"/>
+              <a:rPr b="0" lang="en-US" sz="4400" spc="-1" strike="noStrike">
+                <a:solidFill>
+                  <a:srgbClr val="000000"/>
+                </a:solidFill>
+                <a:latin typeface="Arial"/>
               </a:rPr>
               <a:t>Click to move the slide</a:t>
             </a:r>
-            <a:endParaRPr b="0" lang="en-US" sz="1800" spc="-1" strike="noStrike">
-              <a:solidFill>
-                <a:schemeClr val="dk1"/>
-              </a:solidFill>
-              <a:latin typeface="Calibri"/>
+            <a:endParaRPr b="0" lang="en-US" sz="4400" spc="-1" strike="noStrike">
+              <a:solidFill>
+                <a:srgbClr val="000000"/>
+              </a:solidFill>
+              <a:latin typeface="Arial"/>
             </a:endParaRPr>
           </a:p>
         </p:txBody>
@@ -350,7 +351,7 @@
             <a:pPr indent="0" algn="r">
               <a:buNone/>
             </a:pPr>
-            <a:fld id="{A912D8C0-E8E2-44B4-934C-B8EDDBECF15E}" type="slidenum">
+            <a:fld id="{DB2DC7D7-FD48-49E6-AFC3-BFF4E008F4AA}" type="slidenum">
               <a:rPr b="0" lang="en-US" sz="1400" spc="-1" strike="noStrike">
                 <a:solidFill>
                   <a:srgbClr val="000000"/>
@@ -404,7 +405,7 @@
         <p:spPr>
           <a:xfrm>
             <a:off x="685800" y="1143000"/>
-            <a:ext cx="5486040" cy="3085920"/>
+            <a:ext cx="5485680" cy="3085560"/>
           </a:xfrm>
           <a:prstGeom prst="rect">
             <a:avLst/>
@@ -427,7 +428,7 @@
         <p:spPr>
           <a:xfrm>
             <a:off x="685800" y="4400640"/>
-            <a:ext cx="5486040" cy="3600000"/>
+            <a:ext cx="5485680" cy="3599640"/>
           </a:xfrm>
           <a:prstGeom prst="rect">
             <a:avLst/>
@@ -467,7 +468,7 @@
         <p:spPr>
           <a:xfrm>
             <a:off x="3884760" y="8685360"/>
-            <a:ext cx="2971440" cy="458280"/>
+            <a:ext cx="2971080" cy="457920"/>
           </a:xfrm>
           <a:prstGeom prst="rect">
             <a:avLst/>
@@ -487,6 +488,9 @@
                 <a:spcPct val="100000"/>
               </a:lnSpc>
               <a:buNone/>
+              <a:tabLst>
+                <a:tab algn="l" pos="0"/>
+              </a:tabLst>
               <a:defRPr b="0" lang="en-US" sz="1200" spc="-1" strike="noStrike">
                 <a:solidFill>
                   <a:schemeClr val="dk1"/>
@@ -502,8 +506,11 @@
                 <a:spcPct val="100000"/>
               </a:lnSpc>
               <a:buNone/>
-            </a:pPr>
-            <a:fld id="{07F32358-C5C8-4381-A6A4-531499A2F6B5}" type="slidenum">
+              <a:tabLst>
+                <a:tab algn="l" pos="0"/>
+              </a:tabLst>
+            </a:pPr>
+            <a:fld id="{98A94206-4CE5-423E-940A-9C7974C4073F}" type="slidenum">
               <a:rPr b="0" lang="en-US" sz="1200" spc="-1" strike="noStrike">
                 <a:solidFill>
                   <a:schemeClr val="dk1"/>
@@ -557,7 +564,7 @@
         <p:spPr>
           <a:xfrm>
             <a:off x="685800" y="1143000"/>
-            <a:ext cx="5486040" cy="3085920"/>
+            <a:ext cx="5485680" cy="3085560"/>
           </a:xfrm>
           <a:prstGeom prst="rect">
             <a:avLst/>
@@ -580,7 +587,7 @@
         <p:spPr>
           <a:xfrm>
             <a:off x="685800" y="4400640"/>
-            <a:ext cx="5486040" cy="3600000"/>
+            <a:ext cx="5485680" cy="3599640"/>
           </a:xfrm>
           <a:prstGeom prst="rect">
             <a:avLst/>
@@ -620,7 +627,7 @@
         <p:spPr>
           <a:xfrm>
             <a:off x="3884760" y="8685360"/>
-            <a:ext cx="2971440" cy="458280"/>
+            <a:ext cx="2971080" cy="457920"/>
           </a:xfrm>
           <a:prstGeom prst="rect">
             <a:avLst/>
@@ -640,6 +647,9 @@
                 <a:spcPct val="100000"/>
               </a:lnSpc>
               <a:buNone/>
+              <a:tabLst>
+                <a:tab algn="l" pos="0"/>
+              </a:tabLst>
               <a:defRPr b="0" lang="en-US" sz="1200" spc="-1" strike="noStrike">
                 <a:solidFill>
                   <a:schemeClr val="dk1"/>
@@ -655,8 +665,11 @@
                 <a:spcPct val="100000"/>
               </a:lnSpc>
               <a:buNone/>
-            </a:pPr>
-            <a:fld id="{8AE2E051-699F-4F02-A8E7-A8B0794ACD67}" type="slidenum">
+              <a:tabLst>
+                <a:tab algn="l" pos="0"/>
+              </a:tabLst>
+            </a:pPr>
+            <a:fld id="{776A3EC5-C25C-4CE5-AC98-F38EFA39CA4B}" type="slidenum">
               <a:rPr b="0" lang="en-US" sz="1200" spc="-1" strike="noStrike">
                 <a:solidFill>
                   <a:schemeClr val="dk1"/>
@@ -710,7 +723,7 @@
         <p:spPr>
           <a:xfrm>
             <a:off x="685800" y="1143000"/>
-            <a:ext cx="5486040" cy="3085920"/>
+            <a:ext cx="5485680" cy="3085560"/>
           </a:xfrm>
           <a:prstGeom prst="rect">
             <a:avLst/>
@@ -733,7 +746,7 @@
         <p:spPr>
           <a:xfrm>
             <a:off x="685800" y="4400640"/>
-            <a:ext cx="5486040" cy="3600000"/>
+            <a:ext cx="5485680" cy="3599640"/>
           </a:xfrm>
           <a:prstGeom prst="rect">
             <a:avLst/>
@@ -773,7 +786,7 @@
         <p:spPr>
           <a:xfrm>
             <a:off x="3884760" y="8685360"/>
-            <a:ext cx="2971440" cy="458280"/>
+            <a:ext cx="2971080" cy="457920"/>
           </a:xfrm>
           <a:prstGeom prst="rect">
             <a:avLst/>
@@ -793,6 +806,9 @@
                 <a:spcPct val="100000"/>
               </a:lnSpc>
               <a:buNone/>
+              <a:tabLst>
+                <a:tab algn="l" pos="0"/>
+              </a:tabLst>
               <a:defRPr b="0" lang="en-US" sz="1200" spc="-1" strike="noStrike">
                 <a:solidFill>
                   <a:schemeClr val="dk1"/>
@@ -808,8 +824,11 @@
                 <a:spcPct val="100000"/>
               </a:lnSpc>
               <a:buNone/>
-            </a:pPr>
-            <a:fld id="{AA3F3B21-1539-48B1-B57A-12CE0C966B38}" type="slidenum">
+              <a:tabLst>
+                <a:tab algn="l" pos="0"/>
+              </a:tabLst>
+            </a:pPr>
+            <a:fld id="{AA742196-0EB1-4BAA-BEA3-67DE47913297}" type="slidenum">
               <a:rPr b="0" lang="en-US" sz="1200" spc="-1" strike="noStrike">
                 <a:solidFill>
                   <a:schemeClr val="dk1"/>
@@ -863,7 +882,7 @@
         <p:spPr>
           <a:xfrm>
             <a:off x="685800" y="1143000"/>
-            <a:ext cx="5486040" cy="3085920"/>
+            <a:ext cx="5485680" cy="3085560"/>
           </a:xfrm>
           <a:prstGeom prst="rect">
             <a:avLst/>
@@ -886,7 +905,7 @@
         <p:spPr>
           <a:xfrm>
             <a:off x="685800" y="4400640"/>
-            <a:ext cx="5486040" cy="3600000"/>
+            <a:ext cx="5485680" cy="3599640"/>
           </a:xfrm>
           <a:prstGeom prst="rect">
             <a:avLst/>
@@ -926,7 +945,7 @@
         <p:spPr>
           <a:xfrm>
             <a:off x="3884760" y="8685360"/>
-            <a:ext cx="2971440" cy="458280"/>
+            <a:ext cx="2971080" cy="457920"/>
           </a:xfrm>
           <a:prstGeom prst="rect">
             <a:avLst/>
@@ -946,6 +965,9 @@
                 <a:spcPct val="100000"/>
               </a:lnSpc>
               <a:buNone/>
+              <a:tabLst>
+                <a:tab algn="l" pos="0"/>
+              </a:tabLst>
               <a:defRPr b="0" lang="en-US" sz="1200" spc="-1" strike="noStrike">
                 <a:solidFill>
                   <a:schemeClr val="dk1"/>
@@ -961,8 +983,11 @@
                 <a:spcPct val="100000"/>
               </a:lnSpc>
               <a:buNone/>
-            </a:pPr>
-            <a:fld id="{AED58C30-0A03-4742-8FAB-232ECF19FBD6}" type="slidenum">
+              <a:tabLst>
+                <a:tab algn="l" pos="0"/>
+              </a:tabLst>
+            </a:pPr>
+            <a:fld id="{FAF077ED-BA0E-411C-BED8-C112564FB626}" type="slidenum">
               <a:rPr b="0" lang="en-US" sz="1200" spc="-1" strike="noStrike">
                 <a:solidFill>
                   <a:schemeClr val="dk1"/>
@@ -1016,7 +1041,7 @@
         <p:spPr>
           <a:xfrm>
             <a:off x="685800" y="1143000"/>
-            <a:ext cx="5486040" cy="3085920"/>
+            <a:ext cx="5485680" cy="3085560"/>
           </a:xfrm>
           <a:prstGeom prst="rect">
             <a:avLst/>
@@ -1039,7 +1064,7 @@
         <p:spPr>
           <a:xfrm>
             <a:off x="685800" y="4400640"/>
-            <a:ext cx="5486040" cy="3600000"/>
+            <a:ext cx="5485680" cy="3599640"/>
           </a:xfrm>
           <a:prstGeom prst="rect">
             <a:avLst/>
@@ -1079,7 +1104,7 @@
         <p:spPr>
           <a:xfrm>
             <a:off x="3884760" y="8685360"/>
-            <a:ext cx="2971440" cy="458280"/>
+            <a:ext cx="2971080" cy="457920"/>
           </a:xfrm>
           <a:prstGeom prst="rect">
             <a:avLst/>
@@ -1099,6 +1124,9 @@
                 <a:spcPct val="100000"/>
               </a:lnSpc>
               <a:buNone/>
+              <a:tabLst>
+                <a:tab algn="l" pos="0"/>
+              </a:tabLst>
               <a:defRPr b="0" lang="en-US" sz="1200" spc="-1" strike="noStrike">
                 <a:solidFill>
                   <a:schemeClr val="dk1"/>
@@ -1114,8 +1142,11 @@
                 <a:spcPct val="100000"/>
               </a:lnSpc>
               <a:buNone/>
-            </a:pPr>
-            <a:fld id="{B87057A7-95D3-4910-9764-EE2DCEDD099D}" type="slidenum">
+              <a:tabLst>
+                <a:tab algn="l" pos="0"/>
+              </a:tabLst>
+            </a:pPr>
+            <a:fld id="{E1F69FEC-1140-4BD9-B5E6-03FB1BE68210}" type="slidenum">
               <a:rPr b="0" lang="en-US" sz="1200" spc="-1" strike="noStrike">
                 <a:solidFill>
                   <a:schemeClr val="dk1"/>
@@ -1169,7 +1200,7 @@
         <p:spPr>
           <a:xfrm>
             <a:off x="685800" y="1143000"/>
-            <a:ext cx="5486040" cy="3085920"/>
+            <a:ext cx="5485680" cy="3085560"/>
           </a:xfrm>
           <a:prstGeom prst="rect">
             <a:avLst/>
@@ -1192,7 +1223,7 @@
         <p:spPr>
           <a:xfrm>
             <a:off x="685800" y="4400640"/>
-            <a:ext cx="5486040" cy="3600000"/>
+            <a:ext cx="5485680" cy="3599640"/>
           </a:xfrm>
           <a:prstGeom prst="rect">
             <a:avLst/>
@@ -1232,7 +1263,7 @@
         <p:spPr>
           <a:xfrm>
             <a:off x="3884760" y="8685360"/>
-            <a:ext cx="2971440" cy="458280"/>
+            <a:ext cx="2971080" cy="457920"/>
           </a:xfrm>
           <a:prstGeom prst="rect">
             <a:avLst/>
@@ -1252,6 +1283,9 @@
                 <a:spcPct val="100000"/>
               </a:lnSpc>
               <a:buNone/>
+              <a:tabLst>
+                <a:tab algn="l" pos="0"/>
+              </a:tabLst>
               <a:defRPr b="0" lang="en-US" sz="1200" spc="-1" strike="noStrike">
                 <a:solidFill>
                   <a:schemeClr val="dk1"/>
@@ -1267,8 +1301,11 @@
                 <a:spcPct val="100000"/>
               </a:lnSpc>
               <a:buNone/>
-            </a:pPr>
-            <a:fld id="{E8BDE1AD-F544-437D-BAD5-7B806210BF02}" type="slidenum">
+              <a:tabLst>
+                <a:tab algn="l" pos="0"/>
+              </a:tabLst>
+            </a:pPr>
+            <a:fld id="{44F5448C-5EC2-4BF8-AB5F-40C6BA0EE5AA}" type="slidenum">
               <a:rPr b="0" lang="en-US" sz="1200" spc="-1" strike="noStrike">
                 <a:solidFill>
                   <a:schemeClr val="dk1"/>
@@ -1322,7 +1359,7 @@
         <p:spPr>
           <a:xfrm>
             <a:off x="685800" y="1143000"/>
-            <a:ext cx="5486040" cy="3085920"/>
+            <a:ext cx="5485680" cy="3085560"/>
           </a:xfrm>
           <a:prstGeom prst="rect">
             <a:avLst/>
@@ -1345,7 +1382,7 @@
         <p:spPr>
           <a:xfrm>
             <a:off x="685800" y="4400640"/>
-            <a:ext cx="5486040" cy="3600000"/>
+            <a:ext cx="5485680" cy="3599640"/>
           </a:xfrm>
           <a:prstGeom prst="rect">
             <a:avLst/>
@@ -1385,7 +1422,7 @@
         <p:spPr>
           <a:xfrm>
             <a:off x="3884760" y="8685360"/>
-            <a:ext cx="2971440" cy="458280"/>
+            <a:ext cx="2971080" cy="457920"/>
           </a:xfrm>
           <a:prstGeom prst="rect">
             <a:avLst/>
@@ -1405,6 +1442,9 @@
                 <a:spcPct val="100000"/>
               </a:lnSpc>
               <a:buNone/>
+              <a:tabLst>
+                <a:tab algn="l" pos="0"/>
+              </a:tabLst>
               <a:defRPr b="0" lang="en-US" sz="1200" spc="-1" strike="noStrike">
                 <a:solidFill>
                   <a:schemeClr val="dk1"/>
@@ -1420,8 +1460,11 @@
                 <a:spcPct val="100000"/>
               </a:lnSpc>
               <a:buNone/>
-            </a:pPr>
-            <a:fld id="{804EE906-3F63-4F66-B30A-9FCDEA914ED0}" type="slidenum">
+              <a:tabLst>
+                <a:tab algn="l" pos="0"/>
+              </a:tabLst>
+            </a:pPr>
+            <a:fld id="{1CC245C2-BA2B-46A1-8DAF-2F82166700FD}" type="slidenum">
               <a:rPr b="0" lang="en-US" sz="1200" spc="-1" strike="noStrike">
                 <a:solidFill>
                   <a:schemeClr val="dk1"/>
@@ -1475,7 +1518,7 @@
         <p:spPr>
           <a:xfrm>
             <a:off x="685800" y="1143000"/>
-            <a:ext cx="5486040" cy="3085920"/>
+            <a:ext cx="5485680" cy="3085560"/>
           </a:xfrm>
           <a:prstGeom prst="rect">
             <a:avLst/>
@@ -1498,7 +1541,7 @@
         <p:spPr>
           <a:xfrm>
             <a:off x="685800" y="4400640"/>
-            <a:ext cx="5486040" cy="3600000"/>
+            <a:ext cx="5485680" cy="3599640"/>
           </a:xfrm>
           <a:prstGeom prst="rect">
             <a:avLst/>
@@ -1538,7 +1581,7 @@
         <p:spPr>
           <a:xfrm>
             <a:off x="3884760" y="8685360"/>
-            <a:ext cx="2971440" cy="458280"/>
+            <a:ext cx="2971080" cy="457920"/>
           </a:xfrm>
           <a:prstGeom prst="rect">
             <a:avLst/>
@@ -1558,6 +1601,9 @@
                 <a:spcPct val="100000"/>
               </a:lnSpc>
               <a:buNone/>
+              <a:tabLst>
+                <a:tab algn="l" pos="0"/>
+              </a:tabLst>
               <a:defRPr b="0" lang="en-US" sz="1200" spc="-1" strike="noStrike">
                 <a:solidFill>
                   <a:schemeClr val="dk1"/>
@@ -1573,8 +1619,11 @@
                 <a:spcPct val="100000"/>
               </a:lnSpc>
               <a:buNone/>
-            </a:pPr>
-            <a:fld id="{C5D878C1-3CB5-4DD8-A2DD-06657CF7F686}" type="slidenum">
+              <a:tabLst>
+                <a:tab algn="l" pos="0"/>
+              </a:tabLst>
+            </a:pPr>
+            <a:fld id="{160F0AA0-0E4E-4102-8773-6AAAC4994C59}" type="slidenum">
               <a:rPr b="0" lang="en-US" sz="1200" spc="-1" strike="noStrike">
                 <a:solidFill>
                   <a:schemeClr val="dk1"/>
@@ -1628,7 +1677,7 @@
         <p:spPr>
           <a:xfrm>
             <a:off x="685800" y="1143000"/>
-            <a:ext cx="5486040" cy="3085920"/>
+            <a:ext cx="5485680" cy="3085560"/>
           </a:xfrm>
           <a:prstGeom prst="rect">
             <a:avLst/>
@@ -1651,7 +1700,7 @@
         <p:spPr>
           <a:xfrm>
             <a:off x="685800" y="4400640"/>
-            <a:ext cx="5486040" cy="3600000"/>
+            <a:ext cx="5485680" cy="3599640"/>
           </a:xfrm>
           <a:prstGeom prst="rect">
             <a:avLst/>
@@ -1691,7 +1740,7 @@
         <p:spPr>
           <a:xfrm>
             <a:off x="3884760" y="8685360"/>
-            <a:ext cx="2971440" cy="458280"/>
+            <a:ext cx="2971080" cy="457920"/>
           </a:xfrm>
           <a:prstGeom prst="rect">
             <a:avLst/>
@@ -1711,6 +1760,9 @@
                 <a:spcPct val="100000"/>
               </a:lnSpc>
               <a:buNone/>
+              <a:tabLst>
+                <a:tab algn="l" pos="0"/>
+              </a:tabLst>
               <a:defRPr b="0" lang="en-US" sz="1200" spc="-1" strike="noStrike">
                 <a:solidFill>
                   <a:schemeClr val="dk1"/>
@@ -1726,8 +1778,11 @@
                 <a:spcPct val="100000"/>
               </a:lnSpc>
               <a:buNone/>
-            </a:pPr>
-            <a:fld id="{0DDBE4FB-215C-4080-A104-57A35B124898}" type="slidenum">
+              <a:tabLst>
+                <a:tab algn="l" pos="0"/>
+              </a:tabLst>
+            </a:pPr>
+            <a:fld id="{67C52A20-5A58-4C77-A9BB-DD6A0A8576AC}" type="slidenum">
               <a:rPr b="0" lang="en-US" sz="1200" spc="-1" strike="noStrike">
                 <a:solidFill>
                   <a:schemeClr val="dk1"/>
@@ -1781,7 +1836,7 @@
         <p:spPr>
           <a:xfrm>
             <a:off x="685800" y="1143000"/>
-            <a:ext cx="5486040" cy="3085920"/>
+            <a:ext cx="5485680" cy="3085560"/>
           </a:xfrm>
           <a:prstGeom prst="rect">
             <a:avLst/>
@@ -1804,7 +1859,7 @@
         <p:spPr>
           <a:xfrm>
             <a:off x="685800" y="4400640"/>
-            <a:ext cx="5486040" cy="3600000"/>
+            <a:ext cx="5485680" cy="3599640"/>
           </a:xfrm>
           <a:prstGeom prst="rect">
             <a:avLst/>
@@ -1844,7 +1899,7 @@
         <p:spPr>
           <a:xfrm>
             <a:off x="3884760" y="8685360"/>
-            <a:ext cx="2971440" cy="458280"/>
+            <a:ext cx="2971080" cy="457920"/>
           </a:xfrm>
           <a:prstGeom prst="rect">
             <a:avLst/>
@@ -1864,6 +1919,9 @@
                 <a:spcPct val="100000"/>
               </a:lnSpc>
               <a:buNone/>
+              <a:tabLst>
+                <a:tab algn="l" pos="0"/>
+              </a:tabLst>
               <a:defRPr b="0" lang="en-US" sz="1200" spc="-1" strike="noStrike">
                 <a:solidFill>
                   <a:schemeClr val="dk1"/>
@@ -1879,8 +1937,11 @@
                 <a:spcPct val="100000"/>
               </a:lnSpc>
               <a:buNone/>
-            </a:pPr>
-            <a:fld id="{3835AA6C-DAD0-43CC-AE92-2814BD6D7F47}" type="slidenum">
+              <a:tabLst>
+                <a:tab algn="l" pos="0"/>
+              </a:tabLst>
+            </a:pPr>
+            <a:fld id="{5BD3B4F1-1D28-4D87-8D7F-014BF350C7E3}" type="slidenum">
               <a:rPr b="0" lang="en-US" sz="1200" spc="-1" strike="noStrike">
                 <a:solidFill>
                   <a:schemeClr val="dk1"/>
@@ -1934,7 +1995,7 @@
         <p:spPr>
           <a:xfrm>
             <a:off x="685800" y="1143000"/>
-            <a:ext cx="5486040" cy="3085920"/>
+            <a:ext cx="5485680" cy="3085560"/>
           </a:xfrm>
           <a:prstGeom prst="rect">
             <a:avLst/>
@@ -1957,7 +2018,7 @@
         <p:spPr>
           <a:xfrm>
             <a:off x="685800" y="4400640"/>
-            <a:ext cx="5486040" cy="3600000"/>
+            <a:ext cx="5485680" cy="3599640"/>
           </a:xfrm>
           <a:prstGeom prst="rect">
             <a:avLst/>
@@ -1997,7 +2058,7 @@
         <p:spPr>
           <a:xfrm>
             <a:off x="3884760" y="8685360"/>
-            <a:ext cx="2971440" cy="458280"/>
+            <a:ext cx="2971080" cy="457920"/>
           </a:xfrm>
           <a:prstGeom prst="rect">
             <a:avLst/>
@@ -2017,6 +2078,9 @@
                 <a:spcPct val="100000"/>
               </a:lnSpc>
               <a:buNone/>
+              <a:tabLst>
+                <a:tab algn="l" pos="0"/>
+              </a:tabLst>
               <a:defRPr b="0" lang="en-US" sz="1200" spc="-1" strike="noStrike">
                 <a:solidFill>
                   <a:schemeClr val="dk1"/>
@@ -2032,8 +2096,11 @@
                 <a:spcPct val="100000"/>
               </a:lnSpc>
               <a:buNone/>
-            </a:pPr>
-            <a:fld id="{5BCA7A94-AC39-427A-8FEA-1D0AB0095BE4}" type="slidenum">
+              <a:tabLst>
+                <a:tab algn="l" pos="0"/>
+              </a:tabLst>
+            </a:pPr>
+            <a:fld id="{F0072F98-3F3F-4775-87B1-AFA58C6F6472}" type="slidenum">
               <a:rPr b="0" lang="en-US" sz="1200" spc="-1" strike="noStrike">
                 <a:solidFill>
                   <a:schemeClr val="dk1"/>
@@ -2087,7 +2154,7 @@
         <p:spPr>
           <a:xfrm>
             <a:off x="685800" y="1143000"/>
-            <a:ext cx="5486040" cy="3085920"/>
+            <a:ext cx="5485680" cy="3085560"/>
           </a:xfrm>
           <a:prstGeom prst="rect">
             <a:avLst/>
@@ -2110,7 +2177,7 @@
         <p:spPr>
           <a:xfrm>
             <a:off x="685800" y="4400640"/>
-            <a:ext cx="5486040" cy="3600000"/>
+            <a:ext cx="5485680" cy="3599640"/>
           </a:xfrm>
           <a:prstGeom prst="rect">
             <a:avLst/>
@@ -2150,7 +2217,7 @@
         <p:spPr>
           <a:xfrm>
             <a:off x="3884760" y="8685360"/>
-            <a:ext cx="2971440" cy="458280"/>
+            <a:ext cx="2971080" cy="457920"/>
           </a:xfrm>
           <a:prstGeom prst="rect">
             <a:avLst/>
@@ -2170,6 +2237,9 @@
                 <a:spcPct val="100000"/>
               </a:lnSpc>
               <a:buNone/>
+              <a:tabLst>
+                <a:tab algn="l" pos="0"/>
+              </a:tabLst>
               <a:defRPr b="0" lang="en-US" sz="1200" spc="-1" strike="noStrike">
                 <a:solidFill>
                   <a:schemeClr val="dk1"/>
@@ -2185,8 +2255,11 @@
                 <a:spcPct val="100000"/>
               </a:lnSpc>
               <a:buNone/>
-            </a:pPr>
-            <a:fld id="{83579EC9-21A0-49E2-9FB5-F3E7C4F01503}" type="slidenum">
+              <a:tabLst>
+                <a:tab algn="l" pos="0"/>
+              </a:tabLst>
+            </a:pPr>
+            <a:fld id="{FA64204B-F31C-446D-92EC-08057809A8A1}" type="slidenum">
               <a:rPr b="0" lang="en-US" sz="1200" spc="-1" strike="noStrike">
                 <a:solidFill>
                   <a:schemeClr val="dk1"/>
@@ -2240,7 +2313,7 @@
         <p:spPr>
           <a:xfrm>
             <a:off x="685800" y="1143000"/>
-            <a:ext cx="5486040" cy="3085920"/>
+            <a:ext cx="5485680" cy="3085560"/>
           </a:xfrm>
           <a:prstGeom prst="rect">
             <a:avLst/>
@@ -2263,7 +2336,7 @@
         <p:spPr>
           <a:xfrm>
             <a:off x="685800" y="4400640"/>
-            <a:ext cx="5486040" cy="3600000"/>
+            <a:ext cx="5485680" cy="3599640"/>
           </a:xfrm>
           <a:prstGeom prst="rect">
             <a:avLst/>
@@ -2303,7 +2376,7 @@
         <p:spPr>
           <a:xfrm>
             <a:off x="3884760" y="8685360"/>
-            <a:ext cx="2971440" cy="458280"/>
+            <a:ext cx="2971080" cy="457920"/>
           </a:xfrm>
           <a:prstGeom prst="rect">
             <a:avLst/>
@@ -2323,6 +2396,9 @@
                 <a:spcPct val="100000"/>
               </a:lnSpc>
               <a:buNone/>
+              <a:tabLst>
+                <a:tab algn="l" pos="0"/>
+              </a:tabLst>
               <a:defRPr b="0" lang="en-US" sz="1200" spc="-1" strike="noStrike">
                 <a:solidFill>
                   <a:schemeClr val="dk1"/>
@@ -2338,8 +2414,11 @@
                 <a:spcPct val="100000"/>
               </a:lnSpc>
               <a:buNone/>
-            </a:pPr>
-            <a:fld id="{6AE7FCD8-4900-4DD1-AFEB-1481991CFC74}" type="slidenum">
+              <a:tabLst>
+                <a:tab algn="l" pos="0"/>
+              </a:tabLst>
+            </a:pPr>
+            <a:fld id="{1C826779-708E-4FF1-8E4D-1BCF9C49EE87}" type="slidenum">
               <a:rPr b="0" lang="en-US" sz="1200" spc="-1" strike="noStrike">
                 <a:solidFill>
                   <a:schemeClr val="dk1"/>
@@ -2437,32 +2516,23 @@
             <a:noAutofit/>
           </a:bodyPr>
           <a:p>
-            <a:pPr indent="0">
+            <a:pPr indent="0" algn="ctr">
               <a:buNone/>
             </a:pPr>
             <a:r>
-              <a:rPr b="0" lang="en-US" sz="1800" spc="-1" strike="noStrike">
-                <a:solidFill>
-                  <a:schemeClr val="dk1"/>
-                </a:solidFill>
-                <a:latin typeface="Calibri"/>
-              </a:rPr>
-              <a:t>Click to edit the title text </a:t>
+              <a:rPr b="0" lang="en-US" sz="4400" spc="-1" strike="noStrike">
+                <a:solidFill>
+                  <a:srgbClr val="000000"/>
+                </a:solidFill>
+                <a:latin typeface="Arial"/>
+              </a:rPr>
+              <a:t>Click to edit the title text format</a:t>
             </a:r>
-            <a:r>
-              <a:rPr b="0" lang="en-US" sz="1800" spc="-1" strike="noStrike">
-                <a:solidFill>
-                  <a:schemeClr val="dk1"/>
-                </a:solidFill>
-                <a:latin typeface="Calibri"/>
-              </a:rPr>
-              <a:t>format</a:t>
-            </a:r>
-            <a:endParaRPr b="0" lang="en-US" sz="1800" spc="-1" strike="noStrike">
-              <a:solidFill>
-                <a:schemeClr val="dk1"/>
-              </a:solidFill>
-              <a:latin typeface="Calibri"/>
+            <a:endParaRPr b="0" lang="en-US" sz="4400" spc="-1" strike="noStrike">
+              <a:solidFill>
+                <a:srgbClr val="000000"/>
+              </a:solidFill>
+              <a:latin typeface="Arial"/>
             </a:endParaRPr>
           </a:p>
         </p:txBody>
@@ -2492,7 +2562,7 @@
         </p:spPr>
         <p:txBody>
           <a:bodyPr lIns="0" rIns="0" tIns="0" bIns="0" anchor="t">
-            <a:normAutofit fontScale="95303"/>
+            <a:normAutofit/>
           </a:bodyPr>
           <a:p>
             <a:pPr marL="432000" indent="-324000">
@@ -2509,17 +2579,17 @@
             <a:r>
               <a:rPr b="0" lang="en-US" sz="3200" spc="-1" strike="noStrike">
                 <a:solidFill>
-                  <a:schemeClr val="dk1"/>
-                </a:solidFill>
-                <a:latin typeface="Calibri"/>
+                  <a:srgbClr val="000000"/>
+                </a:solidFill>
+                <a:latin typeface="Arial"/>
               </a:rPr>
               <a:t>Click to edit the outline text format</a:t>
             </a:r>
             <a:endParaRPr b="0" lang="en-US" sz="3200" spc="-1" strike="noStrike">
               <a:solidFill>
-                <a:schemeClr val="dk1"/>
-              </a:solidFill>
-              <a:latin typeface="Calibri"/>
+                <a:srgbClr val="000000"/>
+              </a:solidFill>
+              <a:latin typeface="Arial"/>
             </a:endParaRPr>
           </a:p>
           <a:p>
@@ -2535,19 +2605,19 @@
               <a:buChar char=""/>
             </a:pPr>
             <a:r>
-              <a:rPr b="0" lang="en-US" sz="2400" spc="-1" strike="noStrike">
-                <a:solidFill>
-                  <a:schemeClr val="dk1"/>
-                </a:solidFill>
-                <a:latin typeface="Calibri"/>
+              <a:rPr b="0" lang="en-US" sz="2800" spc="-1" strike="noStrike">
+                <a:solidFill>
+                  <a:srgbClr val="000000"/>
+                </a:solidFill>
+                <a:latin typeface="Arial"/>
               </a:rPr>
               <a:t>Second Outline Level</a:t>
             </a:r>
-            <a:endParaRPr b="0" lang="en-US" sz="2400" spc="-1" strike="noStrike">
-              <a:solidFill>
-                <a:schemeClr val="dk1"/>
-              </a:solidFill>
-              <a:latin typeface="Calibri"/>
+            <a:endParaRPr b="0" lang="en-US" sz="2800" spc="-1" strike="noStrike">
+              <a:solidFill>
+                <a:srgbClr val="000000"/>
+              </a:solidFill>
+              <a:latin typeface="Arial"/>
             </a:endParaRPr>
           </a:p>
           <a:p>
@@ -2563,19 +2633,19 @@
               <a:buChar char=""/>
             </a:pPr>
             <a:r>
-              <a:rPr b="0" lang="en-US" sz="2000" spc="-1" strike="noStrike">
-                <a:solidFill>
-                  <a:schemeClr val="dk1"/>
-                </a:solidFill>
-                <a:latin typeface="Calibri"/>
+              <a:rPr b="0" lang="en-US" sz="2400" spc="-1" strike="noStrike">
+                <a:solidFill>
+                  <a:srgbClr val="000000"/>
+                </a:solidFill>
+                <a:latin typeface="Arial"/>
               </a:rPr>
               <a:t>Third Outline Level</a:t>
             </a:r>
-            <a:endParaRPr b="0" lang="en-US" sz="2000" spc="-1" strike="noStrike">
-              <a:solidFill>
-                <a:schemeClr val="dk1"/>
-              </a:solidFill>
-              <a:latin typeface="Calibri"/>
+            <a:endParaRPr b="0" lang="en-US" sz="2400" spc="-1" strike="noStrike">
+              <a:solidFill>
+                <a:srgbClr val="000000"/>
+              </a:solidFill>
+              <a:latin typeface="Arial"/>
             </a:endParaRPr>
           </a:p>
           <a:p>
@@ -2593,17 +2663,17 @@
             <a:r>
               <a:rPr b="0" lang="en-US" sz="2000" spc="-1" strike="noStrike">
                 <a:solidFill>
-                  <a:schemeClr val="dk1"/>
-                </a:solidFill>
-                <a:latin typeface="Calibri"/>
+                  <a:srgbClr val="000000"/>
+                </a:solidFill>
+                <a:latin typeface="Arial"/>
               </a:rPr>
               <a:t>Fourth Outline Level</a:t>
             </a:r>
             <a:endParaRPr b="0" lang="en-US" sz="2000" spc="-1" strike="noStrike">
               <a:solidFill>
-                <a:schemeClr val="dk1"/>
-              </a:solidFill>
-              <a:latin typeface="Calibri"/>
+                <a:srgbClr val="000000"/>
+              </a:solidFill>
+              <a:latin typeface="Arial"/>
             </a:endParaRPr>
           </a:p>
           <a:p>
@@ -2621,17 +2691,17 @@
             <a:r>
               <a:rPr b="0" lang="en-US" sz="2000" spc="-1" strike="noStrike">
                 <a:solidFill>
-                  <a:schemeClr val="dk1"/>
-                </a:solidFill>
-                <a:latin typeface="Calibri"/>
+                  <a:srgbClr val="000000"/>
+                </a:solidFill>
+                <a:latin typeface="Arial"/>
               </a:rPr>
               <a:t>Fifth Outline Level</a:t>
             </a:r>
             <a:endParaRPr b="0" lang="en-US" sz="2000" spc="-1" strike="noStrike">
               <a:solidFill>
-                <a:schemeClr val="dk1"/>
-              </a:solidFill>
-              <a:latin typeface="Calibri"/>
+                <a:srgbClr val="000000"/>
+              </a:solidFill>
+              <a:latin typeface="Arial"/>
             </a:endParaRPr>
           </a:p>
           <a:p>
@@ -2649,17 +2719,17 @@
             <a:r>
               <a:rPr b="0" lang="en-US" sz="2000" spc="-1" strike="noStrike">
                 <a:solidFill>
-                  <a:schemeClr val="dk1"/>
-                </a:solidFill>
-                <a:latin typeface="Calibri"/>
+                  <a:srgbClr val="000000"/>
+                </a:solidFill>
+                <a:latin typeface="Arial"/>
               </a:rPr>
               <a:t>Sixth Outline Level</a:t>
             </a:r>
             <a:endParaRPr b="0" lang="en-US" sz="2000" spc="-1" strike="noStrike">
               <a:solidFill>
-                <a:schemeClr val="dk1"/>
-              </a:solidFill>
-              <a:latin typeface="Calibri"/>
+                <a:srgbClr val="000000"/>
+              </a:solidFill>
+              <a:latin typeface="Arial"/>
             </a:endParaRPr>
           </a:p>
           <a:p>
@@ -2677,17 +2747,17 @@
             <a:r>
               <a:rPr b="0" lang="en-US" sz="2000" spc="-1" strike="noStrike">
                 <a:solidFill>
-                  <a:schemeClr val="dk1"/>
-                </a:solidFill>
-                <a:latin typeface="Calibri"/>
+                  <a:srgbClr val="000000"/>
+                </a:solidFill>
+                <a:latin typeface="Arial"/>
               </a:rPr>
               <a:t>Seventh Outline Level</a:t>
             </a:r>
             <a:endParaRPr b="0" lang="en-US" sz="2000" spc="-1" strike="noStrike">
               <a:solidFill>
-                <a:schemeClr val="dk1"/>
-              </a:solidFill>
-              <a:latin typeface="Calibri"/>
+                <a:srgbClr val="000000"/>
+              </a:solidFill>
+              <a:latin typeface="Arial"/>
             </a:endParaRPr>
           </a:p>
         </p:txBody>
@@ -2734,7 +2804,7 @@
         <p:spPr>
           <a:xfrm>
             <a:off x="5943600" y="0"/>
-            <a:ext cx="3200040" cy="5143320"/>
+            <a:ext cx="3199680" cy="5142960"/>
           </a:xfrm>
           <a:prstGeom prst="rect">
             <a:avLst/>
@@ -2760,6 +2830,11 @@
             <a:noAutofit/>
           </a:bodyPr>
           <a:p>
+            <a:pPr>
+              <a:lnSpc>
+                <a:spcPct val="100000"/>
+              </a:lnSpc>
+            </a:pPr>
             <a:endParaRPr b="0" lang="en-US" sz="1800" spc="-1" strike="noStrike">
               <a:solidFill>
                 <a:srgbClr val="ffffff"/>
@@ -2778,7 +2853,7 @@
         <p:spPr>
           <a:xfrm>
             <a:off x="6583680" y="0"/>
-            <a:ext cx="2559960" cy="5143320"/>
+            <a:ext cx="2559600" cy="5142960"/>
           </a:xfrm>
           <a:prstGeom prst="rect">
             <a:avLst/>
@@ -2808,6 +2883,11 @@
             <a:noAutofit/>
           </a:bodyPr>
           <a:p>
+            <a:pPr>
+              <a:lnSpc>
+                <a:spcPct val="100000"/>
+              </a:lnSpc>
+            </a:pPr>
             <a:endParaRPr b="0" lang="en-US" sz="1800" spc="-1" strike="noStrike">
               <a:solidFill>
                 <a:srgbClr val="ffffff"/>
@@ -2826,7 +2906,7 @@
         <p:spPr>
           <a:xfrm>
             <a:off x="6400800" y="-822960"/>
-            <a:ext cx="3200040" cy="3200040"/>
+            <a:ext cx="3199680" cy="3199680"/>
           </a:xfrm>
           <a:prstGeom prst="ellipse">
             <a:avLst/>
@@ -2854,6 +2934,11 @@
             <a:noAutofit/>
           </a:bodyPr>
           <a:p>
+            <a:pPr>
+              <a:lnSpc>
+                <a:spcPct val="100000"/>
+              </a:lnSpc>
+            </a:pPr>
             <a:endParaRPr b="0" lang="en-US" sz="1800" spc="-1" strike="noStrike">
               <a:solidFill>
                 <a:srgbClr val="ffffff"/>
@@ -2872,7 +2957,7 @@
         <p:spPr>
           <a:xfrm>
             <a:off x="7132320" y="-91440"/>
-            <a:ext cx="1828440" cy="1828440"/>
+            <a:ext cx="1828080" cy="1828080"/>
           </a:xfrm>
           <a:prstGeom prst="ellipse">
             <a:avLst/>
@@ -2900,6 +2985,11 @@
             <a:noAutofit/>
           </a:bodyPr>
           <a:p>
+            <a:pPr>
+              <a:lnSpc>
+                <a:spcPct val="100000"/>
+              </a:lnSpc>
+            </a:pPr>
             <a:endParaRPr b="0" lang="en-US" sz="1800" spc="-1" strike="noStrike">
               <a:solidFill>
                 <a:srgbClr val="ffffff"/>
@@ -2918,7 +3008,7 @@
         <p:spPr>
           <a:xfrm>
             <a:off x="7315200" y="3200400"/>
-            <a:ext cx="502560" cy="502560"/>
+            <a:ext cx="502200" cy="502200"/>
           </a:xfrm>
           <a:prstGeom prst="ellipse">
             <a:avLst/>
@@ -2944,6 +3034,11 @@
             <a:noAutofit/>
           </a:bodyPr>
           <a:p>
+            <a:pPr>
+              <a:lnSpc>
+                <a:spcPct val="100000"/>
+              </a:lnSpc>
+            </a:pPr>
             <a:endParaRPr b="0" lang="en-US" sz="1800" spc="-1" strike="noStrike">
               <a:solidFill>
                 <a:srgbClr val="ffffff"/>
@@ -2962,7 +3057,7 @@
         <p:spPr>
           <a:xfrm>
             <a:off x="7863840" y="3200400"/>
-            <a:ext cx="502560" cy="502560"/>
+            <a:ext cx="502200" cy="502200"/>
           </a:xfrm>
           <a:prstGeom prst="ellipse">
             <a:avLst/>
@@ -2988,6 +3083,11 @@
             <a:noAutofit/>
           </a:bodyPr>
           <a:p>
+            <a:pPr>
+              <a:lnSpc>
+                <a:spcPct val="100000"/>
+              </a:lnSpc>
+            </a:pPr>
             <a:endParaRPr b="0" lang="en-US" sz="1800" spc="-1" strike="noStrike">
               <a:solidFill>
                 <a:srgbClr val="ffffff"/>
@@ -3006,7 +3106,7 @@
         <p:spPr>
           <a:xfrm>
             <a:off x="7589520" y="3749040"/>
-            <a:ext cx="502560" cy="502560"/>
+            <a:ext cx="502200" cy="502200"/>
           </a:xfrm>
           <a:prstGeom prst="ellipse">
             <a:avLst/>
@@ -3032,6 +3132,11 @@
             <a:noAutofit/>
           </a:bodyPr>
           <a:p>
+            <a:pPr>
+              <a:lnSpc>
+                <a:spcPct val="100000"/>
+              </a:lnSpc>
+            </a:pPr>
             <a:endParaRPr b="0" lang="en-US" sz="1800" spc="-1" strike="noStrike">
               <a:solidFill>
                 <a:srgbClr val="ffffff"/>
@@ -3050,7 +3155,7 @@
         <p:spPr>
           <a:xfrm>
             <a:off x="0" y="0"/>
-            <a:ext cx="200880" cy="5143320"/>
+            <a:ext cx="200520" cy="5142960"/>
           </a:xfrm>
           <a:prstGeom prst="rect">
             <a:avLst/>
@@ -3076,6 +3181,11 @@
             <a:noAutofit/>
           </a:bodyPr>
           <a:p>
+            <a:pPr>
+              <a:lnSpc>
+                <a:spcPct val="100000"/>
+              </a:lnSpc>
+            </a:pPr>
             <a:endParaRPr b="0" lang="en-US" sz="1800" spc="-1" strike="noStrike">
               <a:solidFill>
                 <a:srgbClr val="ffffff"/>
@@ -3094,7 +3204,7 @@
         <p:spPr>
           <a:xfrm>
             <a:off x="457200" y="914400"/>
-            <a:ext cx="3200040" cy="347040"/>
+            <a:ext cx="3199680" cy="346680"/>
           </a:xfrm>
           <a:prstGeom prst="rect">
             <a:avLst/>
@@ -3120,6 +3230,11 @@
             <a:noAutofit/>
           </a:bodyPr>
           <a:p>
+            <a:pPr>
+              <a:lnSpc>
+                <a:spcPct val="100000"/>
+              </a:lnSpc>
+            </a:pPr>
             <a:endParaRPr b="0" lang="en-US" sz="1800" spc="-1" strike="noStrike">
               <a:solidFill>
                 <a:srgbClr val="ffffff"/>
@@ -3138,7 +3253,7 @@
         <p:spPr>
           <a:xfrm>
             <a:off x="457200" y="914400"/>
-            <a:ext cx="3200040" cy="347040"/>
+            <a:ext cx="3199680" cy="346680"/>
           </a:xfrm>
           <a:prstGeom prst="rect">
             <a:avLst/>
@@ -3168,13 +3283,13 @@
               </a:tabLst>
             </a:pPr>
             <a:r>
-              <a:rPr b="1" lang="en-US" sz="950" spc="199" strike="noStrike">
+              <a:rPr b="1" lang="en-US" sz="950" spc="197" strike="noStrike">
                 <a:solidFill>
                   <a:srgbClr val="ffffff"/>
                 </a:solidFill>
                 <a:latin typeface="Calibri"/>
               </a:rPr>
-              <a:t>ATLASSIAN AGILE GUIDE · 2026</a:t>
+              <a:t>AGILE GUIDE · 2026</a:t>
             </a:r>
             <a:endParaRPr b="0" lang="en-US" sz="950" spc="-1" strike="noStrike">
               <a:solidFill>
@@ -3194,7 +3309,7 @@
         <p:spPr>
           <a:xfrm>
             <a:off x="457200" y="1371600"/>
-            <a:ext cx="5486040" cy="1371240"/>
+            <a:ext cx="5485680" cy="1370880"/>
           </a:xfrm>
           <a:prstGeom prst="rect">
             <a:avLst/>
@@ -3224,7 +3339,7 @@
               </a:tabLst>
             </a:pPr>
             <a:r>
-              <a:rPr b="1" lang="en-US" sz="8000" spc="797" strike="noStrike">
+              <a:rPr b="1" lang="en-US" sz="8000" spc="795" strike="noStrike">
                 <a:solidFill>
                   <a:srgbClr val="ffffff"/>
                 </a:solidFill>
@@ -3251,7 +3366,7 @@
         <p:spPr>
           <a:xfrm>
             <a:off x="457200" y="2788920"/>
-            <a:ext cx="5486040" cy="1005480"/>
+            <a:ext cx="5485680" cy="1005120"/>
           </a:xfrm>
           <a:prstGeom prst="rect">
             <a:avLst/>
@@ -3334,7 +3449,7 @@
         <p:spPr>
           <a:xfrm>
             <a:off x="457200" y="3840480"/>
-            <a:ext cx="5486040" cy="411120"/>
+            <a:ext cx="5485680" cy="410760"/>
           </a:xfrm>
           <a:prstGeom prst="rect">
             <a:avLst/>
@@ -3390,7 +3505,7 @@
         <p:spPr>
           <a:xfrm>
             <a:off x="0" y="4873680"/>
-            <a:ext cx="9143640" cy="269280"/>
+            <a:ext cx="9143280" cy="268920"/>
           </a:xfrm>
           <a:prstGeom prst="rect">
             <a:avLst/>
@@ -3416,6 +3531,11 @@
             <a:noAutofit/>
           </a:bodyPr>
           <a:p>
+            <a:pPr>
+              <a:lnSpc>
+                <a:spcPct val="100000"/>
+              </a:lnSpc>
+            </a:pPr>
             <a:endParaRPr b="0" lang="en-US" sz="1800" spc="-1" strike="noStrike">
               <a:solidFill>
                 <a:srgbClr val="ffffff"/>
@@ -3434,7 +3554,7 @@
         <p:spPr>
           <a:xfrm>
             <a:off x="0" y="4873680"/>
-            <a:ext cx="9143640" cy="269280"/>
+            <a:ext cx="9143280" cy="268920"/>
           </a:xfrm>
           <a:prstGeom prst="rect">
             <a:avLst/>
@@ -3518,7 +3638,7 @@
         <p:spPr>
           <a:xfrm>
             <a:off x="0" y="0"/>
-            <a:ext cx="9143640" cy="776880"/>
+            <a:ext cx="9143280" cy="776520"/>
           </a:xfrm>
           <a:prstGeom prst="rect">
             <a:avLst/>
@@ -3544,6 +3664,11 @@
             <a:noAutofit/>
           </a:bodyPr>
           <a:p>
+            <a:pPr>
+              <a:lnSpc>
+                <a:spcPct val="100000"/>
+              </a:lnSpc>
+            </a:pPr>
             <a:endParaRPr b="0" lang="en-US" sz="1800" spc="-1" strike="noStrike">
               <a:solidFill>
                 <a:srgbClr val="ffffff"/>
@@ -3562,7 +3687,7 @@
         <p:spPr>
           <a:xfrm>
             <a:off x="365760" y="0"/>
-            <a:ext cx="8412120" cy="776880"/>
+            <a:ext cx="8411760" cy="776520"/>
           </a:xfrm>
           <a:prstGeom prst="rect">
             <a:avLst/>
@@ -3592,7 +3717,7 @@
               </a:tabLst>
             </a:pPr>
             <a:r>
-              <a:rPr b="1" lang="en-US" sz="2000" spc="299" strike="noStrike">
+              <a:rPr b="1" lang="en-US" sz="2000" spc="296" strike="noStrike">
                 <a:solidFill>
                   <a:srgbClr val="ffffff"/>
                 </a:solidFill>
@@ -3618,7 +3743,7 @@
         <p:spPr>
           <a:xfrm>
             <a:off x="274320" y="914400"/>
-            <a:ext cx="2057040" cy="475200"/>
+            <a:ext cx="2056680" cy="474840"/>
           </a:xfrm>
           <a:prstGeom prst="rect">
             <a:avLst/>
@@ -3644,6 +3769,11 @@
             <a:noAutofit/>
           </a:bodyPr>
           <a:p>
+            <a:pPr>
+              <a:lnSpc>
+                <a:spcPct val="100000"/>
+              </a:lnSpc>
+            </a:pPr>
             <a:endParaRPr b="0" lang="en-US" sz="1800" spc="-1" strike="noStrike">
               <a:solidFill>
                 <a:srgbClr val="ffffff"/>
@@ -3662,7 +3792,7 @@
         <p:spPr>
           <a:xfrm>
             <a:off x="274320" y="914400"/>
-            <a:ext cx="2057040" cy="475200"/>
+            <a:ext cx="2056680" cy="474840"/>
           </a:xfrm>
           <a:prstGeom prst="rect">
             <a:avLst/>
@@ -3718,7 +3848,7 @@
         <p:spPr>
           <a:xfrm>
             <a:off x="2423160" y="914400"/>
-            <a:ext cx="2057040" cy="475200"/>
+            <a:ext cx="2056680" cy="474840"/>
           </a:xfrm>
           <a:prstGeom prst="rect">
             <a:avLst/>
@@ -3744,6 +3874,11 @@
             <a:noAutofit/>
           </a:bodyPr>
           <a:p>
+            <a:pPr>
+              <a:lnSpc>
+                <a:spcPct val="100000"/>
+              </a:lnSpc>
+            </a:pPr>
             <a:endParaRPr b="0" lang="en-US" sz="1800" spc="-1" strike="noStrike">
               <a:solidFill>
                 <a:srgbClr val="ffffff"/>
@@ -3762,7 +3897,7 @@
         <p:spPr>
           <a:xfrm>
             <a:off x="2423160" y="914400"/>
-            <a:ext cx="2057040" cy="475200"/>
+            <a:ext cx="2056680" cy="474840"/>
           </a:xfrm>
           <a:prstGeom prst="rect">
             <a:avLst/>
@@ -3818,7 +3953,7 @@
         <p:spPr>
           <a:xfrm>
             <a:off x="4572000" y="914400"/>
-            <a:ext cx="2057040" cy="475200"/>
+            <a:ext cx="2056680" cy="474840"/>
           </a:xfrm>
           <a:prstGeom prst="rect">
             <a:avLst/>
@@ -3844,6 +3979,11 @@
             <a:noAutofit/>
           </a:bodyPr>
           <a:p>
+            <a:pPr>
+              <a:lnSpc>
+                <a:spcPct val="100000"/>
+              </a:lnSpc>
+            </a:pPr>
             <a:endParaRPr b="0" lang="en-US" sz="1800" spc="-1" strike="noStrike">
               <a:solidFill>
                 <a:srgbClr val="ffffff"/>
@@ -3862,7 +4002,7 @@
         <p:spPr>
           <a:xfrm>
             <a:off x="4572000" y="914400"/>
-            <a:ext cx="2057040" cy="475200"/>
+            <a:ext cx="2056680" cy="474840"/>
           </a:xfrm>
           <a:prstGeom prst="rect">
             <a:avLst/>
@@ -3918,7 +4058,7 @@
         <p:spPr>
           <a:xfrm>
             <a:off x="6720840" y="914400"/>
-            <a:ext cx="2057040" cy="475200"/>
+            <a:ext cx="2056680" cy="474840"/>
           </a:xfrm>
           <a:prstGeom prst="rect">
             <a:avLst/>
@@ -3944,6 +4084,11 @@
             <a:noAutofit/>
           </a:bodyPr>
           <a:p>
+            <a:pPr>
+              <a:lnSpc>
+                <a:spcPct val="100000"/>
+              </a:lnSpc>
+            </a:pPr>
             <a:endParaRPr b="0" lang="en-US" sz="1800" spc="-1" strike="noStrike">
               <a:solidFill>
                 <a:srgbClr val="ffffff"/>
@@ -3962,7 +4107,7 @@
         <p:spPr>
           <a:xfrm>
             <a:off x="6720840" y="914400"/>
-            <a:ext cx="2057040" cy="475200"/>
+            <a:ext cx="2056680" cy="474840"/>
           </a:xfrm>
           <a:prstGeom prst="rect">
             <a:avLst/>
@@ -4018,7 +4163,7 @@
         <p:spPr>
           <a:xfrm>
             <a:off x="274320" y="1444680"/>
-            <a:ext cx="2057040" cy="475200"/>
+            <a:ext cx="2056680" cy="474840"/>
           </a:xfrm>
           <a:prstGeom prst="rect">
             <a:avLst/>
@@ -4044,6 +4189,11 @@
             <a:noAutofit/>
           </a:bodyPr>
           <a:p>
+            <a:pPr>
+              <a:lnSpc>
+                <a:spcPct val="100000"/>
+              </a:lnSpc>
+            </a:pPr>
             <a:endParaRPr b="0" lang="en-US" sz="1800" spc="-1" strike="noStrike">
               <a:solidFill>
                 <a:srgbClr val="000000"/>
@@ -4062,7 +4212,7 @@
         <p:spPr>
           <a:xfrm>
             <a:off x="320040" y="1444680"/>
-            <a:ext cx="1965600" cy="475200"/>
+            <a:ext cx="1965240" cy="474840"/>
           </a:xfrm>
           <a:prstGeom prst="rect">
             <a:avLst/>
@@ -4118,7 +4268,7 @@
         <p:spPr>
           <a:xfrm>
             <a:off x="2423160" y="1444680"/>
-            <a:ext cx="2057040" cy="475200"/>
+            <a:ext cx="2056680" cy="474840"/>
           </a:xfrm>
           <a:prstGeom prst="rect">
             <a:avLst/>
@@ -4144,6 +4294,11 @@
             <a:noAutofit/>
           </a:bodyPr>
           <a:p>
+            <a:pPr>
+              <a:lnSpc>
+                <a:spcPct val="100000"/>
+              </a:lnSpc>
+            </a:pPr>
             <a:endParaRPr b="0" lang="en-US" sz="1800" spc="-1" strike="noStrike">
               <a:solidFill>
                 <a:srgbClr val="000000"/>
@@ -4162,7 +4317,7 @@
         <p:spPr>
           <a:xfrm>
             <a:off x="2468880" y="1444680"/>
-            <a:ext cx="1965600" cy="475200"/>
+            <a:ext cx="1965240" cy="474840"/>
           </a:xfrm>
           <a:prstGeom prst="rect">
             <a:avLst/>
@@ -4218,7 +4373,7 @@
         <p:spPr>
           <a:xfrm>
             <a:off x="4572000" y="1444680"/>
-            <a:ext cx="2057040" cy="475200"/>
+            <a:ext cx="2056680" cy="474840"/>
           </a:xfrm>
           <a:prstGeom prst="rect">
             <a:avLst/>
@@ -4244,6 +4399,11 @@
             <a:noAutofit/>
           </a:bodyPr>
           <a:p>
+            <a:pPr>
+              <a:lnSpc>
+                <a:spcPct val="100000"/>
+              </a:lnSpc>
+            </a:pPr>
             <a:endParaRPr b="0" lang="en-US" sz="1800" spc="-1" strike="noStrike">
               <a:solidFill>
                 <a:srgbClr val="000000"/>
@@ -4262,7 +4422,7 @@
         <p:spPr>
           <a:xfrm>
             <a:off x="4617720" y="1444680"/>
-            <a:ext cx="1965600" cy="475200"/>
+            <a:ext cx="1965240" cy="474840"/>
           </a:xfrm>
           <a:prstGeom prst="rect">
             <a:avLst/>
@@ -4318,7 +4478,7 @@
         <p:spPr>
           <a:xfrm>
             <a:off x="6720840" y="1444680"/>
-            <a:ext cx="2057040" cy="475200"/>
+            <a:ext cx="2056680" cy="474840"/>
           </a:xfrm>
           <a:prstGeom prst="rect">
             <a:avLst/>
@@ -4344,6 +4504,11 @@
             <a:noAutofit/>
           </a:bodyPr>
           <a:p>
+            <a:pPr>
+              <a:lnSpc>
+                <a:spcPct val="100000"/>
+              </a:lnSpc>
+            </a:pPr>
             <a:endParaRPr b="0" lang="en-US" sz="1800" spc="-1" strike="noStrike">
               <a:solidFill>
                 <a:srgbClr val="000000"/>
@@ -4362,7 +4527,7 @@
         <p:spPr>
           <a:xfrm>
             <a:off x="6766560" y="1444680"/>
-            <a:ext cx="1965600" cy="475200"/>
+            <a:ext cx="1965240" cy="474840"/>
           </a:xfrm>
           <a:prstGeom prst="rect">
             <a:avLst/>
@@ -4418,7 +4583,7 @@
         <p:spPr>
           <a:xfrm>
             <a:off x="274320" y="1956960"/>
-            <a:ext cx="2057040" cy="475200"/>
+            <a:ext cx="2056680" cy="474840"/>
           </a:xfrm>
           <a:prstGeom prst="rect">
             <a:avLst/>
@@ -4444,6 +4609,11 @@
             <a:noAutofit/>
           </a:bodyPr>
           <a:p>
+            <a:pPr>
+              <a:lnSpc>
+                <a:spcPct val="100000"/>
+              </a:lnSpc>
+            </a:pPr>
             <a:endParaRPr b="0" lang="en-US" sz="1800" spc="-1" strike="noStrike">
               <a:solidFill>
                 <a:srgbClr val="000000"/>
@@ -4462,7 +4632,7 @@
         <p:spPr>
           <a:xfrm>
             <a:off x="320040" y="1956960"/>
-            <a:ext cx="1965600" cy="475200"/>
+            <a:ext cx="1965240" cy="474840"/>
           </a:xfrm>
           <a:prstGeom prst="rect">
             <a:avLst/>
@@ -4518,7 +4688,7 @@
         <p:spPr>
           <a:xfrm>
             <a:off x="2423160" y="1956960"/>
-            <a:ext cx="2057040" cy="475200"/>
+            <a:ext cx="2056680" cy="474840"/>
           </a:xfrm>
           <a:prstGeom prst="rect">
             <a:avLst/>
@@ -4544,6 +4714,11 @@
             <a:noAutofit/>
           </a:bodyPr>
           <a:p>
+            <a:pPr>
+              <a:lnSpc>
+                <a:spcPct val="100000"/>
+              </a:lnSpc>
+            </a:pPr>
             <a:endParaRPr b="0" lang="en-US" sz="1800" spc="-1" strike="noStrike">
               <a:solidFill>
                 <a:srgbClr val="000000"/>
@@ -4562,7 +4737,7 @@
         <p:spPr>
           <a:xfrm>
             <a:off x="2468880" y="1956960"/>
-            <a:ext cx="1965600" cy="475200"/>
+            <a:ext cx="1965240" cy="474840"/>
           </a:xfrm>
           <a:prstGeom prst="rect">
             <a:avLst/>
@@ -4618,7 +4793,7 @@
         <p:spPr>
           <a:xfrm>
             <a:off x="4572000" y="1956960"/>
-            <a:ext cx="2057040" cy="475200"/>
+            <a:ext cx="2056680" cy="474840"/>
           </a:xfrm>
           <a:prstGeom prst="rect">
             <a:avLst/>
@@ -4644,6 +4819,11 @@
             <a:noAutofit/>
           </a:bodyPr>
           <a:p>
+            <a:pPr>
+              <a:lnSpc>
+                <a:spcPct val="100000"/>
+              </a:lnSpc>
+            </a:pPr>
             <a:endParaRPr b="0" lang="en-US" sz="1800" spc="-1" strike="noStrike">
               <a:solidFill>
                 <a:srgbClr val="000000"/>
@@ -4662,7 +4842,7 @@
         <p:spPr>
           <a:xfrm>
             <a:off x="4617720" y="1956960"/>
-            <a:ext cx="1965600" cy="475200"/>
+            <a:ext cx="1965240" cy="474840"/>
           </a:xfrm>
           <a:prstGeom prst="rect">
             <a:avLst/>
@@ -4718,7 +4898,7 @@
         <p:spPr>
           <a:xfrm>
             <a:off x="6720840" y="1956960"/>
-            <a:ext cx="2057040" cy="475200"/>
+            <a:ext cx="2056680" cy="474840"/>
           </a:xfrm>
           <a:prstGeom prst="rect">
             <a:avLst/>
@@ -4744,6 +4924,11 @@
             <a:noAutofit/>
           </a:bodyPr>
           <a:p>
+            <a:pPr>
+              <a:lnSpc>
+                <a:spcPct val="100000"/>
+              </a:lnSpc>
+            </a:pPr>
             <a:endParaRPr b="0" lang="en-US" sz="1800" spc="-1" strike="noStrike">
               <a:solidFill>
                 <a:srgbClr val="000000"/>
@@ -4762,7 +4947,7 @@
         <p:spPr>
           <a:xfrm>
             <a:off x="6766560" y="1956960"/>
-            <a:ext cx="1965600" cy="475200"/>
+            <a:ext cx="1965240" cy="474840"/>
           </a:xfrm>
           <a:prstGeom prst="rect">
             <a:avLst/>
@@ -4818,7 +5003,7 @@
         <p:spPr>
           <a:xfrm>
             <a:off x="274320" y="2468880"/>
-            <a:ext cx="2057040" cy="475200"/>
+            <a:ext cx="2056680" cy="474840"/>
           </a:xfrm>
           <a:prstGeom prst="rect">
             <a:avLst/>
@@ -4844,6 +5029,11 @@
             <a:noAutofit/>
           </a:bodyPr>
           <a:p>
+            <a:pPr>
+              <a:lnSpc>
+                <a:spcPct val="100000"/>
+              </a:lnSpc>
+            </a:pPr>
             <a:endParaRPr b="0" lang="en-US" sz="1800" spc="-1" strike="noStrike">
               <a:solidFill>
                 <a:srgbClr val="000000"/>
@@ -4862,7 +5052,7 @@
         <p:spPr>
           <a:xfrm>
             <a:off x="320040" y="2468880"/>
-            <a:ext cx="1965600" cy="475200"/>
+            <a:ext cx="1965240" cy="474840"/>
           </a:xfrm>
           <a:prstGeom prst="rect">
             <a:avLst/>
@@ -4918,7 +5108,7 @@
         <p:spPr>
           <a:xfrm>
             <a:off x="2423160" y="2468880"/>
-            <a:ext cx="2057040" cy="475200"/>
+            <a:ext cx="2056680" cy="474840"/>
           </a:xfrm>
           <a:prstGeom prst="rect">
             <a:avLst/>
@@ -4944,6 +5134,11 @@
             <a:noAutofit/>
           </a:bodyPr>
           <a:p>
+            <a:pPr>
+              <a:lnSpc>
+                <a:spcPct val="100000"/>
+              </a:lnSpc>
+            </a:pPr>
             <a:endParaRPr b="0" lang="en-US" sz="1800" spc="-1" strike="noStrike">
               <a:solidFill>
                 <a:srgbClr val="000000"/>
@@ -4962,7 +5157,7 @@
         <p:spPr>
           <a:xfrm>
             <a:off x="2468880" y="2468880"/>
-            <a:ext cx="1965600" cy="475200"/>
+            <a:ext cx="1965240" cy="474840"/>
           </a:xfrm>
           <a:prstGeom prst="rect">
             <a:avLst/>
@@ -5018,7 +5213,7 @@
         <p:spPr>
           <a:xfrm>
             <a:off x="4572000" y="2468880"/>
-            <a:ext cx="2057040" cy="475200"/>
+            <a:ext cx="2056680" cy="474840"/>
           </a:xfrm>
           <a:prstGeom prst="rect">
             <a:avLst/>
@@ -5044,6 +5239,11 @@
             <a:noAutofit/>
           </a:bodyPr>
           <a:p>
+            <a:pPr>
+              <a:lnSpc>
+                <a:spcPct val="100000"/>
+              </a:lnSpc>
+            </a:pPr>
             <a:endParaRPr b="0" lang="en-US" sz="1800" spc="-1" strike="noStrike">
               <a:solidFill>
                 <a:srgbClr val="000000"/>
@@ -5062,7 +5262,7 @@
         <p:spPr>
           <a:xfrm>
             <a:off x="4617720" y="2468880"/>
-            <a:ext cx="1965600" cy="475200"/>
+            <a:ext cx="1965240" cy="474840"/>
           </a:xfrm>
           <a:prstGeom prst="rect">
             <a:avLst/>
@@ -5118,7 +5318,7 @@
         <p:spPr>
           <a:xfrm>
             <a:off x="6720840" y="2468880"/>
-            <a:ext cx="2057040" cy="475200"/>
+            <a:ext cx="2056680" cy="474840"/>
           </a:xfrm>
           <a:prstGeom prst="rect">
             <a:avLst/>
@@ -5144,6 +5344,11 @@
             <a:noAutofit/>
           </a:bodyPr>
           <a:p>
+            <a:pPr>
+              <a:lnSpc>
+                <a:spcPct val="100000"/>
+              </a:lnSpc>
+            </a:pPr>
             <a:endParaRPr b="0" lang="en-US" sz="1800" spc="-1" strike="noStrike">
               <a:solidFill>
                 <a:srgbClr val="000000"/>
@@ -5162,7 +5367,7 @@
         <p:spPr>
           <a:xfrm>
             <a:off x="6766560" y="2468880"/>
-            <a:ext cx="1965600" cy="475200"/>
+            <a:ext cx="1965240" cy="474840"/>
           </a:xfrm>
           <a:prstGeom prst="rect">
             <a:avLst/>
@@ -5218,7 +5423,7 @@
         <p:spPr>
           <a:xfrm>
             <a:off x="274320" y="2980800"/>
-            <a:ext cx="2057040" cy="475200"/>
+            <a:ext cx="2056680" cy="474840"/>
           </a:xfrm>
           <a:prstGeom prst="rect">
             <a:avLst/>
@@ -5244,6 +5449,11 @@
             <a:noAutofit/>
           </a:bodyPr>
           <a:p>
+            <a:pPr>
+              <a:lnSpc>
+                <a:spcPct val="100000"/>
+              </a:lnSpc>
+            </a:pPr>
             <a:endParaRPr b="0" lang="en-US" sz="1800" spc="-1" strike="noStrike">
               <a:solidFill>
                 <a:srgbClr val="000000"/>
@@ -5262,7 +5472,7 @@
         <p:spPr>
           <a:xfrm>
             <a:off x="320040" y="2980800"/>
-            <a:ext cx="1965600" cy="475200"/>
+            <a:ext cx="1965240" cy="474840"/>
           </a:xfrm>
           <a:prstGeom prst="rect">
             <a:avLst/>
@@ -5318,7 +5528,7 @@
         <p:spPr>
           <a:xfrm>
             <a:off x="2423160" y="2980800"/>
-            <a:ext cx="2057040" cy="475200"/>
+            <a:ext cx="2056680" cy="474840"/>
           </a:xfrm>
           <a:prstGeom prst="rect">
             <a:avLst/>
@@ -5344,6 +5554,11 @@
             <a:noAutofit/>
           </a:bodyPr>
           <a:p>
+            <a:pPr>
+              <a:lnSpc>
+                <a:spcPct val="100000"/>
+              </a:lnSpc>
+            </a:pPr>
             <a:endParaRPr b="0" lang="en-US" sz="1800" spc="-1" strike="noStrike">
               <a:solidFill>
                 <a:srgbClr val="000000"/>
@@ -5362,7 +5577,7 @@
         <p:spPr>
           <a:xfrm>
             <a:off x="2468880" y="2980800"/>
-            <a:ext cx="1965600" cy="475200"/>
+            <a:ext cx="1965240" cy="474840"/>
           </a:xfrm>
           <a:prstGeom prst="rect">
             <a:avLst/>
@@ -5418,7 +5633,7 @@
         <p:spPr>
           <a:xfrm>
             <a:off x="4572000" y="2980800"/>
-            <a:ext cx="2057040" cy="475200"/>
+            <a:ext cx="2056680" cy="474840"/>
           </a:xfrm>
           <a:prstGeom prst="rect">
             <a:avLst/>
@@ -5444,6 +5659,11 @@
             <a:noAutofit/>
           </a:bodyPr>
           <a:p>
+            <a:pPr>
+              <a:lnSpc>
+                <a:spcPct val="100000"/>
+              </a:lnSpc>
+            </a:pPr>
             <a:endParaRPr b="0" lang="en-US" sz="1800" spc="-1" strike="noStrike">
               <a:solidFill>
                 <a:srgbClr val="000000"/>
@@ -5462,7 +5682,7 @@
         <p:spPr>
           <a:xfrm>
             <a:off x="4617720" y="2980800"/>
-            <a:ext cx="1965600" cy="475200"/>
+            <a:ext cx="1965240" cy="474840"/>
           </a:xfrm>
           <a:prstGeom prst="rect">
             <a:avLst/>
@@ -5518,7 +5738,7 @@
         <p:spPr>
           <a:xfrm>
             <a:off x="6720840" y="2980800"/>
-            <a:ext cx="2057040" cy="475200"/>
+            <a:ext cx="2056680" cy="474840"/>
           </a:xfrm>
           <a:prstGeom prst="rect">
             <a:avLst/>
@@ -5544,6 +5764,11 @@
             <a:noAutofit/>
           </a:bodyPr>
           <a:p>
+            <a:pPr>
+              <a:lnSpc>
+                <a:spcPct val="100000"/>
+              </a:lnSpc>
+            </a:pPr>
             <a:endParaRPr b="0" lang="en-US" sz="1800" spc="-1" strike="noStrike">
               <a:solidFill>
                 <a:srgbClr val="000000"/>
@@ -5562,7 +5787,7 @@
         <p:spPr>
           <a:xfrm>
             <a:off x="6766560" y="2980800"/>
-            <a:ext cx="1965600" cy="475200"/>
+            <a:ext cx="1965240" cy="474840"/>
           </a:xfrm>
           <a:prstGeom prst="rect">
             <a:avLst/>
@@ -5618,7 +5843,7 @@
         <p:spPr>
           <a:xfrm>
             <a:off x="274320" y="3493080"/>
-            <a:ext cx="2057040" cy="475200"/>
+            <a:ext cx="2056680" cy="474840"/>
           </a:xfrm>
           <a:prstGeom prst="rect">
             <a:avLst/>
@@ -5644,6 +5869,11 @@
             <a:noAutofit/>
           </a:bodyPr>
           <a:p>
+            <a:pPr>
+              <a:lnSpc>
+                <a:spcPct val="100000"/>
+              </a:lnSpc>
+            </a:pPr>
             <a:endParaRPr b="0" lang="en-US" sz="1800" spc="-1" strike="noStrike">
               <a:solidFill>
                 <a:srgbClr val="000000"/>
@@ -5662,7 +5892,7 @@
         <p:spPr>
           <a:xfrm>
             <a:off x="320040" y="3493080"/>
-            <a:ext cx="1965600" cy="475200"/>
+            <a:ext cx="1965240" cy="474840"/>
           </a:xfrm>
           <a:prstGeom prst="rect">
             <a:avLst/>
@@ -5718,7 +5948,7 @@
         <p:spPr>
           <a:xfrm>
             <a:off x="2423160" y="3493080"/>
-            <a:ext cx="2057040" cy="475200"/>
+            <a:ext cx="2056680" cy="474840"/>
           </a:xfrm>
           <a:prstGeom prst="rect">
             <a:avLst/>
@@ -5744,6 +5974,11 @@
             <a:noAutofit/>
           </a:bodyPr>
           <a:p>
+            <a:pPr>
+              <a:lnSpc>
+                <a:spcPct val="100000"/>
+              </a:lnSpc>
+            </a:pPr>
             <a:endParaRPr b="0" lang="en-US" sz="1800" spc="-1" strike="noStrike">
               <a:solidFill>
                 <a:srgbClr val="000000"/>
@@ -5762,7 +5997,7 @@
         <p:spPr>
           <a:xfrm>
             <a:off x="2468880" y="3493080"/>
-            <a:ext cx="1965600" cy="475200"/>
+            <a:ext cx="1965240" cy="474840"/>
           </a:xfrm>
           <a:prstGeom prst="rect">
             <a:avLst/>
@@ -5818,7 +6053,7 @@
         <p:spPr>
           <a:xfrm>
             <a:off x="4572000" y="3493080"/>
-            <a:ext cx="2057040" cy="475200"/>
+            <a:ext cx="2056680" cy="474840"/>
           </a:xfrm>
           <a:prstGeom prst="rect">
             <a:avLst/>
@@ -5844,6 +6079,11 @@
             <a:noAutofit/>
           </a:bodyPr>
           <a:p>
+            <a:pPr>
+              <a:lnSpc>
+                <a:spcPct val="100000"/>
+              </a:lnSpc>
+            </a:pPr>
             <a:endParaRPr b="0" lang="en-US" sz="1800" spc="-1" strike="noStrike">
               <a:solidFill>
                 <a:srgbClr val="000000"/>
@@ -5862,7 +6102,7 @@
         <p:spPr>
           <a:xfrm>
             <a:off x="4617720" y="3493080"/>
-            <a:ext cx="1965600" cy="475200"/>
+            <a:ext cx="1965240" cy="474840"/>
           </a:xfrm>
           <a:prstGeom prst="rect">
             <a:avLst/>
@@ -5918,7 +6158,7 @@
         <p:spPr>
           <a:xfrm>
             <a:off x="6720840" y="3493080"/>
-            <a:ext cx="2057040" cy="475200"/>
+            <a:ext cx="2056680" cy="474840"/>
           </a:xfrm>
           <a:prstGeom prst="rect">
             <a:avLst/>
@@ -5944,6 +6184,11 @@
             <a:noAutofit/>
           </a:bodyPr>
           <a:p>
+            <a:pPr>
+              <a:lnSpc>
+                <a:spcPct val="100000"/>
+              </a:lnSpc>
+            </a:pPr>
             <a:endParaRPr b="0" lang="en-US" sz="1800" spc="-1" strike="noStrike">
               <a:solidFill>
                 <a:srgbClr val="000000"/>
@@ -5962,7 +6207,7 @@
         <p:spPr>
           <a:xfrm>
             <a:off x="6766560" y="3493080"/>
-            <a:ext cx="1965600" cy="475200"/>
+            <a:ext cx="1965240" cy="474840"/>
           </a:xfrm>
           <a:prstGeom prst="rect">
             <a:avLst/>
@@ -6018,7 +6263,7 @@
         <p:spPr>
           <a:xfrm>
             <a:off x="274320" y="4005000"/>
-            <a:ext cx="2057040" cy="475200"/>
+            <a:ext cx="2056680" cy="474840"/>
           </a:xfrm>
           <a:prstGeom prst="rect">
             <a:avLst/>
@@ -6044,6 +6289,11 @@
             <a:noAutofit/>
           </a:bodyPr>
           <a:p>
+            <a:pPr>
+              <a:lnSpc>
+                <a:spcPct val="100000"/>
+              </a:lnSpc>
+            </a:pPr>
             <a:endParaRPr b="0" lang="en-US" sz="1800" spc="-1" strike="noStrike">
               <a:solidFill>
                 <a:srgbClr val="000000"/>
@@ -6062,7 +6312,7 @@
         <p:spPr>
           <a:xfrm>
             <a:off x="320040" y="4005000"/>
-            <a:ext cx="1965600" cy="475200"/>
+            <a:ext cx="1965240" cy="474840"/>
           </a:xfrm>
           <a:prstGeom prst="rect">
             <a:avLst/>
@@ -6118,7 +6368,7 @@
         <p:spPr>
           <a:xfrm>
             <a:off x="2423160" y="4005000"/>
-            <a:ext cx="2057040" cy="475200"/>
+            <a:ext cx="2056680" cy="474840"/>
           </a:xfrm>
           <a:prstGeom prst="rect">
             <a:avLst/>
@@ -6144,6 +6394,11 @@
             <a:noAutofit/>
           </a:bodyPr>
           <a:p>
+            <a:pPr>
+              <a:lnSpc>
+                <a:spcPct val="100000"/>
+              </a:lnSpc>
+            </a:pPr>
             <a:endParaRPr b="0" lang="en-US" sz="1800" spc="-1" strike="noStrike">
               <a:solidFill>
                 <a:srgbClr val="000000"/>
@@ -6162,7 +6417,7 @@
         <p:spPr>
           <a:xfrm>
             <a:off x="2468880" y="4005000"/>
-            <a:ext cx="1965600" cy="475200"/>
+            <a:ext cx="1965240" cy="474840"/>
           </a:xfrm>
           <a:prstGeom prst="rect">
             <a:avLst/>
@@ -6218,7 +6473,7 @@
         <p:spPr>
           <a:xfrm>
             <a:off x="4572000" y="4005000"/>
-            <a:ext cx="2057040" cy="475200"/>
+            <a:ext cx="2056680" cy="474840"/>
           </a:xfrm>
           <a:prstGeom prst="rect">
             <a:avLst/>
@@ -6244,6 +6499,11 @@
             <a:noAutofit/>
           </a:bodyPr>
           <a:p>
+            <a:pPr>
+              <a:lnSpc>
+                <a:spcPct val="100000"/>
+              </a:lnSpc>
+            </a:pPr>
             <a:endParaRPr b="0" lang="en-US" sz="1800" spc="-1" strike="noStrike">
               <a:solidFill>
                 <a:srgbClr val="000000"/>
@@ -6262,7 +6522,7 @@
         <p:spPr>
           <a:xfrm>
             <a:off x="4617720" y="4005000"/>
-            <a:ext cx="1965600" cy="475200"/>
+            <a:ext cx="1965240" cy="474840"/>
           </a:xfrm>
           <a:prstGeom prst="rect">
             <a:avLst/>
@@ -6318,7 +6578,7 @@
         <p:spPr>
           <a:xfrm>
             <a:off x="6720840" y="4005000"/>
-            <a:ext cx="2057040" cy="475200"/>
+            <a:ext cx="2056680" cy="474840"/>
           </a:xfrm>
           <a:prstGeom prst="rect">
             <a:avLst/>
@@ -6344,6 +6604,11 @@
             <a:noAutofit/>
           </a:bodyPr>
           <a:p>
+            <a:pPr>
+              <a:lnSpc>
+                <a:spcPct val="100000"/>
+              </a:lnSpc>
+            </a:pPr>
             <a:endParaRPr b="0" lang="en-US" sz="1800" spc="-1" strike="noStrike">
               <a:solidFill>
                 <a:srgbClr val="000000"/>
@@ -6362,7 +6627,7 @@
         <p:spPr>
           <a:xfrm>
             <a:off x="6766560" y="4005000"/>
-            <a:ext cx="1965600" cy="475200"/>
+            <a:ext cx="1965240" cy="474840"/>
           </a:xfrm>
           <a:prstGeom prst="rect">
             <a:avLst/>
@@ -6418,7 +6683,7 @@
         <p:spPr>
           <a:xfrm>
             <a:off x="274320" y="4517280"/>
-            <a:ext cx="2057040" cy="475200"/>
+            <a:ext cx="2056680" cy="474840"/>
           </a:xfrm>
           <a:prstGeom prst="rect">
             <a:avLst/>
@@ -6444,6 +6709,11 @@
             <a:noAutofit/>
           </a:bodyPr>
           <a:p>
+            <a:pPr>
+              <a:lnSpc>
+                <a:spcPct val="100000"/>
+              </a:lnSpc>
+            </a:pPr>
             <a:endParaRPr b="0" lang="en-US" sz="1800" spc="-1" strike="noStrike">
               <a:solidFill>
                 <a:srgbClr val="000000"/>
@@ -6462,7 +6732,7 @@
         <p:spPr>
           <a:xfrm>
             <a:off x="320040" y="4517280"/>
-            <a:ext cx="1965600" cy="475200"/>
+            <a:ext cx="1965240" cy="474840"/>
           </a:xfrm>
           <a:prstGeom prst="rect">
             <a:avLst/>
@@ -6518,7 +6788,7 @@
         <p:spPr>
           <a:xfrm>
             <a:off x="2423160" y="4517280"/>
-            <a:ext cx="2057040" cy="475200"/>
+            <a:ext cx="2056680" cy="474840"/>
           </a:xfrm>
           <a:prstGeom prst="rect">
             <a:avLst/>
@@ -6544,6 +6814,11 @@
             <a:noAutofit/>
           </a:bodyPr>
           <a:p>
+            <a:pPr>
+              <a:lnSpc>
+                <a:spcPct val="100000"/>
+              </a:lnSpc>
+            </a:pPr>
             <a:endParaRPr b="0" lang="en-US" sz="1800" spc="-1" strike="noStrike">
               <a:solidFill>
                 <a:srgbClr val="000000"/>
@@ -6562,7 +6837,7 @@
         <p:spPr>
           <a:xfrm>
             <a:off x="2468880" y="4517280"/>
-            <a:ext cx="1965600" cy="475200"/>
+            <a:ext cx="1965240" cy="474840"/>
           </a:xfrm>
           <a:prstGeom prst="rect">
             <a:avLst/>
@@ -6618,7 +6893,7 @@
         <p:spPr>
           <a:xfrm>
             <a:off x="4572000" y="4517280"/>
-            <a:ext cx="2057040" cy="475200"/>
+            <a:ext cx="2056680" cy="474840"/>
           </a:xfrm>
           <a:prstGeom prst="rect">
             <a:avLst/>
@@ -6644,6 +6919,11 @@
             <a:noAutofit/>
           </a:bodyPr>
           <a:p>
+            <a:pPr>
+              <a:lnSpc>
+                <a:spcPct val="100000"/>
+              </a:lnSpc>
+            </a:pPr>
             <a:endParaRPr b="0" lang="en-US" sz="1800" spc="-1" strike="noStrike">
               <a:solidFill>
                 <a:srgbClr val="000000"/>
@@ -6662,7 +6942,7 @@
         <p:spPr>
           <a:xfrm>
             <a:off x="4617720" y="4517280"/>
-            <a:ext cx="1965600" cy="475200"/>
+            <a:ext cx="1965240" cy="474840"/>
           </a:xfrm>
           <a:prstGeom prst="rect">
             <a:avLst/>
@@ -6718,7 +6998,7 @@
         <p:spPr>
           <a:xfrm>
             <a:off x="6720840" y="4517280"/>
-            <a:ext cx="2057040" cy="475200"/>
+            <a:ext cx="2056680" cy="474840"/>
           </a:xfrm>
           <a:prstGeom prst="rect">
             <a:avLst/>
@@ -6744,6 +7024,11 @@
             <a:noAutofit/>
           </a:bodyPr>
           <a:p>
+            <a:pPr>
+              <a:lnSpc>
+                <a:spcPct val="100000"/>
+              </a:lnSpc>
+            </a:pPr>
             <a:endParaRPr b="0" lang="en-US" sz="1800" spc="-1" strike="noStrike">
               <a:solidFill>
                 <a:srgbClr val="000000"/>
@@ -6762,7 +7047,7 @@
         <p:spPr>
           <a:xfrm>
             <a:off x="6766560" y="4517280"/>
-            <a:ext cx="1965600" cy="475200"/>
+            <a:ext cx="1965240" cy="474840"/>
           </a:xfrm>
           <a:prstGeom prst="rect">
             <a:avLst/>
@@ -6855,7 +7140,7 @@
         <p:spPr>
           <a:xfrm>
             <a:off x="0" y="0"/>
-            <a:ext cx="9143640" cy="776880"/>
+            <a:ext cx="9143280" cy="776520"/>
           </a:xfrm>
           <a:prstGeom prst="rect">
             <a:avLst/>
@@ -6881,6 +7166,11 @@
             <a:noAutofit/>
           </a:bodyPr>
           <a:p>
+            <a:pPr>
+              <a:lnSpc>
+                <a:spcPct val="100000"/>
+              </a:lnSpc>
+            </a:pPr>
             <a:endParaRPr b="0" lang="en-US" sz="1800" spc="-1" strike="noStrike">
               <a:solidFill>
                 <a:srgbClr val="ffffff"/>
@@ -6899,7 +7189,7 @@
         <p:spPr>
           <a:xfrm>
             <a:off x="365760" y="0"/>
-            <a:ext cx="8412120" cy="776880"/>
+            <a:ext cx="8411760" cy="776520"/>
           </a:xfrm>
           <a:prstGeom prst="rect">
             <a:avLst/>
@@ -6929,7 +7219,7 @@
               </a:tabLst>
             </a:pPr>
             <a:r>
-              <a:rPr b="1" lang="en-US" sz="2000" spc="199" strike="noStrike">
+              <a:rPr b="1" lang="en-US" sz="2000" spc="197" strike="noStrike">
                 <a:solidFill>
                   <a:srgbClr val="ffffff"/>
                 </a:solidFill>
@@ -6955,7 +7245,7 @@
         <p:spPr>
           <a:xfrm>
             <a:off x="274320" y="960120"/>
-            <a:ext cx="4205880" cy="1215720"/>
+            <a:ext cx="4205520" cy="1215360"/>
           </a:xfrm>
           <a:prstGeom prst="rect">
             <a:avLst/>
@@ -6988,6 +7278,11 @@
             <a:noAutofit/>
           </a:bodyPr>
           <a:p>
+            <a:pPr>
+              <a:lnSpc>
+                <a:spcPct val="100000"/>
+              </a:lnSpc>
+            </a:pPr>
             <a:endParaRPr b="0" lang="en-US" sz="1800" spc="-1" strike="noStrike">
               <a:solidFill>
                 <a:srgbClr val="ffffff"/>
@@ -7006,7 +7301,7 @@
         <p:spPr>
           <a:xfrm>
             <a:off x="274320" y="960120"/>
-            <a:ext cx="658080" cy="1215720"/>
+            <a:ext cx="657720" cy="1215360"/>
           </a:xfrm>
           <a:prstGeom prst="rect">
             <a:avLst/>
@@ -7032,6 +7327,11 @@
             <a:noAutofit/>
           </a:bodyPr>
           <a:p>
+            <a:pPr>
+              <a:lnSpc>
+                <a:spcPct val="100000"/>
+              </a:lnSpc>
+            </a:pPr>
             <a:endParaRPr b="0" lang="en-US" sz="1800" spc="-1" strike="noStrike">
               <a:solidFill>
                 <a:srgbClr val="ffffff"/>
@@ -7050,7 +7350,7 @@
         <p:spPr>
           <a:xfrm>
             <a:off x="274320" y="960120"/>
-            <a:ext cx="658080" cy="1215720"/>
+            <a:ext cx="657720" cy="1215360"/>
           </a:xfrm>
           <a:prstGeom prst="rect">
             <a:avLst/>
@@ -7106,7 +7406,7 @@
         <p:spPr>
           <a:xfrm>
             <a:off x="1024200" y="1033200"/>
-            <a:ext cx="3337200" cy="347040"/>
+            <a:ext cx="3336840" cy="346680"/>
           </a:xfrm>
           <a:prstGeom prst="rect">
             <a:avLst/>
@@ -7171,7 +7471,7 @@
         <p:spPr>
           <a:xfrm>
             <a:off x="1024200" y="1417320"/>
-            <a:ext cx="3337200" cy="685440"/>
+            <a:ext cx="3336840" cy="685080"/>
           </a:xfrm>
           <a:prstGeom prst="rect">
             <a:avLst/>
@@ -7236,7 +7536,7 @@
         <p:spPr>
           <a:xfrm>
             <a:off x="4754880" y="960120"/>
-            <a:ext cx="4205880" cy="1215720"/>
+            <a:ext cx="4205520" cy="1215360"/>
           </a:xfrm>
           <a:prstGeom prst="rect">
             <a:avLst/>
@@ -7269,6 +7569,11 @@
             <a:noAutofit/>
           </a:bodyPr>
           <a:p>
+            <a:pPr>
+              <a:lnSpc>
+                <a:spcPct val="100000"/>
+              </a:lnSpc>
+            </a:pPr>
             <a:endParaRPr b="0" lang="en-US" sz="1800" spc="-1" strike="noStrike">
               <a:solidFill>
                 <a:srgbClr val="ffffff"/>
@@ -7287,7 +7592,7 @@
         <p:spPr>
           <a:xfrm>
             <a:off x="4754880" y="960120"/>
-            <a:ext cx="658080" cy="1215720"/>
+            <a:ext cx="657720" cy="1215360"/>
           </a:xfrm>
           <a:prstGeom prst="rect">
             <a:avLst/>
@@ -7313,6 +7618,11 @@
             <a:noAutofit/>
           </a:bodyPr>
           <a:p>
+            <a:pPr>
+              <a:lnSpc>
+                <a:spcPct val="100000"/>
+              </a:lnSpc>
+            </a:pPr>
             <a:endParaRPr b="0" lang="en-US" sz="1800" spc="-1" strike="noStrike">
               <a:solidFill>
                 <a:srgbClr val="ffffff"/>
@@ -7331,7 +7641,7 @@
         <p:spPr>
           <a:xfrm>
             <a:off x="4754880" y="960120"/>
-            <a:ext cx="658080" cy="1215720"/>
+            <a:ext cx="657720" cy="1215360"/>
           </a:xfrm>
           <a:prstGeom prst="rect">
             <a:avLst/>
@@ -7387,7 +7697,7 @@
         <p:spPr>
           <a:xfrm>
             <a:off x="5504760" y="1033200"/>
-            <a:ext cx="3337200" cy="347040"/>
+            <a:ext cx="3336840" cy="346680"/>
           </a:xfrm>
           <a:prstGeom prst="rect">
             <a:avLst/>
@@ -7452,7 +7762,7 @@
         <p:spPr>
           <a:xfrm>
             <a:off x="5504760" y="1417320"/>
-            <a:ext cx="3337200" cy="685440"/>
+            <a:ext cx="3336840" cy="685080"/>
           </a:xfrm>
           <a:prstGeom prst="rect">
             <a:avLst/>
@@ -7517,7 +7827,7 @@
         <p:spPr>
           <a:xfrm>
             <a:off x="274320" y="2313360"/>
-            <a:ext cx="4205880" cy="1215720"/>
+            <a:ext cx="4205520" cy="1215360"/>
           </a:xfrm>
           <a:prstGeom prst="rect">
             <a:avLst/>
@@ -7550,6 +7860,11 @@
             <a:noAutofit/>
           </a:bodyPr>
           <a:p>
+            <a:pPr>
+              <a:lnSpc>
+                <a:spcPct val="100000"/>
+              </a:lnSpc>
+            </a:pPr>
             <a:endParaRPr b="0" lang="en-US" sz="1800" spc="-1" strike="noStrike">
               <a:solidFill>
                 <a:srgbClr val="ffffff"/>
@@ -7568,7 +7883,7 @@
         <p:spPr>
           <a:xfrm>
             <a:off x="274320" y="2313360"/>
-            <a:ext cx="658080" cy="1215720"/>
+            <a:ext cx="657720" cy="1215360"/>
           </a:xfrm>
           <a:prstGeom prst="rect">
             <a:avLst/>
@@ -7594,6 +7909,11 @@
             <a:noAutofit/>
           </a:bodyPr>
           <a:p>
+            <a:pPr>
+              <a:lnSpc>
+                <a:spcPct val="100000"/>
+              </a:lnSpc>
+            </a:pPr>
             <a:endParaRPr b="0" lang="en-US" sz="1800" spc="-1" strike="noStrike">
               <a:solidFill>
                 <a:srgbClr val="ffffff"/>
@@ -7612,7 +7932,7 @@
         <p:spPr>
           <a:xfrm>
             <a:off x="274320" y="2313360"/>
-            <a:ext cx="658080" cy="1215720"/>
+            <a:ext cx="657720" cy="1215360"/>
           </a:xfrm>
           <a:prstGeom prst="rect">
             <a:avLst/>
@@ -7668,7 +7988,7 @@
         <p:spPr>
           <a:xfrm>
             <a:off x="1024200" y="2386440"/>
-            <a:ext cx="3337200" cy="347040"/>
+            <a:ext cx="3336840" cy="346680"/>
           </a:xfrm>
           <a:prstGeom prst="rect">
             <a:avLst/>
@@ -7733,7 +8053,7 @@
         <p:spPr>
           <a:xfrm>
             <a:off x="1024200" y="2770560"/>
-            <a:ext cx="3337200" cy="685440"/>
+            <a:ext cx="3336840" cy="685080"/>
           </a:xfrm>
           <a:prstGeom prst="rect">
             <a:avLst/>
@@ -7798,7 +8118,7 @@
         <p:spPr>
           <a:xfrm>
             <a:off x="4754880" y="2313360"/>
-            <a:ext cx="4205880" cy="1215720"/>
+            <a:ext cx="4205520" cy="1215360"/>
           </a:xfrm>
           <a:prstGeom prst="rect">
             <a:avLst/>
@@ -7831,6 +8151,11 @@
             <a:noAutofit/>
           </a:bodyPr>
           <a:p>
+            <a:pPr>
+              <a:lnSpc>
+                <a:spcPct val="100000"/>
+              </a:lnSpc>
+            </a:pPr>
             <a:endParaRPr b="0" lang="en-US" sz="1800" spc="-1" strike="noStrike">
               <a:solidFill>
                 <a:srgbClr val="ffffff"/>
@@ -7849,7 +8174,7 @@
         <p:spPr>
           <a:xfrm>
             <a:off x="4754880" y="2313360"/>
-            <a:ext cx="658080" cy="1215720"/>
+            <a:ext cx="657720" cy="1215360"/>
           </a:xfrm>
           <a:prstGeom prst="rect">
             <a:avLst/>
@@ -7875,6 +8200,11 @@
             <a:noAutofit/>
           </a:bodyPr>
           <a:p>
+            <a:pPr>
+              <a:lnSpc>
+                <a:spcPct val="100000"/>
+              </a:lnSpc>
+            </a:pPr>
             <a:endParaRPr b="0" lang="en-US" sz="1800" spc="-1" strike="noStrike">
               <a:solidFill>
                 <a:srgbClr val="ffffff"/>
@@ -7893,7 +8223,7 @@
         <p:spPr>
           <a:xfrm>
             <a:off x="4754880" y="2313360"/>
-            <a:ext cx="658080" cy="1215720"/>
+            <a:ext cx="657720" cy="1215360"/>
           </a:xfrm>
           <a:prstGeom prst="rect">
             <a:avLst/>
@@ -7949,7 +8279,7 @@
         <p:spPr>
           <a:xfrm>
             <a:off x="5504760" y="2386440"/>
-            <a:ext cx="3337200" cy="347040"/>
+            <a:ext cx="3336840" cy="346680"/>
           </a:xfrm>
           <a:prstGeom prst="rect">
             <a:avLst/>
@@ -8014,7 +8344,7 @@
         <p:spPr>
           <a:xfrm>
             <a:off x="5504760" y="2770560"/>
-            <a:ext cx="3337200" cy="685440"/>
+            <a:ext cx="3336840" cy="685080"/>
           </a:xfrm>
           <a:prstGeom prst="rect">
             <a:avLst/>
@@ -8079,7 +8409,7 @@
         <p:spPr>
           <a:xfrm>
             <a:off x="274320" y="3666600"/>
-            <a:ext cx="4205880" cy="1215720"/>
+            <a:ext cx="4205520" cy="1215360"/>
           </a:xfrm>
           <a:prstGeom prst="rect">
             <a:avLst/>
@@ -8112,6 +8442,11 @@
             <a:noAutofit/>
           </a:bodyPr>
           <a:p>
+            <a:pPr>
+              <a:lnSpc>
+                <a:spcPct val="100000"/>
+              </a:lnSpc>
+            </a:pPr>
             <a:endParaRPr b="0" lang="en-US" sz="1800" spc="-1" strike="noStrike">
               <a:solidFill>
                 <a:srgbClr val="ffffff"/>
@@ -8130,7 +8465,7 @@
         <p:spPr>
           <a:xfrm>
             <a:off x="274320" y="3666600"/>
-            <a:ext cx="658080" cy="1215720"/>
+            <a:ext cx="657720" cy="1215360"/>
           </a:xfrm>
           <a:prstGeom prst="rect">
             <a:avLst/>
@@ -8156,6 +8491,11 @@
             <a:noAutofit/>
           </a:bodyPr>
           <a:p>
+            <a:pPr>
+              <a:lnSpc>
+                <a:spcPct val="100000"/>
+              </a:lnSpc>
+            </a:pPr>
             <a:endParaRPr b="0" lang="en-US" sz="1800" spc="-1" strike="noStrike">
               <a:solidFill>
                 <a:srgbClr val="ffffff"/>
@@ -8174,7 +8514,7 @@
         <p:spPr>
           <a:xfrm>
             <a:off x="274320" y="3666600"/>
-            <a:ext cx="658080" cy="1215720"/>
+            <a:ext cx="657720" cy="1215360"/>
           </a:xfrm>
           <a:prstGeom prst="rect">
             <a:avLst/>
@@ -8230,7 +8570,7 @@
         <p:spPr>
           <a:xfrm>
             <a:off x="1024200" y="3740040"/>
-            <a:ext cx="3337200" cy="347040"/>
+            <a:ext cx="3336840" cy="346680"/>
           </a:xfrm>
           <a:prstGeom prst="rect">
             <a:avLst/>
@@ -8295,7 +8635,7 @@
         <p:spPr>
           <a:xfrm>
             <a:off x="1024200" y="4123800"/>
-            <a:ext cx="3337200" cy="685440"/>
+            <a:ext cx="3336840" cy="685080"/>
           </a:xfrm>
           <a:prstGeom prst="rect">
             <a:avLst/>
@@ -8360,7 +8700,7 @@
         <p:spPr>
           <a:xfrm>
             <a:off x="4754880" y="3666600"/>
-            <a:ext cx="4205880" cy="1215720"/>
+            <a:ext cx="4205520" cy="1215360"/>
           </a:xfrm>
           <a:prstGeom prst="rect">
             <a:avLst/>
@@ -8393,6 +8733,11 @@
             <a:noAutofit/>
           </a:bodyPr>
           <a:p>
+            <a:pPr>
+              <a:lnSpc>
+                <a:spcPct val="100000"/>
+              </a:lnSpc>
+            </a:pPr>
             <a:endParaRPr b="0" lang="en-US" sz="1800" spc="-1" strike="noStrike">
               <a:solidFill>
                 <a:srgbClr val="ffffff"/>
@@ -8411,7 +8756,7 @@
         <p:spPr>
           <a:xfrm>
             <a:off x="4754880" y="3666600"/>
-            <a:ext cx="658080" cy="1215720"/>
+            <a:ext cx="657720" cy="1215360"/>
           </a:xfrm>
           <a:prstGeom prst="rect">
             <a:avLst/>
@@ -8437,6 +8782,11 @@
             <a:noAutofit/>
           </a:bodyPr>
           <a:p>
+            <a:pPr>
+              <a:lnSpc>
+                <a:spcPct val="100000"/>
+              </a:lnSpc>
+            </a:pPr>
             <a:endParaRPr b="0" lang="en-US" sz="1800" spc="-1" strike="noStrike">
               <a:solidFill>
                 <a:srgbClr val="ffffff"/>
@@ -8455,7 +8805,7 @@
         <p:spPr>
           <a:xfrm>
             <a:off x="4754880" y="3666600"/>
-            <a:ext cx="658080" cy="1215720"/>
+            <a:ext cx="657720" cy="1215360"/>
           </a:xfrm>
           <a:prstGeom prst="rect">
             <a:avLst/>
@@ -8511,7 +8861,7 @@
         <p:spPr>
           <a:xfrm>
             <a:off x="5504760" y="3740040"/>
-            <a:ext cx="3337200" cy="347040"/>
+            <a:ext cx="3336840" cy="346680"/>
           </a:xfrm>
           <a:prstGeom prst="rect">
             <a:avLst/>
@@ -8576,7 +8926,7 @@
         <p:spPr>
           <a:xfrm>
             <a:off x="5504760" y="4123800"/>
-            <a:ext cx="3337200" cy="685440"/>
+            <a:ext cx="3336840" cy="685080"/>
           </a:xfrm>
           <a:prstGeom prst="rect">
             <a:avLst/>
@@ -8678,7 +9028,7 @@
         <p:spPr>
           <a:xfrm>
             <a:off x="0" y="0"/>
-            <a:ext cx="9143640" cy="776880"/>
+            <a:ext cx="9143280" cy="776520"/>
           </a:xfrm>
           <a:prstGeom prst="rect">
             <a:avLst/>
@@ -8704,6 +9054,11 @@
             <a:noAutofit/>
           </a:bodyPr>
           <a:p>
+            <a:pPr>
+              <a:lnSpc>
+                <a:spcPct val="100000"/>
+              </a:lnSpc>
+            </a:pPr>
             <a:endParaRPr b="0" lang="en-US" sz="1800" spc="-1" strike="noStrike">
               <a:solidFill>
                 <a:srgbClr val="ffffff"/>
@@ -8722,7 +9077,7 @@
         <p:spPr>
           <a:xfrm>
             <a:off x="365760" y="0"/>
-            <a:ext cx="8412120" cy="776880"/>
+            <a:ext cx="8411760" cy="776520"/>
           </a:xfrm>
           <a:prstGeom prst="rect">
             <a:avLst/>
@@ -8752,7 +9107,7 @@
               </a:tabLst>
             </a:pPr>
             <a:r>
-              <a:rPr b="1" lang="en-US" sz="2000" spc="299" strike="noStrike">
+              <a:rPr b="1" lang="en-US" sz="2000" spc="296" strike="noStrike">
                 <a:solidFill>
                   <a:srgbClr val="ffffff"/>
                 </a:solidFill>
@@ -8778,7 +9133,7 @@
         <p:spPr>
           <a:xfrm>
             <a:off x="274320" y="914400"/>
-            <a:ext cx="4205880" cy="3913200"/>
+            <a:ext cx="4205520" cy="3912840"/>
           </a:xfrm>
           <a:prstGeom prst="rect">
             <a:avLst/>
@@ -8811,6 +9166,11 @@
             <a:noAutofit/>
           </a:bodyPr>
           <a:p>
+            <a:pPr>
+              <a:lnSpc>
+                <a:spcPct val="100000"/>
+              </a:lnSpc>
+            </a:pPr>
             <a:endParaRPr b="0" lang="en-US" sz="1800" spc="-1" strike="noStrike">
               <a:solidFill>
                 <a:srgbClr val="000000"/>
@@ -8829,7 +9189,7 @@
         <p:spPr>
           <a:xfrm>
             <a:off x="274320" y="914400"/>
-            <a:ext cx="4205880" cy="502560"/>
+            <a:ext cx="4205520" cy="502200"/>
           </a:xfrm>
           <a:prstGeom prst="rect">
             <a:avLst/>
@@ -8855,6 +9215,11 @@
             <a:noAutofit/>
           </a:bodyPr>
           <a:p>
+            <a:pPr>
+              <a:lnSpc>
+                <a:spcPct val="100000"/>
+              </a:lnSpc>
+            </a:pPr>
             <a:endParaRPr b="0" lang="en-US" sz="1800" spc="-1" strike="noStrike">
               <a:solidFill>
                 <a:srgbClr val="ffffff"/>
@@ -8873,7 +9238,7 @@
         <p:spPr>
           <a:xfrm>
             <a:off x="274320" y="914400"/>
-            <a:ext cx="4205880" cy="502560"/>
+            <a:ext cx="4205520" cy="502200"/>
           </a:xfrm>
           <a:prstGeom prst="rect">
             <a:avLst/>
@@ -8938,7 +9303,7 @@
         <p:spPr>
           <a:xfrm>
             <a:off x="438840" y="1591200"/>
-            <a:ext cx="292320" cy="292320"/>
+            <a:ext cx="291960" cy="291960"/>
           </a:xfrm>
           <a:prstGeom prst="ellipse">
             <a:avLst/>
@@ -8964,6 +9329,11 @@
             <a:noAutofit/>
           </a:bodyPr>
           <a:p>
+            <a:pPr>
+              <a:lnSpc>
+                <a:spcPct val="100000"/>
+              </a:lnSpc>
+            </a:pPr>
             <a:endParaRPr b="0" lang="en-US" sz="1800" spc="-1" strike="noStrike">
               <a:solidFill>
                 <a:srgbClr val="ffffff"/>
@@ -8982,7 +9352,7 @@
         <p:spPr>
           <a:xfrm>
             <a:off x="822960" y="1517760"/>
-            <a:ext cx="3520080" cy="255600"/>
+            <a:ext cx="3519720" cy="255240"/>
           </a:xfrm>
           <a:prstGeom prst="rect">
             <a:avLst/>
@@ -9038,7 +9408,7 @@
         <p:spPr>
           <a:xfrm>
             <a:off x="822960" y="1783080"/>
-            <a:ext cx="3520080" cy="200880"/>
+            <a:ext cx="3519720" cy="200520"/>
           </a:xfrm>
           <a:prstGeom prst="rect">
             <a:avLst/>
@@ -9094,7 +9464,7 @@
         <p:spPr>
           <a:xfrm>
             <a:off x="438840" y="2139840"/>
-            <a:ext cx="292320" cy="292320"/>
+            <a:ext cx="291960" cy="291960"/>
           </a:xfrm>
           <a:prstGeom prst="ellipse">
             <a:avLst/>
@@ -9120,6 +9490,11 @@
             <a:noAutofit/>
           </a:bodyPr>
           <a:p>
+            <a:pPr>
+              <a:lnSpc>
+                <a:spcPct val="100000"/>
+              </a:lnSpc>
+            </a:pPr>
             <a:endParaRPr b="0" lang="en-US" sz="1800" spc="-1" strike="noStrike">
               <a:solidFill>
                 <a:srgbClr val="ffffff"/>
@@ -9138,7 +9513,7 @@
         <p:spPr>
           <a:xfrm>
             <a:off x="822960" y="2066400"/>
-            <a:ext cx="3520080" cy="255600"/>
+            <a:ext cx="3519720" cy="255240"/>
           </a:xfrm>
           <a:prstGeom prst="rect">
             <a:avLst/>
@@ -9194,7 +9569,7 @@
         <p:spPr>
           <a:xfrm>
             <a:off x="822960" y="2331720"/>
-            <a:ext cx="3520080" cy="200880"/>
+            <a:ext cx="3519720" cy="200520"/>
           </a:xfrm>
           <a:prstGeom prst="rect">
             <a:avLst/>
@@ -9250,7 +9625,7 @@
         <p:spPr>
           <a:xfrm>
             <a:off x="438840" y="2688480"/>
-            <a:ext cx="292320" cy="292320"/>
+            <a:ext cx="291960" cy="291960"/>
           </a:xfrm>
           <a:prstGeom prst="ellipse">
             <a:avLst/>
@@ -9276,6 +9651,11 @@
             <a:noAutofit/>
           </a:bodyPr>
           <a:p>
+            <a:pPr>
+              <a:lnSpc>
+                <a:spcPct val="100000"/>
+              </a:lnSpc>
+            </a:pPr>
             <a:endParaRPr b="0" lang="en-US" sz="1800" spc="-1" strike="noStrike">
               <a:solidFill>
                 <a:srgbClr val="ffffff"/>
@@ -9294,7 +9674,7 @@
         <p:spPr>
           <a:xfrm>
             <a:off x="822960" y="2615040"/>
-            <a:ext cx="3520080" cy="255600"/>
+            <a:ext cx="3519720" cy="255240"/>
           </a:xfrm>
           <a:prstGeom prst="rect">
             <a:avLst/>
@@ -9350,7 +9730,7 @@
         <p:spPr>
           <a:xfrm>
             <a:off x="822960" y="2880360"/>
-            <a:ext cx="3520080" cy="200880"/>
+            <a:ext cx="3519720" cy="200520"/>
           </a:xfrm>
           <a:prstGeom prst="rect">
             <a:avLst/>
@@ -9406,7 +9786,7 @@
         <p:spPr>
           <a:xfrm>
             <a:off x="438840" y="3237120"/>
-            <a:ext cx="292320" cy="292320"/>
+            <a:ext cx="291960" cy="291960"/>
           </a:xfrm>
           <a:prstGeom prst="ellipse">
             <a:avLst/>
@@ -9432,6 +9812,11 @@
             <a:noAutofit/>
           </a:bodyPr>
           <a:p>
+            <a:pPr>
+              <a:lnSpc>
+                <a:spcPct val="100000"/>
+              </a:lnSpc>
+            </a:pPr>
             <a:endParaRPr b="0" lang="en-US" sz="1800" spc="-1" strike="noStrike">
               <a:solidFill>
                 <a:srgbClr val="ffffff"/>
@@ -9450,7 +9835,7 @@
         <p:spPr>
           <a:xfrm>
             <a:off x="822960" y="3163680"/>
-            <a:ext cx="3520080" cy="255600"/>
+            <a:ext cx="3519720" cy="255240"/>
           </a:xfrm>
           <a:prstGeom prst="rect">
             <a:avLst/>
@@ -9506,7 +9891,7 @@
         <p:spPr>
           <a:xfrm>
             <a:off x="822960" y="3429000"/>
-            <a:ext cx="3520080" cy="200880"/>
+            <a:ext cx="3519720" cy="200520"/>
           </a:xfrm>
           <a:prstGeom prst="rect">
             <a:avLst/>
@@ -9562,7 +9947,7 @@
         <p:spPr>
           <a:xfrm>
             <a:off x="438840" y="3785760"/>
-            <a:ext cx="292320" cy="292320"/>
+            <a:ext cx="291960" cy="291960"/>
           </a:xfrm>
           <a:prstGeom prst="ellipse">
             <a:avLst/>
@@ -9588,6 +9973,11 @@
             <a:noAutofit/>
           </a:bodyPr>
           <a:p>
+            <a:pPr>
+              <a:lnSpc>
+                <a:spcPct val="100000"/>
+              </a:lnSpc>
+            </a:pPr>
             <a:endParaRPr b="0" lang="en-US" sz="1800" spc="-1" strike="noStrike">
               <a:solidFill>
                 <a:srgbClr val="ffffff"/>
@@ -9606,7 +9996,7 @@
         <p:spPr>
           <a:xfrm>
             <a:off x="822960" y="3712320"/>
-            <a:ext cx="3520080" cy="255600"/>
+            <a:ext cx="3519720" cy="255240"/>
           </a:xfrm>
           <a:prstGeom prst="rect">
             <a:avLst/>
@@ -9662,7 +10052,7 @@
         <p:spPr>
           <a:xfrm>
             <a:off x="822960" y="3977640"/>
-            <a:ext cx="3520080" cy="200880"/>
+            <a:ext cx="3519720" cy="200520"/>
           </a:xfrm>
           <a:prstGeom prst="rect">
             <a:avLst/>
@@ -9718,7 +10108,7 @@
         <p:spPr>
           <a:xfrm>
             <a:off x="438840" y="4334400"/>
-            <a:ext cx="292320" cy="292320"/>
+            <a:ext cx="291960" cy="291960"/>
           </a:xfrm>
           <a:prstGeom prst="ellipse">
             <a:avLst/>
@@ -9744,6 +10134,11 @@
             <a:noAutofit/>
           </a:bodyPr>
           <a:p>
+            <a:pPr>
+              <a:lnSpc>
+                <a:spcPct val="100000"/>
+              </a:lnSpc>
+            </a:pPr>
             <a:endParaRPr b="0" lang="en-US" sz="1800" spc="-1" strike="noStrike">
               <a:solidFill>
                 <a:srgbClr val="ffffff"/>
@@ -9762,7 +10157,7 @@
         <p:spPr>
           <a:xfrm>
             <a:off x="822960" y="4260960"/>
-            <a:ext cx="3520080" cy="255600"/>
+            <a:ext cx="3519720" cy="255240"/>
           </a:xfrm>
           <a:prstGeom prst="rect">
             <a:avLst/>
@@ -9818,7 +10213,7 @@
         <p:spPr>
           <a:xfrm>
             <a:off x="822960" y="4526280"/>
-            <a:ext cx="3520080" cy="200880"/>
+            <a:ext cx="3519720" cy="200520"/>
           </a:xfrm>
           <a:prstGeom prst="rect">
             <a:avLst/>
@@ -9874,7 +10269,7 @@
         <p:spPr>
           <a:xfrm>
             <a:off x="4663440" y="914400"/>
-            <a:ext cx="4205880" cy="3913200"/>
+            <a:ext cx="4205520" cy="3912840"/>
           </a:xfrm>
           <a:prstGeom prst="rect">
             <a:avLst/>
@@ -9907,6 +10302,11 @@
             <a:noAutofit/>
           </a:bodyPr>
           <a:p>
+            <a:pPr>
+              <a:lnSpc>
+                <a:spcPct val="100000"/>
+              </a:lnSpc>
+            </a:pPr>
             <a:endParaRPr b="0" lang="en-US" sz="1800" spc="-1" strike="noStrike">
               <a:solidFill>
                 <a:srgbClr val="000000"/>
@@ -9925,7 +10325,7 @@
         <p:spPr>
           <a:xfrm>
             <a:off x="4663440" y="914400"/>
-            <a:ext cx="4205880" cy="502560"/>
+            <a:ext cx="4205520" cy="502200"/>
           </a:xfrm>
           <a:prstGeom prst="rect">
             <a:avLst/>
@@ -9951,6 +10351,11 @@
             <a:noAutofit/>
           </a:bodyPr>
           <a:p>
+            <a:pPr>
+              <a:lnSpc>
+                <a:spcPct val="100000"/>
+              </a:lnSpc>
+            </a:pPr>
             <a:endParaRPr b="0" lang="en-US" sz="1800" spc="-1" strike="noStrike">
               <a:solidFill>
                 <a:srgbClr val="000000"/>
@@ -9969,7 +10374,7 @@
         <p:spPr>
           <a:xfrm>
             <a:off x="4663440" y="914400"/>
-            <a:ext cx="4205880" cy="502560"/>
+            <a:ext cx="4205520" cy="502200"/>
           </a:xfrm>
           <a:prstGeom prst="rect">
             <a:avLst/>
@@ -10034,7 +10439,7 @@
         <p:spPr>
           <a:xfrm>
             <a:off x="4827960" y="1591200"/>
-            <a:ext cx="292320" cy="292320"/>
+            <a:ext cx="291960" cy="291960"/>
           </a:xfrm>
           <a:prstGeom prst="ellipse">
             <a:avLst/>
@@ -10060,6 +10465,11 @@
             <a:noAutofit/>
           </a:bodyPr>
           <a:p>
+            <a:pPr>
+              <a:lnSpc>
+                <a:spcPct val="100000"/>
+              </a:lnSpc>
+            </a:pPr>
             <a:endParaRPr b="0" lang="en-US" sz="1800" spc="-1" strike="noStrike">
               <a:solidFill>
                 <a:srgbClr val="000000"/>
@@ -10078,7 +10488,7 @@
         <p:spPr>
           <a:xfrm>
             <a:off x="5212080" y="1517760"/>
-            <a:ext cx="3520080" cy="255600"/>
+            <a:ext cx="3519720" cy="255240"/>
           </a:xfrm>
           <a:prstGeom prst="rect">
             <a:avLst/>
@@ -10134,7 +10544,7 @@
         <p:spPr>
           <a:xfrm>
             <a:off x="5212080" y="1783080"/>
-            <a:ext cx="3520080" cy="200880"/>
+            <a:ext cx="3519720" cy="200520"/>
           </a:xfrm>
           <a:prstGeom prst="rect">
             <a:avLst/>
@@ -10190,7 +10600,7 @@
         <p:spPr>
           <a:xfrm>
             <a:off x="4827960" y="2139840"/>
-            <a:ext cx="292320" cy="292320"/>
+            <a:ext cx="291960" cy="291960"/>
           </a:xfrm>
           <a:prstGeom prst="ellipse">
             <a:avLst/>
@@ -10216,6 +10626,11 @@
             <a:noAutofit/>
           </a:bodyPr>
           <a:p>
+            <a:pPr>
+              <a:lnSpc>
+                <a:spcPct val="100000"/>
+              </a:lnSpc>
+            </a:pPr>
             <a:endParaRPr b="0" lang="en-US" sz="1800" spc="-1" strike="noStrike">
               <a:solidFill>
                 <a:srgbClr val="000000"/>
@@ -10234,7 +10649,7 @@
         <p:spPr>
           <a:xfrm>
             <a:off x="5212080" y="2066400"/>
-            <a:ext cx="3520080" cy="255600"/>
+            <a:ext cx="3519720" cy="255240"/>
           </a:xfrm>
           <a:prstGeom prst="rect">
             <a:avLst/>
@@ -10290,7 +10705,7 @@
         <p:spPr>
           <a:xfrm>
             <a:off x="5212080" y="2331720"/>
-            <a:ext cx="3520080" cy="200880"/>
+            <a:ext cx="3519720" cy="200520"/>
           </a:xfrm>
           <a:prstGeom prst="rect">
             <a:avLst/>
@@ -10346,7 +10761,7 @@
         <p:spPr>
           <a:xfrm>
             <a:off x="4827960" y="2688480"/>
-            <a:ext cx="292320" cy="292320"/>
+            <a:ext cx="291960" cy="291960"/>
           </a:xfrm>
           <a:prstGeom prst="ellipse">
             <a:avLst/>
@@ -10372,6 +10787,11 @@
             <a:noAutofit/>
           </a:bodyPr>
           <a:p>
+            <a:pPr>
+              <a:lnSpc>
+                <a:spcPct val="100000"/>
+              </a:lnSpc>
+            </a:pPr>
             <a:endParaRPr b="0" lang="en-US" sz="1800" spc="-1" strike="noStrike">
               <a:solidFill>
                 <a:srgbClr val="000000"/>
@@ -10390,7 +10810,7 @@
         <p:spPr>
           <a:xfrm>
             <a:off x="5212080" y="2615040"/>
-            <a:ext cx="3520080" cy="255600"/>
+            <a:ext cx="3519720" cy="255240"/>
           </a:xfrm>
           <a:prstGeom prst="rect">
             <a:avLst/>
@@ -10446,7 +10866,7 @@
         <p:spPr>
           <a:xfrm>
             <a:off x="5212080" y="2880360"/>
-            <a:ext cx="3520080" cy="200880"/>
+            <a:ext cx="3519720" cy="200520"/>
           </a:xfrm>
           <a:prstGeom prst="rect">
             <a:avLst/>
@@ -10502,7 +10922,7 @@
         <p:spPr>
           <a:xfrm>
             <a:off x="4827960" y="3237120"/>
-            <a:ext cx="292320" cy="292320"/>
+            <a:ext cx="291960" cy="291960"/>
           </a:xfrm>
           <a:prstGeom prst="ellipse">
             <a:avLst/>
@@ -10528,6 +10948,11 @@
             <a:noAutofit/>
           </a:bodyPr>
           <a:p>
+            <a:pPr>
+              <a:lnSpc>
+                <a:spcPct val="100000"/>
+              </a:lnSpc>
+            </a:pPr>
             <a:endParaRPr b="0" lang="en-US" sz="1800" spc="-1" strike="noStrike">
               <a:solidFill>
                 <a:srgbClr val="000000"/>
@@ -10546,7 +10971,7 @@
         <p:spPr>
           <a:xfrm>
             <a:off x="5212080" y="3163680"/>
-            <a:ext cx="3520080" cy="255600"/>
+            <a:ext cx="3519720" cy="255240"/>
           </a:xfrm>
           <a:prstGeom prst="rect">
             <a:avLst/>
@@ -10602,7 +11027,7 @@
         <p:spPr>
           <a:xfrm>
             <a:off x="5212080" y="3429000"/>
-            <a:ext cx="3520080" cy="200880"/>
+            <a:ext cx="3519720" cy="200520"/>
           </a:xfrm>
           <a:prstGeom prst="rect">
             <a:avLst/>
@@ -10658,7 +11083,7 @@
         <p:spPr>
           <a:xfrm>
             <a:off x="4827960" y="3785760"/>
-            <a:ext cx="292320" cy="292320"/>
+            <a:ext cx="291960" cy="291960"/>
           </a:xfrm>
           <a:prstGeom prst="ellipse">
             <a:avLst/>
@@ -10684,6 +11109,11 @@
             <a:noAutofit/>
           </a:bodyPr>
           <a:p>
+            <a:pPr>
+              <a:lnSpc>
+                <a:spcPct val="100000"/>
+              </a:lnSpc>
+            </a:pPr>
             <a:endParaRPr b="0" lang="en-US" sz="1800" spc="-1" strike="noStrike">
               <a:solidFill>
                 <a:srgbClr val="000000"/>
@@ -10702,7 +11132,7 @@
         <p:spPr>
           <a:xfrm>
             <a:off x="5212080" y="3712320"/>
-            <a:ext cx="3520080" cy="255600"/>
+            <a:ext cx="3519720" cy="255240"/>
           </a:xfrm>
           <a:prstGeom prst="rect">
             <a:avLst/>
@@ -10758,7 +11188,7 @@
         <p:spPr>
           <a:xfrm>
             <a:off x="5212080" y="3977640"/>
-            <a:ext cx="3520080" cy="200880"/>
+            <a:ext cx="3519720" cy="200520"/>
           </a:xfrm>
           <a:prstGeom prst="rect">
             <a:avLst/>
@@ -10814,7 +11244,7 @@
         <p:spPr>
           <a:xfrm>
             <a:off x="4827960" y="4334400"/>
-            <a:ext cx="292320" cy="292320"/>
+            <a:ext cx="291960" cy="291960"/>
           </a:xfrm>
           <a:prstGeom prst="ellipse">
             <a:avLst/>
@@ -10840,6 +11270,11 @@
             <a:noAutofit/>
           </a:bodyPr>
           <a:p>
+            <a:pPr>
+              <a:lnSpc>
+                <a:spcPct val="100000"/>
+              </a:lnSpc>
+            </a:pPr>
             <a:endParaRPr b="0" lang="en-US" sz="1800" spc="-1" strike="noStrike">
               <a:solidFill>
                 <a:srgbClr val="000000"/>
@@ -10858,7 +11293,7 @@
         <p:spPr>
           <a:xfrm>
             <a:off x="5212080" y="4260960"/>
-            <a:ext cx="3520080" cy="255600"/>
+            <a:ext cx="3519720" cy="255240"/>
           </a:xfrm>
           <a:prstGeom prst="rect">
             <a:avLst/>
@@ -10914,7 +11349,7 @@
         <p:spPr>
           <a:xfrm>
             <a:off x="5212080" y="4526280"/>
-            <a:ext cx="3520080" cy="200880"/>
+            <a:ext cx="3519720" cy="200520"/>
           </a:xfrm>
           <a:prstGeom prst="rect">
             <a:avLst/>
@@ -11007,7 +11442,7 @@
         <p:spPr>
           <a:xfrm>
             <a:off x="-1371600" y="2286000"/>
-            <a:ext cx="4114440" cy="4114440"/>
+            <a:ext cx="4114080" cy="4114080"/>
           </a:xfrm>
           <a:prstGeom prst="ellipse">
             <a:avLst/>
@@ -11035,6 +11470,11 @@
             <a:noAutofit/>
           </a:bodyPr>
           <a:p>
+            <a:pPr>
+              <a:lnSpc>
+                <a:spcPct val="100000"/>
+              </a:lnSpc>
+            </a:pPr>
             <a:endParaRPr b="0" lang="en-US" sz="1800" spc="-1" strike="noStrike">
               <a:solidFill>
                 <a:srgbClr val="ffffff"/>
@@ -11053,7 +11493,7 @@
         <p:spPr>
           <a:xfrm>
             <a:off x="7132320" y="-914400"/>
-            <a:ext cx="3657240" cy="3657240"/>
+            <a:ext cx="3656880" cy="3656880"/>
           </a:xfrm>
           <a:prstGeom prst="ellipse">
             <a:avLst/>
@@ -11081,6 +11521,11 @@
             <a:noAutofit/>
           </a:bodyPr>
           <a:p>
+            <a:pPr>
+              <a:lnSpc>
+                <a:spcPct val="100000"/>
+              </a:lnSpc>
+            </a:pPr>
             <a:endParaRPr b="0" lang="en-US" sz="1800" spc="-1" strike="noStrike">
               <a:solidFill>
                 <a:srgbClr val="ffffff"/>
@@ -11099,7 +11544,7 @@
         <p:spPr>
           <a:xfrm>
             <a:off x="0" y="0"/>
-            <a:ext cx="200880" cy="5143320"/>
+            <a:ext cx="200520" cy="5142960"/>
           </a:xfrm>
           <a:prstGeom prst="rect">
             <a:avLst/>
@@ -11125,6 +11570,11 @@
             <a:noAutofit/>
           </a:bodyPr>
           <a:p>
+            <a:pPr>
+              <a:lnSpc>
+                <a:spcPct val="100000"/>
+              </a:lnSpc>
+            </a:pPr>
             <a:endParaRPr b="0" lang="en-US" sz="1800" spc="-1" strike="noStrike">
               <a:solidFill>
                 <a:srgbClr val="ffffff"/>
@@ -11143,7 +11593,7 @@
         <p:spPr>
           <a:xfrm>
             <a:off x="0" y="0"/>
-            <a:ext cx="9143640" cy="776880"/>
+            <a:ext cx="9143280" cy="776520"/>
           </a:xfrm>
           <a:prstGeom prst="rect">
             <a:avLst/>
@@ -11169,6 +11619,11 @@
             <a:noAutofit/>
           </a:bodyPr>
           <a:p>
+            <a:pPr>
+              <a:lnSpc>
+                <a:spcPct val="100000"/>
+              </a:lnSpc>
+            </a:pPr>
             <a:endParaRPr b="0" lang="en-US" sz="1800" spc="-1" strike="noStrike">
               <a:solidFill>
                 <a:srgbClr val="ffffff"/>
@@ -11187,7 +11642,7 @@
         <p:spPr>
           <a:xfrm>
             <a:off x="365760" y="0"/>
-            <a:ext cx="8412120" cy="776880"/>
+            <a:ext cx="8411760" cy="776520"/>
           </a:xfrm>
           <a:prstGeom prst="rect">
             <a:avLst/>
@@ -11217,7 +11672,7 @@
               </a:tabLst>
             </a:pPr>
             <a:r>
-              <a:rPr b="1" lang="en-US" sz="2000" spc="299" strike="noStrike">
+              <a:rPr b="1" lang="en-US" sz="2000" spc="296" strike="noStrike">
                 <a:solidFill>
                   <a:srgbClr val="ffffff"/>
                 </a:solidFill>
@@ -11243,7 +11698,7 @@
         <p:spPr>
           <a:xfrm>
             <a:off x="411480" y="960120"/>
-            <a:ext cx="8320680" cy="566640"/>
+            <a:ext cx="8320320" cy="566280"/>
           </a:xfrm>
           <a:prstGeom prst="rect">
             <a:avLst/>
@@ -11271,6 +11726,11 @@
             <a:noAutofit/>
           </a:bodyPr>
           <a:p>
+            <a:pPr>
+              <a:lnSpc>
+                <a:spcPct val="100000"/>
+              </a:lnSpc>
+            </a:pPr>
             <a:endParaRPr b="0" lang="en-US" sz="1800" spc="-1" strike="noStrike">
               <a:solidFill>
                 <a:srgbClr val="ffffff"/>
@@ -11289,7 +11749,7 @@
         <p:spPr>
           <a:xfrm>
             <a:off x="502920" y="1078920"/>
-            <a:ext cx="328680" cy="328680"/>
+            <a:ext cx="328320" cy="328320"/>
           </a:xfrm>
           <a:prstGeom prst="ellipse">
             <a:avLst/>
@@ -11315,6 +11775,11 @@
             <a:noAutofit/>
           </a:bodyPr>
           <a:p>
+            <a:pPr>
+              <a:lnSpc>
+                <a:spcPct val="100000"/>
+              </a:lnSpc>
+            </a:pPr>
             <a:endParaRPr b="0" lang="en-US" sz="1800" spc="-1" strike="noStrike">
               <a:solidFill>
                 <a:srgbClr val="ffffff"/>
@@ -11333,7 +11798,7 @@
         <p:spPr>
           <a:xfrm>
             <a:off x="502920" y="1078920"/>
-            <a:ext cx="328680" cy="328680"/>
+            <a:ext cx="328320" cy="328320"/>
           </a:xfrm>
           <a:prstGeom prst="rect">
             <a:avLst/>
@@ -11389,7 +11854,7 @@
         <p:spPr>
           <a:xfrm>
             <a:off x="960120" y="960120"/>
-            <a:ext cx="7607520" cy="566640"/>
+            <a:ext cx="7607160" cy="566280"/>
           </a:xfrm>
           <a:prstGeom prst="rect">
             <a:avLst/>
@@ -11445,7 +11910,7 @@
         <p:spPr>
           <a:xfrm>
             <a:off x="411480" y="1627560"/>
-            <a:ext cx="8320680" cy="566640"/>
+            <a:ext cx="8320320" cy="566280"/>
           </a:xfrm>
           <a:prstGeom prst="rect">
             <a:avLst/>
@@ -11473,6 +11938,11 @@
             <a:noAutofit/>
           </a:bodyPr>
           <a:p>
+            <a:pPr>
+              <a:lnSpc>
+                <a:spcPct val="100000"/>
+              </a:lnSpc>
+            </a:pPr>
             <a:endParaRPr b="0" lang="en-US" sz="1800" spc="-1" strike="noStrike">
               <a:solidFill>
                 <a:srgbClr val="ffffff"/>
@@ -11491,7 +11961,7 @@
         <p:spPr>
           <a:xfrm>
             <a:off x="502920" y="1746360"/>
-            <a:ext cx="328680" cy="328680"/>
+            <a:ext cx="328320" cy="328320"/>
           </a:xfrm>
           <a:prstGeom prst="ellipse">
             <a:avLst/>
@@ -11517,6 +11987,11 @@
             <a:noAutofit/>
           </a:bodyPr>
           <a:p>
+            <a:pPr>
+              <a:lnSpc>
+                <a:spcPct val="100000"/>
+              </a:lnSpc>
+            </a:pPr>
             <a:endParaRPr b="0" lang="en-US" sz="1800" spc="-1" strike="noStrike">
               <a:solidFill>
                 <a:srgbClr val="ffffff"/>
@@ -11535,7 +12010,7 @@
         <p:spPr>
           <a:xfrm>
             <a:off x="502920" y="1746360"/>
-            <a:ext cx="328680" cy="328680"/>
+            <a:ext cx="328320" cy="328320"/>
           </a:xfrm>
           <a:prstGeom prst="rect">
             <a:avLst/>
@@ -11591,7 +12066,7 @@
         <p:spPr>
           <a:xfrm>
             <a:off x="960120" y="1627560"/>
-            <a:ext cx="7607520" cy="566640"/>
+            <a:ext cx="7607160" cy="566280"/>
           </a:xfrm>
           <a:prstGeom prst="rect">
             <a:avLst/>
@@ -11647,7 +12122,7 @@
         <p:spPr>
           <a:xfrm>
             <a:off x="411480" y="2295000"/>
-            <a:ext cx="8320680" cy="566640"/>
+            <a:ext cx="8320320" cy="566280"/>
           </a:xfrm>
           <a:prstGeom prst="rect">
             <a:avLst/>
@@ -11675,6 +12150,11 @@
             <a:noAutofit/>
           </a:bodyPr>
           <a:p>
+            <a:pPr>
+              <a:lnSpc>
+                <a:spcPct val="100000"/>
+              </a:lnSpc>
+            </a:pPr>
             <a:endParaRPr b="0" lang="en-US" sz="1800" spc="-1" strike="noStrike">
               <a:solidFill>
                 <a:srgbClr val="ffffff"/>
@@ -11693,7 +12173,7 @@
         <p:spPr>
           <a:xfrm>
             <a:off x="502920" y="2414160"/>
-            <a:ext cx="328680" cy="328680"/>
+            <a:ext cx="328320" cy="328320"/>
           </a:xfrm>
           <a:prstGeom prst="ellipse">
             <a:avLst/>
@@ -11719,6 +12199,11 @@
             <a:noAutofit/>
           </a:bodyPr>
           <a:p>
+            <a:pPr>
+              <a:lnSpc>
+                <a:spcPct val="100000"/>
+              </a:lnSpc>
+            </a:pPr>
             <a:endParaRPr b="0" lang="en-US" sz="1800" spc="-1" strike="noStrike">
               <a:solidFill>
                 <a:srgbClr val="000000"/>
@@ -11737,7 +12222,7 @@
         <p:spPr>
           <a:xfrm>
             <a:off x="502920" y="2414160"/>
-            <a:ext cx="328680" cy="328680"/>
+            <a:ext cx="328320" cy="328320"/>
           </a:xfrm>
           <a:prstGeom prst="rect">
             <a:avLst/>
@@ -11793,7 +12278,7 @@
         <p:spPr>
           <a:xfrm>
             <a:off x="960120" y="2295000"/>
-            <a:ext cx="7607520" cy="566640"/>
+            <a:ext cx="7607160" cy="566280"/>
           </a:xfrm>
           <a:prstGeom prst="rect">
             <a:avLst/>
@@ -11849,7 +12334,7 @@
         <p:spPr>
           <a:xfrm>
             <a:off x="411480" y="2962800"/>
-            <a:ext cx="8320680" cy="566640"/>
+            <a:ext cx="8320320" cy="566280"/>
           </a:xfrm>
           <a:prstGeom prst="rect">
             <a:avLst/>
@@ -11877,6 +12362,11 @@
             <a:noAutofit/>
           </a:bodyPr>
           <a:p>
+            <a:pPr>
+              <a:lnSpc>
+                <a:spcPct val="100000"/>
+              </a:lnSpc>
+            </a:pPr>
             <a:endParaRPr b="0" lang="en-US" sz="1800" spc="-1" strike="noStrike">
               <a:solidFill>
                 <a:srgbClr val="ffffff"/>
@@ -11895,7 +12385,7 @@
         <p:spPr>
           <a:xfrm>
             <a:off x="502920" y="3081600"/>
-            <a:ext cx="328680" cy="328680"/>
+            <a:ext cx="328320" cy="328320"/>
           </a:xfrm>
           <a:prstGeom prst="ellipse">
             <a:avLst/>
@@ -11921,6 +12411,11 @@
             <a:noAutofit/>
           </a:bodyPr>
           <a:p>
+            <a:pPr>
+              <a:lnSpc>
+                <a:spcPct val="100000"/>
+              </a:lnSpc>
+            </a:pPr>
             <a:endParaRPr b="0" lang="en-US" sz="1800" spc="-1" strike="noStrike">
               <a:solidFill>
                 <a:srgbClr val="ffffff"/>
@@ -11939,7 +12434,7 @@
         <p:spPr>
           <a:xfrm>
             <a:off x="502920" y="3081600"/>
-            <a:ext cx="328680" cy="328680"/>
+            <a:ext cx="328320" cy="328320"/>
           </a:xfrm>
           <a:prstGeom prst="rect">
             <a:avLst/>
@@ -11995,7 +12490,7 @@
         <p:spPr>
           <a:xfrm>
             <a:off x="960120" y="2962800"/>
-            <a:ext cx="7607520" cy="566640"/>
+            <a:ext cx="7607160" cy="566280"/>
           </a:xfrm>
           <a:prstGeom prst="rect">
             <a:avLst/>
@@ -12051,7 +12546,7 @@
         <p:spPr>
           <a:xfrm>
             <a:off x="411480" y="3630240"/>
-            <a:ext cx="8320680" cy="566640"/>
+            <a:ext cx="8320320" cy="566280"/>
           </a:xfrm>
           <a:prstGeom prst="rect">
             <a:avLst/>
@@ -12079,6 +12574,11 @@
             <a:noAutofit/>
           </a:bodyPr>
           <a:p>
+            <a:pPr>
+              <a:lnSpc>
+                <a:spcPct val="100000"/>
+              </a:lnSpc>
+            </a:pPr>
             <a:endParaRPr b="0" lang="en-US" sz="1800" spc="-1" strike="noStrike">
               <a:solidFill>
                 <a:srgbClr val="ffffff"/>
@@ -12097,7 +12597,7 @@
         <p:spPr>
           <a:xfrm>
             <a:off x="502920" y="3749040"/>
-            <a:ext cx="328680" cy="328680"/>
+            <a:ext cx="328320" cy="328320"/>
           </a:xfrm>
           <a:prstGeom prst="ellipse">
             <a:avLst/>
@@ -12123,6 +12623,11 @@
             <a:noAutofit/>
           </a:bodyPr>
           <a:p>
+            <a:pPr>
+              <a:lnSpc>
+                <a:spcPct val="100000"/>
+              </a:lnSpc>
+            </a:pPr>
             <a:endParaRPr b="0" lang="en-US" sz="1800" spc="-1" strike="noStrike">
               <a:solidFill>
                 <a:srgbClr val="ffffff"/>
@@ -12141,7 +12646,7 @@
         <p:spPr>
           <a:xfrm>
             <a:off x="502920" y="3749040"/>
-            <a:ext cx="328680" cy="328680"/>
+            <a:ext cx="328320" cy="328320"/>
           </a:xfrm>
           <a:prstGeom prst="rect">
             <a:avLst/>
@@ -12197,7 +12702,7 @@
         <p:spPr>
           <a:xfrm>
             <a:off x="960120" y="3630240"/>
-            <a:ext cx="7607520" cy="566640"/>
+            <a:ext cx="7607160" cy="566280"/>
           </a:xfrm>
           <a:prstGeom prst="rect">
             <a:avLst/>
@@ -12253,7 +12758,7 @@
         <p:spPr>
           <a:xfrm>
             <a:off x="411480" y="4297680"/>
-            <a:ext cx="8320680" cy="566640"/>
+            <a:ext cx="8320320" cy="566280"/>
           </a:xfrm>
           <a:prstGeom prst="rect">
             <a:avLst/>
@@ -12281,6 +12786,11 @@
             <a:noAutofit/>
           </a:bodyPr>
           <a:p>
+            <a:pPr>
+              <a:lnSpc>
+                <a:spcPct val="100000"/>
+              </a:lnSpc>
+            </a:pPr>
             <a:endParaRPr b="0" lang="en-US" sz="1800" spc="-1" strike="noStrike">
               <a:solidFill>
                 <a:srgbClr val="ffffff"/>
@@ -12299,7 +12809,7 @@
         <p:spPr>
           <a:xfrm>
             <a:off x="502920" y="4416480"/>
-            <a:ext cx="328680" cy="328680"/>
+            <a:ext cx="328320" cy="328320"/>
           </a:xfrm>
           <a:prstGeom prst="ellipse">
             <a:avLst/>
@@ -12325,6 +12835,11 @@
             <a:noAutofit/>
           </a:bodyPr>
           <a:p>
+            <a:pPr>
+              <a:lnSpc>
+                <a:spcPct val="100000"/>
+              </a:lnSpc>
+            </a:pPr>
             <a:endParaRPr b="0" lang="en-US" sz="1800" spc="-1" strike="noStrike">
               <a:solidFill>
                 <a:srgbClr val="ffffff"/>
@@ -12343,7 +12858,7 @@
         <p:spPr>
           <a:xfrm>
             <a:off x="502920" y="4416480"/>
-            <a:ext cx="328680" cy="328680"/>
+            <a:ext cx="328320" cy="328320"/>
           </a:xfrm>
           <a:prstGeom prst="rect">
             <a:avLst/>
@@ -12399,7 +12914,7 @@
         <p:spPr>
           <a:xfrm>
             <a:off x="960120" y="4297680"/>
-            <a:ext cx="7607520" cy="566640"/>
+            <a:ext cx="7607160" cy="566280"/>
           </a:xfrm>
           <a:prstGeom prst="rect">
             <a:avLst/>
@@ -12455,7 +12970,7 @@
         <p:spPr>
           <a:xfrm>
             <a:off x="0" y="4873680"/>
-            <a:ext cx="9143640" cy="269280"/>
+            <a:ext cx="9143280" cy="268920"/>
           </a:xfrm>
           <a:prstGeom prst="rect">
             <a:avLst/>
@@ -12481,6 +12996,11 @@
             <a:noAutofit/>
           </a:bodyPr>
           <a:p>
+            <a:pPr>
+              <a:lnSpc>
+                <a:spcPct val="100000"/>
+              </a:lnSpc>
+            </a:pPr>
             <a:endParaRPr b="0" lang="en-US" sz="1800" spc="-1" strike="noStrike">
               <a:solidFill>
                 <a:srgbClr val="ffffff"/>
@@ -12499,7 +13019,7 @@
         <p:spPr>
           <a:xfrm>
             <a:off x="0" y="4873680"/>
-            <a:ext cx="9143640" cy="269280"/>
+            <a:ext cx="9143280" cy="268920"/>
           </a:xfrm>
           <a:prstGeom prst="rect">
             <a:avLst/>
@@ -12528,16 +13048,7 @@
                 <a:tab algn="l" pos="0"/>
               </a:tabLst>
             </a:pPr>
-            <a:r>
-              <a:rPr b="0" lang="en-US" sz="950" spc="-1" strike="noStrike">
-                <a:solidFill>
-                  <a:srgbClr val="02c39a"/>
-                </a:solidFill>
-                <a:latin typeface="Calibri"/>
-              </a:rPr>
-              <a:t>Source: atlassian.com/agile/scrum</a:t>
-            </a:r>
-            <a:endParaRPr b="0" lang="en-US" sz="950" spc="-1" strike="noStrike">
+            <a:endParaRPr b="0" lang="en-US" sz="1800" spc="-1" strike="noStrike">
               <a:solidFill>
                 <a:srgbClr val="ffffff"/>
               </a:solidFill>
@@ -12592,7 +13103,7 @@
         <p:spPr>
           <a:xfrm>
             <a:off x="0" y="0"/>
-            <a:ext cx="9143640" cy="776880"/>
+            <a:ext cx="9143280" cy="776520"/>
           </a:xfrm>
           <a:prstGeom prst="rect">
             <a:avLst/>
@@ -12618,6 +13129,11 @@
             <a:noAutofit/>
           </a:bodyPr>
           <a:p>
+            <a:pPr>
+              <a:lnSpc>
+                <a:spcPct val="100000"/>
+              </a:lnSpc>
+            </a:pPr>
             <a:endParaRPr b="0" lang="en-US" sz="1800" spc="-1" strike="noStrike">
               <a:solidFill>
                 <a:srgbClr val="ffffff"/>
@@ -12636,7 +13152,7 @@
         <p:spPr>
           <a:xfrm>
             <a:off x="365760" y="0"/>
-            <a:ext cx="8412120" cy="776880"/>
+            <a:ext cx="8411760" cy="776520"/>
           </a:xfrm>
           <a:prstGeom prst="rect">
             <a:avLst/>
@@ -12666,7 +13182,7 @@
               </a:tabLst>
             </a:pPr>
             <a:r>
-              <a:rPr b="1" lang="en-US" sz="2000" spc="299" strike="noStrike">
+              <a:rPr b="1" lang="en-US" sz="2000" spc="296" strike="noStrike">
                 <a:solidFill>
                   <a:srgbClr val="ffffff"/>
                 </a:solidFill>
@@ -12692,7 +13208,7 @@
         <p:spPr>
           <a:xfrm>
             <a:off x="365760" y="914400"/>
-            <a:ext cx="8412120" cy="1096920"/>
+            <a:ext cx="8411760" cy="1096560"/>
           </a:xfrm>
           <a:prstGeom prst="rect">
             <a:avLst/>
@@ -12725,6 +13241,11 @@
             <a:noAutofit/>
           </a:bodyPr>
           <a:p>
+            <a:pPr>
+              <a:lnSpc>
+                <a:spcPct val="100000"/>
+              </a:lnSpc>
+            </a:pPr>
             <a:endParaRPr b="0" lang="en-US" sz="1800" spc="-1" strike="noStrike">
               <a:solidFill>
                 <a:srgbClr val="ffffff"/>
@@ -12743,7 +13264,7 @@
         <p:spPr>
           <a:xfrm>
             <a:off x="365760" y="914400"/>
-            <a:ext cx="8412120" cy="1096920"/>
+            <a:ext cx="8411760" cy="1096560"/>
           </a:xfrm>
           <a:prstGeom prst="rect">
             <a:avLst/>
@@ -12799,7 +13320,7 @@
         <p:spPr>
           <a:xfrm>
             <a:off x="365760" y="2148840"/>
-            <a:ext cx="4205880" cy="1279800"/>
+            <a:ext cx="4205520" cy="1279440"/>
           </a:xfrm>
           <a:prstGeom prst="rect">
             <a:avLst/>
@@ -12832,6 +13353,11 @@
             <a:noAutofit/>
           </a:bodyPr>
           <a:p>
+            <a:pPr>
+              <a:lnSpc>
+                <a:spcPct val="100000"/>
+              </a:lnSpc>
+            </a:pPr>
             <a:endParaRPr b="0" lang="en-US" sz="1800" spc="-1" strike="noStrike">
               <a:solidFill>
                 <a:srgbClr val="000000"/>
@@ -12850,7 +13376,7 @@
         <p:spPr>
           <a:xfrm>
             <a:off x="365760" y="2148840"/>
-            <a:ext cx="164160" cy="1279800"/>
+            <a:ext cx="163800" cy="1279440"/>
           </a:xfrm>
           <a:prstGeom prst="rect">
             <a:avLst/>
@@ -12876,6 +13402,11 @@
             <a:noAutofit/>
           </a:bodyPr>
           <a:p>
+            <a:pPr>
+              <a:lnSpc>
+                <a:spcPct val="100000"/>
+              </a:lnSpc>
+            </a:pPr>
             <a:endParaRPr b="0" lang="en-US" sz="1800" spc="-1" strike="noStrike">
               <a:solidFill>
                 <a:srgbClr val="ffffff"/>
@@ -12894,7 +13425,7 @@
         <p:spPr>
           <a:xfrm>
             <a:off x="621720" y="2240280"/>
-            <a:ext cx="639720" cy="548280"/>
+            <a:ext cx="639360" cy="547920"/>
           </a:xfrm>
           <a:prstGeom prst="rect">
             <a:avLst/>
@@ -12950,7 +13481,7 @@
         <p:spPr>
           <a:xfrm>
             <a:off x="658440" y="2212920"/>
-            <a:ext cx="3748680" cy="383760"/>
+            <a:ext cx="3748320" cy="383400"/>
           </a:xfrm>
           <a:prstGeom prst="rect">
             <a:avLst/>
@@ -13006,7 +13537,7 @@
         <p:spPr>
           <a:xfrm>
             <a:off x="658440" y="2624400"/>
-            <a:ext cx="3748680" cy="712800"/>
+            <a:ext cx="3748320" cy="712440"/>
           </a:xfrm>
           <a:prstGeom prst="rect">
             <a:avLst/>
@@ -13062,7 +13593,7 @@
         <p:spPr>
           <a:xfrm>
             <a:off x="4800600" y="2148840"/>
-            <a:ext cx="4205880" cy="1279800"/>
+            <a:ext cx="4205520" cy="1279440"/>
           </a:xfrm>
           <a:prstGeom prst="rect">
             <a:avLst/>
@@ -13095,6 +13626,11 @@
             <a:noAutofit/>
           </a:bodyPr>
           <a:p>
+            <a:pPr>
+              <a:lnSpc>
+                <a:spcPct val="100000"/>
+              </a:lnSpc>
+            </a:pPr>
             <a:endParaRPr b="0" lang="en-US" sz="1800" spc="-1" strike="noStrike">
               <a:solidFill>
                 <a:srgbClr val="000000"/>
@@ -13113,7 +13649,7 @@
         <p:spPr>
           <a:xfrm>
             <a:off x="4800600" y="2148840"/>
-            <a:ext cx="164160" cy="1279800"/>
+            <a:ext cx="163800" cy="1279440"/>
           </a:xfrm>
           <a:prstGeom prst="rect">
             <a:avLst/>
@@ -13139,6 +13675,11 @@
             <a:noAutofit/>
           </a:bodyPr>
           <a:p>
+            <a:pPr>
+              <a:lnSpc>
+                <a:spcPct val="100000"/>
+              </a:lnSpc>
+            </a:pPr>
             <a:endParaRPr b="0" lang="en-US" sz="1800" spc="-1" strike="noStrike">
               <a:solidFill>
                 <a:srgbClr val="ffffff"/>
@@ -13157,7 +13698,7 @@
         <p:spPr>
           <a:xfrm>
             <a:off x="5056560" y="2240280"/>
-            <a:ext cx="639720" cy="548280"/>
+            <a:ext cx="639360" cy="547920"/>
           </a:xfrm>
           <a:prstGeom prst="rect">
             <a:avLst/>
@@ -13213,7 +13754,7 @@
         <p:spPr>
           <a:xfrm>
             <a:off x="5093280" y="2212920"/>
-            <a:ext cx="3748680" cy="383760"/>
+            <a:ext cx="3748320" cy="383400"/>
           </a:xfrm>
           <a:prstGeom prst="rect">
             <a:avLst/>
@@ -13269,7 +13810,7 @@
         <p:spPr>
           <a:xfrm>
             <a:off x="5093280" y="2624400"/>
-            <a:ext cx="3748680" cy="712800"/>
+            <a:ext cx="3748320" cy="712440"/>
           </a:xfrm>
           <a:prstGeom prst="rect">
             <a:avLst/>
@@ -13325,7 +13866,7 @@
         <p:spPr>
           <a:xfrm>
             <a:off x="365760" y="3566160"/>
-            <a:ext cx="4205880" cy="1279800"/>
+            <a:ext cx="4205520" cy="1279440"/>
           </a:xfrm>
           <a:prstGeom prst="rect">
             <a:avLst/>
@@ -13358,6 +13899,11 @@
             <a:noAutofit/>
           </a:bodyPr>
           <a:p>
+            <a:pPr>
+              <a:lnSpc>
+                <a:spcPct val="100000"/>
+              </a:lnSpc>
+            </a:pPr>
             <a:endParaRPr b="0" lang="en-US" sz="1800" spc="-1" strike="noStrike">
               <a:solidFill>
                 <a:srgbClr val="000000"/>
@@ -13376,7 +13922,7 @@
         <p:spPr>
           <a:xfrm>
             <a:off x="365760" y="3566160"/>
-            <a:ext cx="164160" cy="1279800"/>
+            <a:ext cx="163800" cy="1279440"/>
           </a:xfrm>
           <a:prstGeom prst="rect">
             <a:avLst/>
@@ -13402,6 +13948,11 @@
             <a:noAutofit/>
           </a:bodyPr>
           <a:p>
+            <a:pPr>
+              <a:lnSpc>
+                <a:spcPct val="100000"/>
+              </a:lnSpc>
+            </a:pPr>
             <a:endParaRPr b="0" lang="en-US" sz="1800" spc="-1" strike="noStrike">
               <a:solidFill>
                 <a:srgbClr val="ffffff"/>
@@ -13420,7 +13971,7 @@
         <p:spPr>
           <a:xfrm>
             <a:off x="621720" y="3657600"/>
-            <a:ext cx="639720" cy="548280"/>
+            <a:ext cx="639360" cy="547920"/>
           </a:xfrm>
           <a:prstGeom prst="rect">
             <a:avLst/>
@@ -13476,7 +14027,7 @@
         <p:spPr>
           <a:xfrm>
             <a:off x="658440" y="3630240"/>
-            <a:ext cx="3748680" cy="383760"/>
+            <a:ext cx="3748320" cy="383400"/>
           </a:xfrm>
           <a:prstGeom prst="rect">
             <a:avLst/>
@@ -13532,7 +14083,7 @@
         <p:spPr>
           <a:xfrm>
             <a:off x="658440" y="4041720"/>
-            <a:ext cx="3748680" cy="712800"/>
+            <a:ext cx="3748320" cy="712440"/>
           </a:xfrm>
           <a:prstGeom prst="rect">
             <a:avLst/>
@@ -13588,7 +14139,7 @@
         <p:spPr>
           <a:xfrm>
             <a:off x="4800600" y="3566160"/>
-            <a:ext cx="4205880" cy="1279800"/>
+            <a:ext cx="4205520" cy="1279440"/>
           </a:xfrm>
           <a:prstGeom prst="rect">
             <a:avLst/>
@@ -13621,6 +14172,11 @@
             <a:noAutofit/>
           </a:bodyPr>
           <a:p>
+            <a:pPr>
+              <a:lnSpc>
+                <a:spcPct val="100000"/>
+              </a:lnSpc>
+            </a:pPr>
             <a:endParaRPr b="0" lang="en-US" sz="1800" spc="-1" strike="noStrike">
               <a:solidFill>
                 <a:srgbClr val="000000"/>
@@ -13639,7 +14195,7 @@
         <p:spPr>
           <a:xfrm>
             <a:off x="4800600" y="3566160"/>
-            <a:ext cx="164160" cy="1279800"/>
+            <a:ext cx="163800" cy="1279440"/>
           </a:xfrm>
           <a:prstGeom prst="rect">
             <a:avLst/>
@@ -13665,6 +14221,11 @@
             <a:noAutofit/>
           </a:bodyPr>
           <a:p>
+            <a:pPr>
+              <a:lnSpc>
+                <a:spcPct val="100000"/>
+              </a:lnSpc>
+            </a:pPr>
             <a:endParaRPr b="0" lang="en-US" sz="1800" spc="-1" strike="noStrike">
               <a:solidFill>
                 <a:srgbClr val="ffffff"/>
@@ -13683,7 +14244,7 @@
         <p:spPr>
           <a:xfrm>
             <a:off x="5056560" y="3657600"/>
-            <a:ext cx="639720" cy="548280"/>
+            <a:ext cx="639360" cy="547920"/>
           </a:xfrm>
           <a:prstGeom prst="rect">
             <a:avLst/>
@@ -13739,7 +14300,7 @@
         <p:spPr>
           <a:xfrm>
             <a:off x="5093280" y="3630240"/>
-            <a:ext cx="3748680" cy="383760"/>
+            <a:ext cx="3748320" cy="383400"/>
           </a:xfrm>
           <a:prstGeom prst="rect">
             <a:avLst/>
@@ -13795,7 +14356,7 @@
         <p:spPr>
           <a:xfrm>
             <a:off x="5093280" y="4041720"/>
-            <a:ext cx="3748680" cy="712800"/>
+            <a:ext cx="3748320" cy="712440"/>
           </a:xfrm>
           <a:prstGeom prst="rect">
             <a:avLst/>
@@ -13888,7 +14449,7 @@
         <p:spPr>
           <a:xfrm>
             <a:off x="0" y="0"/>
-            <a:ext cx="9143640" cy="776880"/>
+            <a:ext cx="9143280" cy="776520"/>
           </a:xfrm>
           <a:prstGeom prst="rect">
             <a:avLst/>
@@ -13914,6 +14475,11 @@
             <a:noAutofit/>
           </a:bodyPr>
           <a:p>
+            <a:pPr>
+              <a:lnSpc>
+                <a:spcPct val="100000"/>
+              </a:lnSpc>
+            </a:pPr>
             <a:endParaRPr b="0" lang="en-US" sz="1800" spc="-1" strike="noStrike">
               <a:solidFill>
                 <a:srgbClr val="ffffff"/>
@@ -13932,7 +14498,7 @@
         <p:spPr>
           <a:xfrm>
             <a:off x="365760" y="0"/>
-            <a:ext cx="8412120" cy="776880"/>
+            <a:ext cx="8411760" cy="776520"/>
           </a:xfrm>
           <a:prstGeom prst="rect">
             <a:avLst/>
@@ -13962,7 +14528,7 @@
               </a:tabLst>
             </a:pPr>
             <a:r>
-              <a:rPr b="1" lang="en-US" sz="2000" spc="299" strike="noStrike">
+              <a:rPr b="1" lang="en-US" sz="2000" spc="296" strike="noStrike">
                 <a:solidFill>
                   <a:srgbClr val="ffffff"/>
                 </a:solidFill>
@@ -13988,7 +14554,7 @@
         <p:spPr>
           <a:xfrm>
             <a:off x="365760" y="868680"/>
-            <a:ext cx="8412120" cy="383760"/>
+            <a:ext cx="8411760" cy="383400"/>
           </a:xfrm>
           <a:prstGeom prst="rect">
             <a:avLst/>
@@ -14044,7 +14610,7 @@
         <p:spPr>
           <a:xfrm>
             <a:off x="1005840" y="1389960"/>
-            <a:ext cx="1371240" cy="1371240"/>
+            <a:ext cx="1370880" cy="1370880"/>
           </a:xfrm>
           <a:prstGeom prst="ellipse">
             <a:avLst/>
@@ -14077,6 +14643,11 @@
             <a:noAutofit/>
           </a:bodyPr>
           <a:p>
+            <a:pPr>
+              <a:lnSpc>
+                <a:spcPct val="100000"/>
+              </a:lnSpc>
+            </a:pPr>
             <a:endParaRPr b="0" lang="en-US" sz="1800" spc="-1" strike="noStrike">
               <a:solidFill>
                 <a:srgbClr val="ffffff"/>
@@ -14095,7 +14666,7 @@
         <p:spPr>
           <a:xfrm>
             <a:off x="1005840" y="1389960"/>
-            <a:ext cx="1371240" cy="1371240"/>
+            <a:ext cx="1370880" cy="1370880"/>
           </a:xfrm>
           <a:prstGeom prst="rect">
             <a:avLst/>
@@ -14151,7 +14722,7 @@
         <p:spPr>
           <a:xfrm>
             <a:off x="365760" y="2853000"/>
-            <a:ext cx="2651400" cy="411120"/>
+            <a:ext cx="2651040" cy="410760"/>
           </a:xfrm>
           <a:prstGeom prst="rect">
             <a:avLst/>
@@ -14177,6 +14748,11 @@
             <a:noAutofit/>
           </a:bodyPr>
           <a:p>
+            <a:pPr>
+              <a:lnSpc>
+                <a:spcPct val="100000"/>
+              </a:lnSpc>
+            </a:pPr>
             <a:endParaRPr b="0" lang="en-US" sz="1800" spc="-1" strike="noStrike">
               <a:solidFill>
                 <a:srgbClr val="ffffff"/>
@@ -14195,7 +14771,7 @@
         <p:spPr>
           <a:xfrm>
             <a:off x="365760" y="2853000"/>
-            <a:ext cx="2651400" cy="411120"/>
+            <a:ext cx="2651040" cy="410760"/>
           </a:xfrm>
           <a:prstGeom prst="rect">
             <a:avLst/>
@@ -14225,7 +14801,7 @@
               </a:tabLst>
             </a:pPr>
             <a:r>
-              <a:rPr b="1" lang="en-US" sz="1400" spc="199" strike="noStrike">
+              <a:rPr b="1" lang="en-US" sz="1400" spc="197" strike="noStrike">
                 <a:solidFill>
                   <a:srgbClr val="0a1628"/>
                 </a:solidFill>
@@ -14251,7 +14827,7 @@
         <p:spPr>
           <a:xfrm>
             <a:off x="530280" y="3392280"/>
-            <a:ext cx="237240" cy="237240"/>
+            <a:ext cx="236880" cy="236880"/>
           </a:xfrm>
           <a:prstGeom prst="ellipse">
             <a:avLst/>
@@ -14277,6 +14853,11 @@
             <a:noAutofit/>
           </a:bodyPr>
           <a:p>
+            <a:pPr>
+              <a:lnSpc>
+                <a:spcPct val="100000"/>
+              </a:lnSpc>
+            </a:pPr>
             <a:endParaRPr b="0" lang="en-US" sz="1800" spc="-1" strike="noStrike">
               <a:solidFill>
                 <a:srgbClr val="ffffff"/>
@@ -14295,7 +14876,7 @@
         <p:spPr>
           <a:xfrm>
             <a:off x="850320" y="3337560"/>
-            <a:ext cx="2102760" cy="347040"/>
+            <a:ext cx="2102400" cy="346680"/>
           </a:xfrm>
           <a:prstGeom prst="rect">
             <a:avLst/>
@@ -14351,7 +14932,7 @@
         <p:spPr>
           <a:xfrm>
             <a:off x="530280" y="3758040"/>
-            <a:ext cx="237240" cy="237240"/>
+            <a:ext cx="236880" cy="236880"/>
           </a:xfrm>
           <a:prstGeom prst="ellipse">
             <a:avLst/>
@@ -14377,6 +14958,11 @@
             <a:noAutofit/>
           </a:bodyPr>
           <a:p>
+            <a:pPr>
+              <a:lnSpc>
+                <a:spcPct val="100000"/>
+              </a:lnSpc>
+            </a:pPr>
             <a:endParaRPr b="0" lang="en-US" sz="1800" spc="-1" strike="noStrike">
               <a:solidFill>
                 <a:srgbClr val="ffffff"/>
@@ -14395,7 +14981,7 @@
         <p:spPr>
           <a:xfrm>
             <a:off x="850320" y="3703320"/>
-            <a:ext cx="2102760" cy="347040"/>
+            <a:ext cx="2102400" cy="346680"/>
           </a:xfrm>
           <a:prstGeom prst="rect">
             <a:avLst/>
@@ -14451,7 +15037,7 @@
         <p:spPr>
           <a:xfrm>
             <a:off x="530280" y="4123800"/>
-            <a:ext cx="237240" cy="237240"/>
+            <a:ext cx="236880" cy="236880"/>
           </a:xfrm>
           <a:prstGeom prst="ellipse">
             <a:avLst/>
@@ -14477,6 +15063,11 @@
             <a:noAutofit/>
           </a:bodyPr>
           <a:p>
+            <a:pPr>
+              <a:lnSpc>
+                <a:spcPct val="100000"/>
+              </a:lnSpc>
+            </a:pPr>
             <a:endParaRPr b="0" lang="en-US" sz="1800" spc="-1" strike="noStrike">
               <a:solidFill>
                 <a:srgbClr val="ffffff"/>
@@ -14495,7 +15086,7 @@
         <p:spPr>
           <a:xfrm>
             <a:off x="850320" y="4069080"/>
-            <a:ext cx="2102760" cy="347040"/>
+            <a:ext cx="2102400" cy="346680"/>
           </a:xfrm>
           <a:prstGeom prst="rect">
             <a:avLst/>
@@ -14551,7 +15142,7 @@
         <p:spPr>
           <a:xfrm>
             <a:off x="3840480" y="1389960"/>
-            <a:ext cx="1371240" cy="1371240"/>
+            <a:ext cx="1370880" cy="1370880"/>
           </a:xfrm>
           <a:prstGeom prst="ellipse">
             <a:avLst/>
@@ -14584,6 +15175,11 @@
             <a:noAutofit/>
           </a:bodyPr>
           <a:p>
+            <a:pPr>
+              <a:lnSpc>
+                <a:spcPct val="100000"/>
+              </a:lnSpc>
+            </a:pPr>
             <a:endParaRPr b="0" lang="en-US" sz="1800" spc="-1" strike="noStrike">
               <a:solidFill>
                 <a:srgbClr val="000000"/>
@@ -14602,7 +15198,7 @@
         <p:spPr>
           <a:xfrm>
             <a:off x="3840480" y="1389960"/>
-            <a:ext cx="1371240" cy="1371240"/>
+            <a:ext cx="1370880" cy="1370880"/>
           </a:xfrm>
           <a:prstGeom prst="rect">
             <a:avLst/>
@@ -14658,7 +15254,7 @@
         <p:spPr>
           <a:xfrm>
             <a:off x="3200400" y="2853000"/>
-            <a:ext cx="2651400" cy="411120"/>
+            <a:ext cx="2651040" cy="410760"/>
           </a:xfrm>
           <a:prstGeom prst="rect">
             <a:avLst/>
@@ -14684,6 +15280,11 @@
             <a:noAutofit/>
           </a:bodyPr>
           <a:p>
+            <a:pPr>
+              <a:lnSpc>
+                <a:spcPct val="100000"/>
+              </a:lnSpc>
+            </a:pPr>
             <a:endParaRPr b="0" lang="en-US" sz="1800" spc="-1" strike="noStrike">
               <a:solidFill>
                 <a:srgbClr val="000000"/>
@@ -14702,7 +15303,7 @@
         <p:spPr>
           <a:xfrm>
             <a:off x="3200400" y="2853000"/>
-            <a:ext cx="2651400" cy="411120"/>
+            <a:ext cx="2651040" cy="410760"/>
           </a:xfrm>
           <a:prstGeom prst="rect">
             <a:avLst/>
@@ -14732,7 +15333,7 @@
               </a:tabLst>
             </a:pPr>
             <a:r>
-              <a:rPr b="1" lang="en-US" sz="1400" spc="199" strike="noStrike">
+              <a:rPr b="1" lang="en-US" sz="1400" spc="197" strike="noStrike">
                 <a:solidFill>
                   <a:srgbClr val="0a1628"/>
                 </a:solidFill>
@@ -14758,7 +15359,7 @@
         <p:spPr>
           <a:xfrm>
             <a:off x="3364920" y="3392280"/>
-            <a:ext cx="237240" cy="237240"/>
+            <a:ext cx="236880" cy="236880"/>
           </a:xfrm>
           <a:prstGeom prst="ellipse">
             <a:avLst/>
@@ -14784,6 +15385,11 @@
             <a:noAutofit/>
           </a:bodyPr>
           <a:p>
+            <a:pPr>
+              <a:lnSpc>
+                <a:spcPct val="100000"/>
+              </a:lnSpc>
+            </a:pPr>
             <a:endParaRPr b="0" lang="en-US" sz="1800" spc="-1" strike="noStrike">
               <a:solidFill>
                 <a:srgbClr val="000000"/>
@@ -14802,7 +15408,7 @@
         <p:spPr>
           <a:xfrm>
             <a:off x="3684960" y="3337560"/>
-            <a:ext cx="2102760" cy="347040"/>
+            <a:ext cx="2102400" cy="346680"/>
           </a:xfrm>
           <a:prstGeom prst="rect">
             <a:avLst/>
@@ -14858,7 +15464,7 @@
         <p:spPr>
           <a:xfrm>
             <a:off x="3364920" y="3758040"/>
-            <a:ext cx="237240" cy="237240"/>
+            <a:ext cx="236880" cy="236880"/>
           </a:xfrm>
           <a:prstGeom prst="ellipse">
             <a:avLst/>
@@ -14884,6 +15490,11 @@
             <a:noAutofit/>
           </a:bodyPr>
           <a:p>
+            <a:pPr>
+              <a:lnSpc>
+                <a:spcPct val="100000"/>
+              </a:lnSpc>
+            </a:pPr>
             <a:endParaRPr b="0" lang="en-US" sz="1800" spc="-1" strike="noStrike">
               <a:solidFill>
                 <a:srgbClr val="000000"/>
@@ -14902,7 +15513,7 @@
         <p:spPr>
           <a:xfrm>
             <a:off x="3684960" y="3703320"/>
-            <a:ext cx="2102760" cy="347040"/>
+            <a:ext cx="2102400" cy="346680"/>
           </a:xfrm>
           <a:prstGeom prst="rect">
             <a:avLst/>
@@ -14958,7 +15569,7 @@
         <p:spPr>
           <a:xfrm>
             <a:off x="3364920" y="4123800"/>
-            <a:ext cx="237240" cy="237240"/>
+            <a:ext cx="236880" cy="236880"/>
           </a:xfrm>
           <a:prstGeom prst="ellipse">
             <a:avLst/>
@@ -14984,6 +15595,11 @@
             <a:noAutofit/>
           </a:bodyPr>
           <a:p>
+            <a:pPr>
+              <a:lnSpc>
+                <a:spcPct val="100000"/>
+              </a:lnSpc>
+            </a:pPr>
             <a:endParaRPr b="0" lang="en-US" sz="1800" spc="-1" strike="noStrike">
               <a:solidFill>
                 <a:srgbClr val="000000"/>
@@ -15002,7 +15618,7 @@
         <p:spPr>
           <a:xfrm>
             <a:off x="3684960" y="4069080"/>
-            <a:ext cx="2102760" cy="347040"/>
+            <a:ext cx="2102400" cy="346680"/>
           </a:xfrm>
           <a:prstGeom prst="rect">
             <a:avLst/>
@@ -15058,7 +15674,7 @@
         <p:spPr>
           <a:xfrm>
             <a:off x="3364920" y="4489560"/>
-            <a:ext cx="237240" cy="237240"/>
+            <a:ext cx="236880" cy="236880"/>
           </a:xfrm>
           <a:prstGeom prst="ellipse">
             <a:avLst/>
@@ -15084,6 +15700,11 @@
             <a:noAutofit/>
           </a:bodyPr>
           <a:p>
+            <a:pPr>
+              <a:lnSpc>
+                <a:spcPct val="100000"/>
+              </a:lnSpc>
+            </a:pPr>
             <a:endParaRPr b="0" lang="en-US" sz="1800" spc="-1" strike="noStrike">
               <a:solidFill>
                 <a:srgbClr val="000000"/>
@@ -15102,7 +15723,7 @@
         <p:spPr>
           <a:xfrm>
             <a:off x="3684960" y="4434840"/>
-            <a:ext cx="2102760" cy="347040"/>
+            <a:ext cx="2102400" cy="346680"/>
           </a:xfrm>
           <a:prstGeom prst="rect">
             <a:avLst/>
@@ -15158,7 +15779,7 @@
         <p:spPr>
           <a:xfrm>
             <a:off x="3364920" y="4855320"/>
-            <a:ext cx="237240" cy="237240"/>
+            <a:ext cx="236880" cy="236880"/>
           </a:xfrm>
           <a:prstGeom prst="ellipse">
             <a:avLst/>
@@ -15184,6 +15805,11 @@
             <a:noAutofit/>
           </a:bodyPr>
           <a:p>
+            <a:pPr>
+              <a:lnSpc>
+                <a:spcPct val="100000"/>
+              </a:lnSpc>
+            </a:pPr>
             <a:endParaRPr b="0" lang="en-US" sz="1800" spc="-1" strike="noStrike">
               <a:solidFill>
                 <a:srgbClr val="000000"/>
@@ -15202,7 +15828,7 @@
         <p:spPr>
           <a:xfrm>
             <a:off x="3684960" y="4800600"/>
-            <a:ext cx="2102760" cy="347040"/>
+            <a:ext cx="2102400" cy="346680"/>
           </a:xfrm>
           <a:prstGeom prst="rect">
             <a:avLst/>
@@ -15258,7 +15884,7 @@
         <p:spPr>
           <a:xfrm>
             <a:off x="6675120" y="1389960"/>
-            <a:ext cx="1371240" cy="1371240"/>
+            <a:ext cx="1370880" cy="1370880"/>
           </a:xfrm>
           <a:prstGeom prst="ellipse">
             <a:avLst/>
@@ -15291,6 +15917,11 @@
             <a:noAutofit/>
           </a:bodyPr>
           <a:p>
+            <a:pPr>
+              <a:lnSpc>
+                <a:spcPct val="100000"/>
+              </a:lnSpc>
+            </a:pPr>
             <a:endParaRPr b="0" lang="en-US" sz="1800" spc="-1" strike="noStrike">
               <a:solidFill>
                 <a:srgbClr val="ffffff"/>
@@ -15309,7 +15940,7 @@
         <p:spPr>
           <a:xfrm>
             <a:off x="6675120" y="1389960"/>
-            <a:ext cx="1371240" cy="1371240"/>
+            <a:ext cx="1370880" cy="1370880"/>
           </a:xfrm>
           <a:prstGeom prst="rect">
             <a:avLst/>
@@ -15365,7 +15996,7 @@
         <p:spPr>
           <a:xfrm>
             <a:off x="6035040" y="2853000"/>
-            <a:ext cx="2651400" cy="411120"/>
+            <a:ext cx="2651040" cy="410760"/>
           </a:xfrm>
           <a:prstGeom prst="rect">
             <a:avLst/>
@@ -15391,6 +16022,11 @@
             <a:noAutofit/>
           </a:bodyPr>
           <a:p>
+            <a:pPr>
+              <a:lnSpc>
+                <a:spcPct val="100000"/>
+              </a:lnSpc>
+            </a:pPr>
             <a:endParaRPr b="0" lang="en-US" sz="1800" spc="-1" strike="noStrike">
               <a:solidFill>
                 <a:srgbClr val="ffffff"/>
@@ -15409,7 +16045,7 @@
         <p:spPr>
           <a:xfrm>
             <a:off x="6035040" y="2853000"/>
-            <a:ext cx="2651400" cy="411120"/>
+            <a:ext cx="2651040" cy="410760"/>
           </a:xfrm>
           <a:prstGeom prst="rect">
             <a:avLst/>
@@ -15439,7 +16075,7 @@
               </a:tabLst>
             </a:pPr>
             <a:r>
-              <a:rPr b="1" lang="en-US" sz="1400" spc="199" strike="noStrike">
+              <a:rPr b="1" lang="en-US" sz="1400" spc="197" strike="noStrike">
                 <a:solidFill>
                   <a:srgbClr val="0a1628"/>
                 </a:solidFill>
@@ -15465,7 +16101,7 @@
         <p:spPr>
           <a:xfrm>
             <a:off x="6199560" y="3392280"/>
-            <a:ext cx="237240" cy="237240"/>
+            <a:ext cx="236880" cy="236880"/>
           </a:xfrm>
           <a:prstGeom prst="ellipse">
             <a:avLst/>
@@ -15491,6 +16127,11 @@
             <a:noAutofit/>
           </a:bodyPr>
           <a:p>
+            <a:pPr>
+              <a:lnSpc>
+                <a:spcPct val="100000"/>
+              </a:lnSpc>
+            </a:pPr>
             <a:endParaRPr b="0" lang="en-US" sz="1800" spc="-1" strike="noStrike">
               <a:solidFill>
                 <a:srgbClr val="ffffff"/>
@@ -15509,7 +16150,7 @@
         <p:spPr>
           <a:xfrm>
             <a:off x="6519600" y="3337560"/>
-            <a:ext cx="2102760" cy="347040"/>
+            <a:ext cx="2102400" cy="346680"/>
           </a:xfrm>
           <a:prstGeom prst="rect">
             <a:avLst/>
@@ -15565,7 +16206,7 @@
         <p:spPr>
           <a:xfrm>
             <a:off x="6199560" y="3758040"/>
-            <a:ext cx="237240" cy="237240"/>
+            <a:ext cx="236880" cy="236880"/>
           </a:xfrm>
           <a:prstGeom prst="ellipse">
             <a:avLst/>
@@ -15591,6 +16232,11 @@
             <a:noAutofit/>
           </a:bodyPr>
           <a:p>
+            <a:pPr>
+              <a:lnSpc>
+                <a:spcPct val="100000"/>
+              </a:lnSpc>
+            </a:pPr>
             <a:endParaRPr b="0" lang="en-US" sz="1800" spc="-1" strike="noStrike">
               <a:solidFill>
                 <a:srgbClr val="ffffff"/>
@@ -15609,7 +16255,7 @@
         <p:spPr>
           <a:xfrm>
             <a:off x="6519600" y="3703320"/>
-            <a:ext cx="2102760" cy="347040"/>
+            <a:ext cx="2102400" cy="346680"/>
           </a:xfrm>
           <a:prstGeom prst="rect">
             <a:avLst/>
@@ -15665,7 +16311,7 @@
         <p:spPr>
           <a:xfrm>
             <a:off x="6199560" y="4123800"/>
-            <a:ext cx="237240" cy="237240"/>
+            <a:ext cx="236880" cy="236880"/>
           </a:xfrm>
           <a:prstGeom prst="ellipse">
             <a:avLst/>
@@ -15691,6 +16337,11 @@
             <a:noAutofit/>
           </a:bodyPr>
           <a:p>
+            <a:pPr>
+              <a:lnSpc>
+                <a:spcPct val="100000"/>
+              </a:lnSpc>
+            </a:pPr>
             <a:endParaRPr b="0" lang="en-US" sz="1800" spc="-1" strike="noStrike">
               <a:solidFill>
                 <a:srgbClr val="ffffff"/>
@@ -15709,7 +16360,7 @@
         <p:spPr>
           <a:xfrm>
             <a:off x="6519600" y="4069080"/>
-            <a:ext cx="2102760" cy="347040"/>
+            <a:ext cx="2102400" cy="346680"/>
           </a:xfrm>
           <a:prstGeom prst="rect">
             <a:avLst/>
@@ -15802,7 +16453,7 @@
         <p:spPr>
           <a:xfrm>
             <a:off x="0" y="0"/>
-            <a:ext cx="9143640" cy="776880"/>
+            <a:ext cx="9143280" cy="776520"/>
           </a:xfrm>
           <a:prstGeom prst="rect">
             <a:avLst/>
@@ -15828,6 +16479,11 @@
             <a:noAutofit/>
           </a:bodyPr>
           <a:p>
+            <a:pPr>
+              <a:lnSpc>
+                <a:spcPct val="100000"/>
+              </a:lnSpc>
+            </a:pPr>
             <a:endParaRPr b="0" lang="en-US" sz="1800" spc="-1" strike="noStrike">
               <a:solidFill>
                 <a:srgbClr val="ffffff"/>
@@ -15846,7 +16502,7 @@
         <p:spPr>
           <a:xfrm>
             <a:off x="365760" y="0"/>
-            <a:ext cx="8412120" cy="776880"/>
+            <a:ext cx="8411760" cy="776520"/>
           </a:xfrm>
           <a:prstGeom prst="rect">
             <a:avLst/>
@@ -15876,7 +16532,7 @@
               </a:tabLst>
             </a:pPr>
             <a:r>
-              <a:rPr b="1" lang="en-US" sz="2000" spc="299" strike="noStrike">
+              <a:rPr b="1" lang="en-US" sz="2000" spc="296" strike="noStrike">
                 <a:solidFill>
                   <a:srgbClr val="ffffff"/>
                 </a:solidFill>
@@ -15902,7 +16558,7 @@
         <p:spPr>
           <a:xfrm>
             <a:off x="274320" y="914400"/>
-            <a:ext cx="2788560" cy="3931560"/>
+            <a:ext cx="2788200" cy="3931200"/>
           </a:xfrm>
           <a:prstGeom prst="rect">
             <a:avLst/>
@@ -15935,6 +16591,11 @@
             <a:noAutofit/>
           </a:bodyPr>
           <a:p>
+            <a:pPr>
+              <a:lnSpc>
+                <a:spcPct val="100000"/>
+              </a:lnSpc>
+            </a:pPr>
             <a:endParaRPr b="0" lang="en-US" sz="1800" spc="-1" strike="noStrike">
               <a:solidFill>
                 <a:srgbClr val="000000"/>
@@ -15953,7 +16614,7 @@
         <p:spPr>
           <a:xfrm>
             <a:off x="274320" y="914400"/>
-            <a:ext cx="2788560" cy="868320"/>
+            <a:ext cx="2788200" cy="867960"/>
           </a:xfrm>
           <a:prstGeom prst="rect">
             <a:avLst/>
@@ -15979,6 +16640,11 @@
             <a:noAutofit/>
           </a:bodyPr>
           <a:p>
+            <a:pPr>
+              <a:lnSpc>
+                <a:spcPct val="100000"/>
+              </a:lnSpc>
+            </a:pPr>
             <a:endParaRPr b="0" lang="en-US" sz="1800" spc="-1" strike="noStrike">
               <a:solidFill>
                 <a:srgbClr val="ffffff"/>
@@ -15997,7 +16663,7 @@
         <p:spPr>
           <a:xfrm>
             <a:off x="274320" y="914400"/>
-            <a:ext cx="2788560" cy="411120"/>
+            <a:ext cx="2788200" cy="410760"/>
           </a:xfrm>
           <a:prstGeom prst="rect">
             <a:avLst/>
@@ -16053,7 +16719,7 @@
         <p:spPr>
           <a:xfrm>
             <a:off x="274320" y="1316880"/>
-            <a:ext cx="2788560" cy="383760"/>
+            <a:ext cx="2788200" cy="383400"/>
           </a:xfrm>
           <a:prstGeom prst="rect">
             <a:avLst/>
@@ -16083,7 +16749,7 @@
               </a:tabLst>
             </a:pPr>
             <a:r>
-              <a:rPr b="1" lang="en-US" sz="1200" spc="97" strike="noStrike">
+              <a:rPr b="1" lang="en-US" sz="1200" spc="94" strike="noStrike">
                 <a:solidFill>
                   <a:srgbClr val="ffffff"/>
                 </a:solidFill>
@@ -16109,7 +16775,7 @@
         <p:spPr>
           <a:xfrm>
             <a:off x="548640" y="1847160"/>
-            <a:ext cx="2239920" cy="292320"/>
+            <a:ext cx="2239560" cy="291960"/>
           </a:xfrm>
           <a:prstGeom prst="rect">
             <a:avLst/>
@@ -16137,6 +16803,11 @@
             <a:noAutofit/>
           </a:bodyPr>
           <a:p>
+            <a:pPr>
+              <a:lnSpc>
+                <a:spcPct val="100000"/>
+              </a:lnSpc>
+            </a:pPr>
             <a:endParaRPr b="0" lang="en-US" sz="1800" spc="-1" strike="noStrike">
               <a:solidFill>
                 <a:srgbClr val="ffffff"/>
@@ -16155,7 +16826,7 @@
         <p:spPr>
           <a:xfrm>
             <a:off x="548640" y="1847160"/>
-            <a:ext cx="2239920" cy="292320"/>
+            <a:ext cx="2239560" cy="291960"/>
           </a:xfrm>
           <a:prstGeom prst="rect">
             <a:avLst/>
@@ -16211,7 +16882,7 @@
         <p:spPr>
           <a:xfrm>
             <a:off x="411480" y="2176200"/>
-            <a:ext cx="2514240" cy="868320"/>
+            <a:ext cx="2513880" cy="867960"/>
           </a:xfrm>
           <a:prstGeom prst="rect">
             <a:avLst/>
@@ -16267,7 +16938,7 @@
         <p:spPr>
           <a:xfrm>
             <a:off x="411480" y="3182040"/>
-            <a:ext cx="200880" cy="200880"/>
+            <a:ext cx="200520" cy="200520"/>
           </a:xfrm>
           <a:prstGeom prst="ellipse">
             <a:avLst/>
@@ -16293,6 +16964,11 @@
             <a:noAutofit/>
           </a:bodyPr>
           <a:p>
+            <a:pPr>
+              <a:lnSpc>
+                <a:spcPct val="100000"/>
+              </a:lnSpc>
+            </a:pPr>
             <a:endParaRPr b="0" lang="en-US" sz="1800" spc="-1" strike="noStrike">
               <a:solidFill>
                 <a:srgbClr val="ffffff"/>
@@ -16311,7 +16987,7 @@
         <p:spPr>
           <a:xfrm>
             <a:off x="685800" y="3090600"/>
-            <a:ext cx="2285640" cy="347040"/>
+            <a:ext cx="2285280" cy="346680"/>
           </a:xfrm>
           <a:prstGeom prst="rect">
             <a:avLst/>
@@ -16367,7 +17043,7 @@
         <p:spPr>
           <a:xfrm>
             <a:off x="411480" y="3584520"/>
-            <a:ext cx="200880" cy="200880"/>
+            <a:ext cx="200520" cy="200520"/>
           </a:xfrm>
           <a:prstGeom prst="ellipse">
             <a:avLst/>
@@ -16393,6 +17069,11 @@
             <a:noAutofit/>
           </a:bodyPr>
           <a:p>
+            <a:pPr>
+              <a:lnSpc>
+                <a:spcPct val="100000"/>
+              </a:lnSpc>
+            </a:pPr>
             <a:endParaRPr b="0" lang="en-US" sz="1800" spc="-1" strike="noStrike">
               <a:solidFill>
                 <a:srgbClr val="ffffff"/>
@@ -16411,7 +17092,7 @@
         <p:spPr>
           <a:xfrm>
             <a:off x="685800" y="3493080"/>
-            <a:ext cx="2285640" cy="347040"/>
+            <a:ext cx="2285280" cy="346680"/>
           </a:xfrm>
           <a:prstGeom prst="rect">
             <a:avLst/>
@@ -16467,7 +17148,7 @@
         <p:spPr>
           <a:xfrm>
             <a:off x="411480" y="3986640"/>
-            <a:ext cx="200880" cy="200880"/>
+            <a:ext cx="200520" cy="200520"/>
           </a:xfrm>
           <a:prstGeom prst="ellipse">
             <a:avLst/>
@@ -16493,6 +17174,11 @@
             <a:noAutofit/>
           </a:bodyPr>
           <a:p>
+            <a:pPr>
+              <a:lnSpc>
+                <a:spcPct val="100000"/>
+              </a:lnSpc>
+            </a:pPr>
             <a:endParaRPr b="0" lang="en-US" sz="1800" spc="-1" strike="noStrike">
               <a:solidFill>
                 <a:srgbClr val="ffffff"/>
@@ -16511,7 +17197,7 @@
         <p:spPr>
           <a:xfrm>
             <a:off x="685800" y="3895200"/>
-            <a:ext cx="2285640" cy="347040"/>
+            <a:ext cx="2285280" cy="346680"/>
           </a:xfrm>
           <a:prstGeom prst="rect">
             <a:avLst/>
@@ -16567,7 +17253,7 @@
         <p:spPr>
           <a:xfrm>
             <a:off x="411480" y="4389120"/>
-            <a:ext cx="200880" cy="200880"/>
+            <a:ext cx="200520" cy="200520"/>
           </a:xfrm>
           <a:prstGeom prst="ellipse">
             <a:avLst/>
@@ -16593,6 +17279,11 @@
             <a:noAutofit/>
           </a:bodyPr>
           <a:p>
+            <a:pPr>
+              <a:lnSpc>
+                <a:spcPct val="100000"/>
+              </a:lnSpc>
+            </a:pPr>
             <a:endParaRPr b="0" lang="en-US" sz="1800" spc="-1" strike="noStrike">
               <a:solidFill>
                 <a:srgbClr val="ffffff"/>
@@ -16611,7 +17302,7 @@
         <p:spPr>
           <a:xfrm>
             <a:off x="685800" y="4297680"/>
-            <a:ext cx="2285640" cy="347040"/>
+            <a:ext cx="2285280" cy="346680"/>
           </a:xfrm>
           <a:prstGeom prst="rect">
             <a:avLst/>
@@ -16667,7 +17358,7 @@
         <p:spPr>
           <a:xfrm>
             <a:off x="3182040" y="914400"/>
-            <a:ext cx="2788560" cy="3931560"/>
+            <a:ext cx="2788200" cy="3931200"/>
           </a:xfrm>
           <a:prstGeom prst="rect">
             <a:avLst/>
@@ -16700,6 +17391,11 @@
             <a:noAutofit/>
           </a:bodyPr>
           <a:p>
+            <a:pPr>
+              <a:lnSpc>
+                <a:spcPct val="100000"/>
+              </a:lnSpc>
+            </a:pPr>
             <a:endParaRPr b="0" lang="en-US" sz="1800" spc="-1" strike="noStrike">
               <a:solidFill>
                 <a:srgbClr val="000000"/>
@@ -16718,7 +17414,7 @@
         <p:spPr>
           <a:xfrm>
             <a:off x="3182040" y="914400"/>
-            <a:ext cx="2788560" cy="868320"/>
+            <a:ext cx="2788200" cy="867960"/>
           </a:xfrm>
           <a:prstGeom prst="rect">
             <a:avLst/>
@@ -16744,6 +17440,11 @@
             <a:noAutofit/>
           </a:bodyPr>
           <a:p>
+            <a:pPr>
+              <a:lnSpc>
+                <a:spcPct val="100000"/>
+              </a:lnSpc>
+            </a:pPr>
             <a:endParaRPr b="0" lang="en-US" sz="1800" spc="-1" strike="noStrike">
               <a:solidFill>
                 <a:srgbClr val="ffffff"/>
@@ -16762,7 +17463,7 @@
         <p:spPr>
           <a:xfrm>
             <a:off x="3182040" y="914400"/>
-            <a:ext cx="2788560" cy="411120"/>
+            <a:ext cx="2788200" cy="410760"/>
           </a:xfrm>
           <a:prstGeom prst="rect">
             <a:avLst/>
@@ -16818,7 +17519,7 @@
         <p:spPr>
           <a:xfrm>
             <a:off x="3182040" y="1316880"/>
-            <a:ext cx="2788560" cy="383760"/>
+            <a:ext cx="2788200" cy="383400"/>
           </a:xfrm>
           <a:prstGeom prst="rect">
             <a:avLst/>
@@ -16848,7 +17549,7 @@
               </a:tabLst>
             </a:pPr>
             <a:r>
-              <a:rPr b="1" lang="en-US" sz="1200" spc="97" strike="noStrike">
+              <a:rPr b="1" lang="en-US" sz="1200" spc="94" strike="noStrike">
                 <a:solidFill>
                   <a:srgbClr val="ffffff"/>
                 </a:solidFill>
@@ -16874,7 +17575,7 @@
         <p:spPr>
           <a:xfrm>
             <a:off x="3456360" y="1847160"/>
-            <a:ext cx="2239920" cy="292320"/>
+            <a:ext cx="2239560" cy="291960"/>
           </a:xfrm>
           <a:prstGeom prst="rect">
             <a:avLst/>
@@ -16902,6 +17603,11 @@
             <a:noAutofit/>
           </a:bodyPr>
           <a:p>
+            <a:pPr>
+              <a:lnSpc>
+                <a:spcPct val="100000"/>
+              </a:lnSpc>
+            </a:pPr>
             <a:endParaRPr b="0" lang="en-US" sz="1800" spc="-1" strike="noStrike">
               <a:solidFill>
                 <a:srgbClr val="ffffff"/>
@@ -16920,7 +17626,7 @@
         <p:spPr>
           <a:xfrm>
             <a:off x="3456360" y="1847160"/>
-            <a:ext cx="2239920" cy="292320"/>
+            <a:ext cx="2239560" cy="291960"/>
           </a:xfrm>
           <a:prstGeom prst="rect">
             <a:avLst/>
@@ -16976,7 +17682,7 @@
         <p:spPr>
           <a:xfrm>
             <a:off x="3319200" y="2176200"/>
-            <a:ext cx="2514240" cy="868320"/>
+            <a:ext cx="2513880" cy="867960"/>
           </a:xfrm>
           <a:prstGeom prst="rect">
             <a:avLst/>
@@ -17032,7 +17738,7 @@
         <p:spPr>
           <a:xfrm>
             <a:off x="3319200" y="3182040"/>
-            <a:ext cx="200880" cy="200880"/>
+            <a:ext cx="200520" cy="200520"/>
           </a:xfrm>
           <a:prstGeom prst="ellipse">
             <a:avLst/>
@@ -17058,6 +17764,11 @@
             <a:noAutofit/>
           </a:bodyPr>
           <a:p>
+            <a:pPr>
+              <a:lnSpc>
+                <a:spcPct val="100000"/>
+              </a:lnSpc>
+            </a:pPr>
             <a:endParaRPr b="0" lang="en-US" sz="1800" spc="-1" strike="noStrike">
               <a:solidFill>
                 <a:srgbClr val="ffffff"/>
@@ -17076,7 +17787,7 @@
         <p:spPr>
           <a:xfrm>
             <a:off x="3593520" y="3090600"/>
-            <a:ext cx="2285640" cy="347040"/>
+            <a:ext cx="2285280" cy="346680"/>
           </a:xfrm>
           <a:prstGeom prst="rect">
             <a:avLst/>
@@ -17132,7 +17843,7 @@
         <p:spPr>
           <a:xfrm>
             <a:off x="3319200" y="3584520"/>
-            <a:ext cx="200880" cy="200880"/>
+            <a:ext cx="200520" cy="200520"/>
           </a:xfrm>
           <a:prstGeom prst="ellipse">
             <a:avLst/>
@@ -17158,6 +17869,11 @@
             <a:noAutofit/>
           </a:bodyPr>
           <a:p>
+            <a:pPr>
+              <a:lnSpc>
+                <a:spcPct val="100000"/>
+              </a:lnSpc>
+            </a:pPr>
             <a:endParaRPr b="0" lang="en-US" sz="1800" spc="-1" strike="noStrike">
               <a:solidFill>
                 <a:srgbClr val="ffffff"/>
@@ -17176,7 +17892,7 @@
         <p:spPr>
           <a:xfrm>
             <a:off x="3593520" y="3493080"/>
-            <a:ext cx="2285640" cy="347040"/>
+            <a:ext cx="2285280" cy="346680"/>
           </a:xfrm>
           <a:prstGeom prst="rect">
             <a:avLst/>
@@ -17232,7 +17948,7 @@
         <p:spPr>
           <a:xfrm>
             <a:off x="3319200" y="3986640"/>
-            <a:ext cx="200880" cy="200880"/>
+            <a:ext cx="200520" cy="200520"/>
           </a:xfrm>
           <a:prstGeom prst="ellipse">
             <a:avLst/>
@@ -17258,6 +17974,11 @@
             <a:noAutofit/>
           </a:bodyPr>
           <a:p>
+            <a:pPr>
+              <a:lnSpc>
+                <a:spcPct val="100000"/>
+              </a:lnSpc>
+            </a:pPr>
             <a:endParaRPr b="0" lang="en-US" sz="1800" spc="-1" strike="noStrike">
               <a:solidFill>
                 <a:srgbClr val="ffffff"/>
@@ -17276,7 +17997,7 @@
         <p:spPr>
           <a:xfrm>
             <a:off x="3593520" y="3895200"/>
-            <a:ext cx="2285640" cy="347040"/>
+            <a:ext cx="2285280" cy="346680"/>
           </a:xfrm>
           <a:prstGeom prst="rect">
             <a:avLst/>
@@ -17332,7 +18053,7 @@
         <p:spPr>
           <a:xfrm>
             <a:off x="3319200" y="4389120"/>
-            <a:ext cx="200880" cy="200880"/>
+            <a:ext cx="200520" cy="200520"/>
           </a:xfrm>
           <a:prstGeom prst="ellipse">
             <a:avLst/>
@@ -17358,6 +18079,11 @@
             <a:noAutofit/>
           </a:bodyPr>
           <a:p>
+            <a:pPr>
+              <a:lnSpc>
+                <a:spcPct val="100000"/>
+              </a:lnSpc>
+            </a:pPr>
             <a:endParaRPr b="0" lang="en-US" sz="1800" spc="-1" strike="noStrike">
               <a:solidFill>
                 <a:srgbClr val="ffffff"/>
@@ -17376,7 +18102,7 @@
         <p:spPr>
           <a:xfrm>
             <a:off x="3593520" y="4297680"/>
-            <a:ext cx="2285640" cy="347040"/>
+            <a:ext cx="2285280" cy="346680"/>
           </a:xfrm>
           <a:prstGeom prst="rect">
             <a:avLst/>
@@ -17432,7 +18158,7 @@
         <p:spPr>
           <a:xfrm>
             <a:off x="6089760" y="914400"/>
-            <a:ext cx="2788560" cy="3931560"/>
+            <a:ext cx="2788200" cy="3931200"/>
           </a:xfrm>
           <a:prstGeom prst="rect">
             <a:avLst/>
@@ -17465,6 +18191,11 @@
             <a:noAutofit/>
           </a:bodyPr>
           <a:p>
+            <a:pPr>
+              <a:lnSpc>
+                <a:spcPct val="100000"/>
+              </a:lnSpc>
+            </a:pPr>
             <a:endParaRPr b="0" lang="en-US" sz="1800" spc="-1" strike="noStrike">
               <a:solidFill>
                 <a:srgbClr val="000000"/>
@@ -17483,7 +18214,7 @@
         <p:spPr>
           <a:xfrm>
             <a:off x="6089760" y="914400"/>
-            <a:ext cx="2788560" cy="868320"/>
+            <a:ext cx="2788200" cy="867960"/>
           </a:xfrm>
           <a:prstGeom prst="rect">
             <a:avLst/>
@@ -17509,6 +18240,11 @@
             <a:noAutofit/>
           </a:bodyPr>
           <a:p>
+            <a:pPr>
+              <a:lnSpc>
+                <a:spcPct val="100000"/>
+              </a:lnSpc>
+            </a:pPr>
             <a:endParaRPr b="0" lang="en-US" sz="1800" spc="-1" strike="noStrike">
               <a:solidFill>
                 <a:srgbClr val="ffffff"/>
@@ -17527,7 +18263,7 @@
         <p:spPr>
           <a:xfrm>
             <a:off x="6089760" y="914400"/>
-            <a:ext cx="2788560" cy="411120"/>
+            <a:ext cx="2788200" cy="410760"/>
           </a:xfrm>
           <a:prstGeom prst="rect">
             <a:avLst/>
@@ -17583,7 +18319,7 @@
         <p:spPr>
           <a:xfrm>
             <a:off x="6089760" y="1316880"/>
-            <a:ext cx="2788560" cy="383760"/>
+            <a:ext cx="2788200" cy="383400"/>
           </a:xfrm>
           <a:prstGeom prst="rect">
             <a:avLst/>
@@ -17613,7 +18349,7 @@
               </a:tabLst>
             </a:pPr>
             <a:r>
-              <a:rPr b="1" lang="en-US" sz="1200" spc="97" strike="noStrike">
+              <a:rPr b="1" lang="en-US" sz="1200" spc="94" strike="noStrike">
                 <a:solidFill>
                   <a:srgbClr val="ffffff"/>
                 </a:solidFill>
@@ -17639,7 +18375,7 @@
         <p:spPr>
           <a:xfrm>
             <a:off x="6364080" y="1847160"/>
-            <a:ext cx="2239920" cy="292320"/>
+            <a:ext cx="2239560" cy="291960"/>
           </a:xfrm>
           <a:prstGeom prst="rect">
             <a:avLst/>
@@ -17667,6 +18403,11 @@
             <a:noAutofit/>
           </a:bodyPr>
           <a:p>
+            <a:pPr>
+              <a:lnSpc>
+                <a:spcPct val="100000"/>
+              </a:lnSpc>
+            </a:pPr>
             <a:endParaRPr b="0" lang="en-US" sz="1800" spc="-1" strike="noStrike">
               <a:solidFill>
                 <a:srgbClr val="ffffff"/>
@@ -17685,7 +18426,7 @@
         <p:spPr>
           <a:xfrm>
             <a:off x="6364080" y="1847160"/>
-            <a:ext cx="2239920" cy="292320"/>
+            <a:ext cx="2239560" cy="291960"/>
           </a:xfrm>
           <a:prstGeom prst="rect">
             <a:avLst/>
@@ -17741,7 +18482,7 @@
         <p:spPr>
           <a:xfrm>
             <a:off x="6226920" y="2176200"/>
-            <a:ext cx="2514240" cy="868320"/>
+            <a:ext cx="2513880" cy="867960"/>
           </a:xfrm>
           <a:prstGeom prst="rect">
             <a:avLst/>
@@ -17797,7 +18538,7 @@
         <p:spPr>
           <a:xfrm>
             <a:off x="6226920" y="3182040"/>
-            <a:ext cx="200880" cy="200880"/>
+            <a:ext cx="200520" cy="200520"/>
           </a:xfrm>
           <a:prstGeom prst="ellipse">
             <a:avLst/>
@@ -17823,6 +18564,11 @@
             <a:noAutofit/>
           </a:bodyPr>
           <a:p>
+            <a:pPr>
+              <a:lnSpc>
+                <a:spcPct val="100000"/>
+              </a:lnSpc>
+            </a:pPr>
             <a:endParaRPr b="0" lang="en-US" sz="1800" spc="-1" strike="noStrike">
               <a:solidFill>
                 <a:srgbClr val="ffffff"/>
@@ -17841,7 +18587,7 @@
         <p:spPr>
           <a:xfrm>
             <a:off x="6501240" y="3090600"/>
-            <a:ext cx="2285640" cy="347040"/>
+            <a:ext cx="2285280" cy="346680"/>
           </a:xfrm>
           <a:prstGeom prst="rect">
             <a:avLst/>
@@ -17897,7 +18643,7 @@
         <p:spPr>
           <a:xfrm>
             <a:off x="6226920" y="3584520"/>
-            <a:ext cx="200880" cy="200880"/>
+            <a:ext cx="200520" cy="200520"/>
           </a:xfrm>
           <a:prstGeom prst="ellipse">
             <a:avLst/>
@@ -17923,6 +18669,11 @@
             <a:noAutofit/>
           </a:bodyPr>
           <a:p>
+            <a:pPr>
+              <a:lnSpc>
+                <a:spcPct val="100000"/>
+              </a:lnSpc>
+            </a:pPr>
             <a:endParaRPr b="0" lang="en-US" sz="1800" spc="-1" strike="noStrike">
               <a:solidFill>
                 <a:srgbClr val="ffffff"/>
@@ -17941,7 +18692,7 @@
         <p:spPr>
           <a:xfrm>
             <a:off x="6501240" y="3493080"/>
-            <a:ext cx="2285640" cy="347040"/>
+            <a:ext cx="2285280" cy="346680"/>
           </a:xfrm>
           <a:prstGeom prst="rect">
             <a:avLst/>
@@ -17997,7 +18748,7 @@
         <p:spPr>
           <a:xfrm>
             <a:off x="6226920" y="3986640"/>
-            <a:ext cx="200880" cy="200880"/>
+            <a:ext cx="200520" cy="200520"/>
           </a:xfrm>
           <a:prstGeom prst="ellipse">
             <a:avLst/>
@@ -18023,6 +18774,11 @@
             <a:noAutofit/>
           </a:bodyPr>
           <a:p>
+            <a:pPr>
+              <a:lnSpc>
+                <a:spcPct val="100000"/>
+              </a:lnSpc>
+            </a:pPr>
             <a:endParaRPr b="0" lang="en-US" sz="1800" spc="-1" strike="noStrike">
               <a:solidFill>
                 <a:srgbClr val="ffffff"/>
@@ -18041,7 +18797,7 @@
         <p:spPr>
           <a:xfrm>
             <a:off x="6501240" y="3895200"/>
-            <a:ext cx="2285640" cy="347040"/>
+            <a:ext cx="2285280" cy="346680"/>
           </a:xfrm>
           <a:prstGeom prst="rect">
             <a:avLst/>
@@ -18097,7 +18853,7 @@
         <p:spPr>
           <a:xfrm>
             <a:off x="6226920" y="4389120"/>
-            <a:ext cx="200880" cy="200880"/>
+            <a:ext cx="200520" cy="200520"/>
           </a:xfrm>
           <a:prstGeom prst="ellipse">
             <a:avLst/>
@@ -18123,6 +18879,11 @@
             <a:noAutofit/>
           </a:bodyPr>
           <a:p>
+            <a:pPr>
+              <a:lnSpc>
+                <a:spcPct val="100000"/>
+              </a:lnSpc>
+            </a:pPr>
             <a:endParaRPr b="0" lang="en-US" sz="1800" spc="-1" strike="noStrike">
               <a:solidFill>
                 <a:srgbClr val="ffffff"/>
@@ -18141,7 +18902,7 @@
         <p:spPr>
           <a:xfrm>
             <a:off x="6501240" y="4297680"/>
-            <a:ext cx="2285640" cy="347040"/>
+            <a:ext cx="2285280" cy="346680"/>
           </a:xfrm>
           <a:prstGeom prst="rect">
             <a:avLst/>
@@ -18234,7 +18995,7 @@
         <p:spPr>
           <a:xfrm>
             <a:off x="0" y="0"/>
-            <a:ext cx="9143640" cy="776880"/>
+            <a:ext cx="9143280" cy="776520"/>
           </a:xfrm>
           <a:prstGeom prst="rect">
             <a:avLst/>
@@ -18260,6 +19021,11 @@
             <a:noAutofit/>
           </a:bodyPr>
           <a:p>
+            <a:pPr>
+              <a:lnSpc>
+                <a:spcPct val="100000"/>
+              </a:lnSpc>
+            </a:pPr>
             <a:endParaRPr b="0" lang="en-US" sz="1800" spc="-1" strike="noStrike">
               <a:solidFill>
                 <a:srgbClr val="ffffff"/>
@@ -18278,7 +19044,7 @@
         <p:spPr>
           <a:xfrm>
             <a:off x="365760" y="0"/>
-            <a:ext cx="8412120" cy="776880"/>
+            <a:ext cx="8411760" cy="776520"/>
           </a:xfrm>
           <a:prstGeom prst="rect">
             <a:avLst/>
@@ -18308,7 +19074,7 @@
               </a:tabLst>
             </a:pPr>
             <a:r>
-              <a:rPr b="1" lang="en-US" sz="2000" spc="299" strike="noStrike">
+              <a:rPr b="1" lang="en-US" sz="2000" spc="296" strike="noStrike">
                 <a:solidFill>
                   <a:srgbClr val="0a1628"/>
                 </a:solidFill>
@@ -18334,7 +19100,7 @@
         <p:spPr>
           <a:xfrm>
             <a:off x="320040" y="932760"/>
-            <a:ext cx="8503560" cy="712800"/>
+            <a:ext cx="8503200" cy="712440"/>
           </a:xfrm>
           <a:prstGeom prst="rect">
             <a:avLst/>
@@ -18367,6 +19133,11 @@
             <a:noAutofit/>
           </a:bodyPr>
           <a:p>
+            <a:pPr>
+              <a:lnSpc>
+                <a:spcPct val="100000"/>
+              </a:lnSpc>
+            </a:pPr>
             <a:endParaRPr b="0" lang="en-US" sz="1800" spc="-1" strike="noStrike">
               <a:solidFill>
                 <a:srgbClr val="ffffff"/>
@@ -18385,7 +19156,7 @@
         <p:spPr>
           <a:xfrm>
             <a:off x="320040" y="932760"/>
-            <a:ext cx="712800" cy="712800"/>
+            <a:ext cx="712440" cy="712440"/>
           </a:xfrm>
           <a:prstGeom prst="rect">
             <a:avLst/>
@@ -18411,6 +19182,11 @@
             <a:noAutofit/>
           </a:bodyPr>
           <a:p>
+            <a:pPr>
+              <a:lnSpc>
+                <a:spcPct val="100000"/>
+              </a:lnSpc>
+            </a:pPr>
             <a:endParaRPr b="0" lang="en-US" sz="1800" spc="-1" strike="noStrike">
               <a:solidFill>
                 <a:srgbClr val="ffffff"/>
@@ -18429,7 +19205,7 @@
         <p:spPr>
           <a:xfrm>
             <a:off x="320040" y="932760"/>
-            <a:ext cx="712800" cy="712800"/>
+            <a:ext cx="712440" cy="712440"/>
           </a:xfrm>
           <a:prstGeom prst="rect">
             <a:avLst/>
@@ -18485,7 +19261,7 @@
         <p:spPr>
           <a:xfrm>
             <a:off x="1115640" y="996840"/>
-            <a:ext cx="2194200" cy="347040"/>
+            <a:ext cx="2193840" cy="346680"/>
           </a:xfrm>
           <a:prstGeom prst="rect">
             <a:avLst/>
@@ -18541,7 +19317,7 @@
         <p:spPr>
           <a:xfrm>
             <a:off x="1115640" y="1334880"/>
-            <a:ext cx="1416960" cy="219240"/>
+            <a:ext cx="1416600" cy="218880"/>
           </a:xfrm>
           <a:prstGeom prst="rect">
             <a:avLst/>
@@ -18569,6 +19345,11 @@
             <a:noAutofit/>
           </a:bodyPr>
           <a:p>
+            <a:pPr>
+              <a:lnSpc>
+                <a:spcPct val="100000"/>
+              </a:lnSpc>
+            </a:pPr>
             <a:endParaRPr b="0" lang="en-US" sz="1800" spc="-1" strike="noStrike">
               <a:solidFill>
                 <a:srgbClr val="ffffff"/>
@@ -18587,7 +19368,7 @@
         <p:spPr>
           <a:xfrm>
             <a:off x="1115640" y="1334880"/>
-            <a:ext cx="1416960" cy="219240"/>
+            <a:ext cx="1416600" cy="218880"/>
           </a:xfrm>
           <a:prstGeom prst="rect">
             <a:avLst/>
@@ -18652,7 +19433,7 @@
         <p:spPr>
           <a:xfrm>
             <a:off x="3108960" y="1024200"/>
-            <a:ext cx="5577480" cy="529920"/>
+            <a:ext cx="5577120" cy="529560"/>
           </a:xfrm>
           <a:prstGeom prst="rect">
             <a:avLst/>
@@ -18708,7 +19489,7 @@
         <p:spPr>
           <a:xfrm>
             <a:off x="3017520" y="1069920"/>
-            <a:ext cx="27000" cy="438480"/>
+            <a:ext cx="26640" cy="438120"/>
           </a:xfrm>
           <a:prstGeom prst="rect">
             <a:avLst/>
@@ -18734,6 +19515,11 @@
             <a:noAutofit/>
           </a:bodyPr>
           <a:p>
+            <a:pPr>
+              <a:lnSpc>
+                <a:spcPct val="100000"/>
+              </a:lnSpc>
+            </a:pPr>
             <a:endParaRPr b="0" lang="en-US" sz="1800" spc="-1" strike="noStrike">
               <a:solidFill>
                 <a:srgbClr val="ffffff"/>
@@ -18752,7 +19538,7 @@
         <p:spPr>
           <a:xfrm>
             <a:off x="320040" y="1755720"/>
-            <a:ext cx="8503560" cy="712800"/>
+            <a:ext cx="8503200" cy="712440"/>
           </a:xfrm>
           <a:prstGeom prst="rect">
             <a:avLst/>
@@ -18785,6 +19571,11 @@
             <a:noAutofit/>
           </a:bodyPr>
           <a:p>
+            <a:pPr>
+              <a:lnSpc>
+                <a:spcPct val="100000"/>
+              </a:lnSpc>
+            </a:pPr>
             <a:endParaRPr b="0" lang="en-US" sz="1800" spc="-1" strike="noStrike">
               <a:solidFill>
                 <a:srgbClr val="ffffff"/>
@@ -18803,7 +19594,7 @@
         <p:spPr>
           <a:xfrm>
             <a:off x="320040" y="1755720"/>
-            <a:ext cx="712800" cy="712800"/>
+            <a:ext cx="712440" cy="712440"/>
           </a:xfrm>
           <a:prstGeom prst="rect">
             <a:avLst/>
@@ -18829,6 +19620,11 @@
             <a:noAutofit/>
           </a:bodyPr>
           <a:p>
+            <a:pPr>
+              <a:lnSpc>
+                <a:spcPct val="100000"/>
+              </a:lnSpc>
+            </a:pPr>
             <a:endParaRPr b="0" lang="en-US" sz="1800" spc="-1" strike="noStrike">
               <a:solidFill>
                 <a:srgbClr val="ffffff"/>
@@ -18847,7 +19643,7 @@
         <p:spPr>
           <a:xfrm>
             <a:off x="320040" y="1755720"/>
-            <a:ext cx="712800" cy="712800"/>
+            <a:ext cx="712440" cy="712440"/>
           </a:xfrm>
           <a:prstGeom prst="rect">
             <a:avLst/>
@@ -18903,7 +19699,7 @@
         <p:spPr>
           <a:xfrm>
             <a:off x="1115640" y="1819800"/>
-            <a:ext cx="2194200" cy="347040"/>
+            <a:ext cx="2193840" cy="346680"/>
           </a:xfrm>
           <a:prstGeom prst="rect">
             <a:avLst/>
@@ -18959,7 +19755,7 @@
         <p:spPr>
           <a:xfrm>
             <a:off x="1115640" y="2157840"/>
-            <a:ext cx="1416960" cy="219240"/>
+            <a:ext cx="1416600" cy="218880"/>
           </a:xfrm>
           <a:prstGeom prst="rect">
             <a:avLst/>
@@ -18987,6 +19783,11 @@
             <a:noAutofit/>
           </a:bodyPr>
           <a:p>
+            <a:pPr>
+              <a:lnSpc>
+                <a:spcPct val="100000"/>
+              </a:lnSpc>
+            </a:pPr>
             <a:endParaRPr b="0" lang="en-US" sz="1800" spc="-1" strike="noStrike">
               <a:solidFill>
                 <a:srgbClr val="ffffff"/>
@@ -19005,7 +19806,7 @@
         <p:spPr>
           <a:xfrm>
             <a:off x="1115640" y="2157840"/>
-            <a:ext cx="1416960" cy="219240"/>
+            <a:ext cx="1416600" cy="218880"/>
           </a:xfrm>
           <a:prstGeom prst="rect">
             <a:avLst/>
@@ -19070,7 +19871,7 @@
         <p:spPr>
           <a:xfrm>
             <a:off x="3108960" y="1847160"/>
-            <a:ext cx="5577480" cy="529920"/>
+            <a:ext cx="5577120" cy="529560"/>
           </a:xfrm>
           <a:prstGeom prst="rect">
             <a:avLst/>
@@ -19126,7 +19927,7 @@
         <p:spPr>
           <a:xfrm>
             <a:off x="3017520" y="1892880"/>
-            <a:ext cx="27000" cy="438480"/>
+            <a:ext cx="26640" cy="438120"/>
           </a:xfrm>
           <a:prstGeom prst="rect">
             <a:avLst/>
@@ -19152,6 +19953,11 @@
             <a:noAutofit/>
           </a:bodyPr>
           <a:p>
+            <a:pPr>
+              <a:lnSpc>
+                <a:spcPct val="100000"/>
+              </a:lnSpc>
+            </a:pPr>
             <a:endParaRPr b="0" lang="en-US" sz="1800" spc="-1" strike="noStrike">
               <a:solidFill>
                 <a:srgbClr val="ffffff"/>
@@ -19170,7 +19976,7 @@
         <p:spPr>
           <a:xfrm>
             <a:off x="320040" y="2578680"/>
-            <a:ext cx="8503560" cy="712800"/>
+            <a:ext cx="8503200" cy="712440"/>
           </a:xfrm>
           <a:prstGeom prst="rect">
             <a:avLst/>
@@ -19203,6 +20009,11 @@
             <a:noAutofit/>
           </a:bodyPr>
           <a:p>
+            <a:pPr>
+              <a:lnSpc>
+                <a:spcPct val="100000"/>
+              </a:lnSpc>
+            </a:pPr>
             <a:endParaRPr b="0" lang="en-US" sz="1800" spc="-1" strike="noStrike">
               <a:solidFill>
                 <a:srgbClr val="ffffff"/>
@@ -19221,7 +20032,7 @@
         <p:spPr>
           <a:xfrm>
             <a:off x="320040" y="2578680"/>
-            <a:ext cx="712800" cy="712800"/>
+            <a:ext cx="712440" cy="712440"/>
           </a:xfrm>
           <a:prstGeom prst="rect">
             <a:avLst/>
@@ -19247,6 +20058,11 @@
             <a:noAutofit/>
           </a:bodyPr>
           <a:p>
+            <a:pPr>
+              <a:lnSpc>
+                <a:spcPct val="100000"/>
+              </a:lnSpc>
+            </a:pPr>
             <a:endParaRPr b="0" lang="en-US" sz="1800" spc="-1" strike="noStrike">
               <a:solidFill>
                 <a:srgbClr val="000000"/>
@@ -19265,7 +20081,7 @@
         <p:spPr>
           <a:xfrm>
             <a:off x="320040" y="2578680"/>
-            <a:ext cx="712800" cy="712800"/>
+            <a:ext cx="712440" cy="712440"/>
           </a:xfrm>
           <a:prstGeom prst="rect">
             <a:avLst/>
@@ -19321,7 +20137,7 @@
         <p:spPr>
           <a:xfrm>
             <a:off x="1115640" y="2642760"/>
-            <a:ext cx="2194200" cy="347040"/>
+            <a:ext cx="2193840" cy="346680"/>
           </a:xfrm>
           <a:prstGeom prst="rect">
             <a:avLst/>
@@ -19377,7 +20193,7 @@
         <p:spPr>
           <a:xfrm>
             <a:off x="1115640" y="2980800"/>
-            <a:ext cx="1416960" cy="219240"/>
+            <a:ext cx="1416600" cy="218880"/>
           </a:xfrm>
           <a:prstGeom prst="rect">
             <a:avLst/>
@@ -19405,6 +20221,11 @@
             <a:noAutofit/>
           </a:bodyPr>
           <a:p>
+            <a:pPr>
+              <a:lnSpc>
+                <a:spcPct val="100000"/>
+              </a:lnSpc>
+            </a:pPr>
             <a:endParaRPr b="0" lang="en-US" sz="1800" spc="-1" strike="noStrike">
               <a:solidFill>
                 <a:srgbClr val="000000"/>
@@ -19423,7 +20244,7 @@
         <p:spPr>
           <a:xfrm>
             <a:off x="1115640" y="2980800"/>
-            <a:ext cx="1416960" cy="219240"/>
+            <a:ext cx="1416600" cy="218880"/>
           </a:xfrm>
           <a:prstGeom prst="rect">
             <a:avLst/>
@@ -19488,7 +20309,7 @@
         <p:spPr>
           <a:xfrm>
             <a:off x="3108960" y="2670120"/>
-            <a:ext cx="5577480" cy="529920"/>
+            <a:ext cx="5577120" cy="529560"/>
           </a:xfrm>
           <a:prstGeom prst="rect">
             <a:avLst/>
@@ -19544,7 +20365,7 @@
         <p:spPr>
           <a:xfrm>
             <a:off x="3017520" y="2715840"/>
-            <a:ext cx="27000" cy="438480"/>
+            <a:ext cx="26640" cy="438120"/>
           </a:xfrm>
           <a:prstGeom prst="rect">
             <a:avLst/>
@@ -19570,6 +20391,11 @@
             <a:noAutofit/>
           </a:bodyPr>
           <a:p>
+            <a:pPr>
+              <a:lnSpc>
+                <a:spcPct val="100000"/>
+              </a:lnSpc>
+            </a:pPr>
             <a:endParaRPr b="0" lang="en-US" sz="1800" spc="-1" strike="noStrike">
               <a:solidFill>
                 <a:srgbClr val="000000"/>
@@ -19588,7 +20414,7 @@
         <p:spPr>
           <a:xfrm>
             <a:off x="320040" y="3401640"/>
-            <a:ext cx="8503560" cy="712800"/>
+            <a:ext cx="8503200" cy="712440"/>
           </a:xfrm>
           <a:prstGeom prst="rect">
             <a:avLst/>
@@ -19621,6 +20447,11 @@
             <a:noAutofit/>
           </a:bodyPr>
           <a:p>
+            <a:pPr>
+              <a:lnSpc>
+                <a:spcPct val="100000"/>
+              </a:lnSpc>
+            </a:pPr>
             <a:endParaRPr b="0" lang="en-US" sz="1800" spc="-1" strike="noStrike">
               <a:solidFill>
                 <a:srgbClr val="ffffff"/>
@@ -19639,7 +20470,7 @@
         <p:spPr>
           <a:xfrm>
             <a:off x="320040" y="3401640"/>
-            <a:ext cx="712800" cy="712800"/>
+            <a:ext cx="712440" cy="712440"/>
           </a:xfrm>
           <a:prstGeom prst="rect">
             <a:avLst/>
@@ -19665,6 +20496,11 @@
             <a:noAutofit/>
           </a:bodyPr>
           <a:p>
+            <a:pPr>
+              <a:lnSpc>
+                <a:spcPct val="100000"/>
+              </a:lnSpc>
+            </a:pPr>
             <a:endParaRPr b="0" lang="en-US" sz="1800" spc="-1" strike="noStrike">
               <a:solidFill>
                 <a:srgbClr val="ffffff"/>
@@ -19683,7 +20519,7 @@
         <p:spPr>
           <a:xfrm>
             <a:off x="320040" y="3401640"/>
-            <a:ext cx="712800" cy="712800"/>
+            <a:ext cx="712440" cy="712440"/>
           </a:xfrm>
           <a:prstGeom prst="rect">
             <a:avLst/>
@@ -19739,7 +20575,7 @@
         <p:spPr>
           <a:xfrm>
             <a:off x="1115640" y="3465720"/>
-            <a:ext cx="2194200" cy="347040"/>
+            <a:ext cx="2193840" cy="346680"/>
           </a:xfrm>
           <a:prstGeom prst="rect">
             <a:avLst/>
@@ -19795,7 +20631,7 @@
         <p:spPr>
           <a:xfrm>
             <a:off x="1115640" y="3803760"/>
-            <a:ext cx="1416960" cy="219240"/>
+            <a:ext cx="1416600" cy="218880"/>
           </a:xfrm>
           <a:prstGeom prst="rect">
             <a:avLst/>
@@ -19823,6 +20659,11 @@
             <a:noAutofit/>
           </a:bodyPr>
           <a:p>
+            <a:pPr>
+              <a:lnSpc>
+                <a:spcPct val="100000"/>
+              </a:lnSpc>
+            </a:pPr>
             <a:endParaRPr b="0" lang="en-US" sz="1800" spc="-1" strike="noStrike">
               <a:solidFill>
                 <a:srgbClr val="ffffff"/>
@@ -19841,7 +20682,7 @@
         <p:spPr>
           <a:xfrm>
             <a:off x="1115640" y="3803760"/>
-            <a:ext cx="1416960" cy="219240"/>
+            <a:ext cx="1416600" cy="218880"/>
           </a:xfrm>
           <a:prstGeom prst="rect">
             <a:avLst/>
@@ -19906,7 +20747,7 @@
         <p:spPr>
           <a:xfrm>
             <a:off x="3108960" y="3493080"/>
-            <a:ext cx="5577480" cy="529920"/>
+            <a:ext cx="5577120" cy="529560"/>
           </a:xfrm>
           <a:prstGeom prst="rect">
             <a:avLst/>
@@ -19962,7 +20803,7 @@
         <p:spPr>
           <a:xfrm>
             <a:off x="3017520" y="3538800"/>
-            <a:ext cx="27000" cy="438480"/>
+            <a:ext cx="26640" cy="438120"/>
           </a:xfrm>
           <a:prstGeom prst="rect">
             <a:avLst/>
@@ -19988,6 +20829,11 @@
             <a:noAutofit/>
           </a:bodyPr>
           <a:p>
+            <a:pPr>
+              <a:lnSpc>
+                <a:spcPct val="100000"/>
+              </a:lnSpc>
+            </a:pPr>
             <a:endParaRPr b="0" lang="en-US" sz="1800" spc="-1" strike="noStrike">
               <a:solidFill>
                 <a:srgbClr val="ffffff"/>
@@ -20006,7 +20852,7 @@
         <p:spPr>
           <a:xfrm>
             <a:off x="320040" y="4224600"/>
-            <a:ext cx="8503560" cy="712800"/>
+            <a:ext cx="8503200" cy="712440"/>
           </a:xfrm>
           <a:prstGeom prst="rect">
             <a:avLst/>
@@ -20039,6 +20885,11 @@
             <a:noAutofit/>
           </a:bodyPr>
           <a:p>
+            <a:pPr>
+              <a:lnSpc>
+                <a:spcPct val="100000"/>
+              </a:lnSpc>
+            </a:pPr>
             <a:endParaRPr b="0" lang="en-US" sz="1800" spc="-1" strike="noStrike">
               <a:solidFill>
                 <a:srgbClr val="ffffff"/>
@@ -20057,7 +20908,7 @@
         <p:spPr>
           <a:xfrm>
             <a:off x="320040" y="4224600"/>
-            <a:ext cx="712800" cy="712800"/>
+            <a:ext cx="712440" cy="712440"/>
           </a:xfrm>
           <a:prstGeom prst="rect">
             <a:avLst/>
@@ -20083,6 +20934,11 @@
             <a:noAutofit/>
           </a:bodyPr>
           <a:p>
+            <a:pPr>
+              <a:lnSpc>
+                <a:spcPct val="100000"/>
+              </a:lnSpc>
+            </a:pPr>
             <a:endParaRPr b="0" lang="en-US" sz="1800" spc="-1" strike="noStrike">
               <a:solidFill>
                 <a:srgbClr val="ffffff"/>
@@ -20101,7 +20957,7 @@
         <p:spPr>
           <a:xfrm>
             <a:off x="320040" y="4224600"/>
-            <a:ext cx="712800" cy="712800"/>
+            <a:ext cx="712440" cy="712440"/>
           </a:xfrm>
           <a:prstGeom prst="rect">
             <a:avLst/>
@@ -20157,7 +21013,7 @@
         <p:spPr>
           <a:xfrm>
             <a:off x="1115640" y="4288680"/>
-            <a:ext cx="2194200" cy="347040"/>
+            <a:ext cx="2193840" cy="346680"/>
           </a:xfrm>
           <a:prstGeom prst="rect">
             <a:avLst/>
@@ -20213,7 +21069,7 @@
         <p:spPr>
           <a:xfrm>
             <a:off x="1115640" y="4626720"/>
-            <a:ext cx="1416960" cy="219240"/>
+            <a:ext cx="1416600" cy="218880"/>
           </a:xfrm>
           <a:prstGeom prst="rect">
             <a:avLst/>
@@ -20241,6 +21097,11 @@
             <a:noAutofit/>
           </a:bodyPr>
           <a:p>
+            <a:pPr>
+              <a:lnSpc>
+                <a:spcPct val="100000"/>
+              </a:lnSpc>
+            </a:pPr>
             <a:endParaRPr b="0" lang="en-US" sz="1800" spc="-1" strike="noStrike">
               <a:solidFill>
                 <a:srgbClr val="ffffff"/>
@@ -20259,7 +21120,7 @@
         <p:spPr>
           <a:xfrm>
             <a:off x="1115640" y="4626720"/>
-            <a:ext cx="1416960" cy="219240"/>
+            <a:ext cx="1416600" cy="218880"/>
           </a:xfrm>
           <a:prstGeom prst="rect">
             <a:avLst/>
@@ -20324,7 +21185,7 @@
         <p:spPr>
           <a:xfrm>
             <a:off x="3108960" y="4316040"/>
-            <a:ext cx="5577480" cy="529920"/>
+            <a:ext cx="5577120" cy="529560"/>
           </a:xfrm>
           <a:prstGeom prst="rect">
             <a:avLst/>
@@ -20380,7 +21241,7 @@
         <p:spPr>
           <a:xfrm>
             <a:off x="3017520" y="4361760"/>
-            <a:ext cx="27000" cy="438480"/>
+            <a:ext cx="26640" cy="438120"/>
           </a:xfrm>
           <a:prstGeom prst="rect">
             <a:avLst/>
@@ -20406,6 +21267,11 @@
             <a:noAutofit/>
           </a:bodyPr>
           <a:p>
+            <a:pPr>
+              <a:lnSpc>
+                <a:spcPct val="100000"/>
+              </a:lnSpc>
+            </a:pPr>
             <a:endParaRPr b="0" lang="en-US" sz="1800" spc="-1" strike="noStrike">
               <a:solidFill>
                 <a:srgbClr val="ffffff"/>
@@ -20461,7 +21327,7 @@
         <p:spPr>
           <a:xfrm>
             <a:off x="0" y="0"/>
-            <a:ext cx="9143640" cy="776880"/>
+            <a:ext cx="9143280" cy="776520"/>
           </a:xfrm>
           <a:prstGeom prst="rect">
             <a:avLst/>
@@ -20487,6 +21353,11 @@
             <a:noAutofit/>
           </a:bodyPr>
           <a:p>
+            <a:pPr>
+              <a:lnSpc>
+                <a:spcPct val="100000"/>
+              </a:lnSpc>
+            </a:pPr>
             <a:endParaRPr b="0" lang="en-US" sz="1800" spc="-1" strike="noStrike">
               <a:solidFill>
                 <a:srgbClr val="ffffff"/>
@@ -20505,7 +21376,7 @@
         <p:spPr>
           <a:xfrm>
             <a:off x="365760" y="0"/>
-            <a:ext cx="8412120" cy="776880"/>
+            <a:ext cx="8411760" cy="776520"/>
           </a:xfrm>
           <a:prstGeom prst="rect">
             <a:avLst/>
@@ -20535,7 +21406,7 @@
               </a:tabLst>
             </a:pPr>
             <a:r>
-              <a:rPr b="1" lang="en-US" sz="2000" spc="299" strike="noStrike">
+              <a:rPr b="1" lang="en-US" sz="2000" spc="296" strike="noStrike">
                 <a:solidFill>
                   <a:srgbClr val="ffffff"/>
                 </a:solidFill>
@@ -20561,7 +21432,7 @@
         <p:spPr>
           <a:xfrm>
             <a:off x="365760" y="841320"/>
-            <a:ext cx="8412120" cy="347040"/>
+            <a:ext cx="8411760" cy="346680"/>
           </a:xfrm>
           <a:prstGeom prst="rect">
             <a:avLst/>
@@ -20617,7 +21488,7 @@
         <p:spPr>
           <a:xfrm>
             <a:off x="255960" y="1280160"/>
-            <a:ext cx="2788560" cy="3565800"/>
+            <a:ext cx="2788200" cy="3565440"/>
           </a:xfrm>
           <a:prstGeom prst="rect">
             <a:avLst/>
@@ -20650,6 +21521,11 @@
             <a:noAutofit/>
           </a:bodyPr>
           <a:p>
+            <a:pPr>
+              <a:lnSpc>
+                <a:spcPct val="100000"/>
+              </a:lnSpc>
+            </a:pPr>
             <a:endParaRPr b="0" lang="en-US" sz="1800" spc="-1" strike="noStrike">
               <a:solidFill>
                 <a:srgbClr val="000000"/>
@@ -20668,7 +21544,7 @@
         <p:spPr>
           <a:xfrm>
             <a:off x="255960" y="1280160"/>
-            <a:ext cx="2788560" cy="685440"/>
+            <a:ext cx="2788200" cy="685080"/>
           </a:xfrm>
           <a:prstGeom prst="rect">
             <a:avLst/>
@@ -20694,6 +21570,11 @@
             <a:noAutofit/>
           </a:bodyPr>
           <a:p>
+            <a:pPr>
+              <a:lnSpc>
+                <a:spcPct val="100000"/>
+              </a:lnSpc>
+            </a:pPr>
             <a:endParaRPr b="0" lang="en-US" sz="1800" spc="-1" strike="noStrike">
               <a:solidFill>
                 <a:srgbClr val="ffffff"/>
@@ -20712,7 +21593,7 @@
         <p:spPr>
           <a:xfrm>
             <a:off x="255960" y="1280160"/>
-            <a:ext cx="2788560" cy="685440"/>
+            <a:ext cx="2788200" cy="685080"/>
           </a:xfrm>
           <a:prstGeom prst="rect">
             <a:avLst/>
@@ -20768,7 +21649,7 @@
         <p:spPr>
           <a:xfrm>
             <a:off x="365760" y="2030040"/>
-            <a:ext cx="2559960" cy="383760"/>
+            <a:ext cx="2559600" cy="383400"/>
           </a:xfrm>
           <a:prstGeom prst="rect">
             <a:avLst/>
@@ -20798,7 +21679,7 @@
               </a:tabLst>
             </a:pPr>
             <a:r>
-              <a:rPr b="1" lang="en-US" sz="1300" spc="97" strike="noStrike">
+              <a:rPr b="1" lang="en-US" sz="1300" spc="94" strike="noStrike">
                 <a:solidFill>
                   <a:srgbClr val="028090"/>
                 </a:solidFill>
@@ -20824,7 +21705,7 @@
         <p:spPr>
           <a:xfrm>
             <a:off x="484560" y="2468880"/>
-            <a:ext cx="2331360" cy="273960"/>
+            <a:ext cx="2331000" cy="273600"/>
           </a:xfrm>
           <a:prstGeom prst="rect">
             <a:avLst/>
@@ -20852,6 +21733,11 @@
             <a:noAutofit/>
           </a:bodyPr>
           <a:p>
+            <a:pPr>
+              <a:lnSpc>
+                <a:spcPct val="100000"/>
+              </a:lnSpc>
+            </a:pPr>
             <a:endParaRPr b="0" lang="en-US" sz="1800" spc="-1" strike="noStrike">
               <a:solidFill>
                 <a:srgbClr val="ffffff"/>
@@ -20870,7 +21756,7 @@
         <p:spPr>
           <a:xfrm>
             <a:off x="484560" y="2468880"/>
-            <a:ext cx="2331360" cy="273960"/>
+            <a:ext cx="2331000" cy="273600"/>
           </a:xfrm>
           <a:prstGeom prst="rect">
             <a:avLst/>
@@ -20926,7 +21812,7 @@
         <p:spPr>
           <a:xfrm>
             <a:off x="365760" y="2788920"/>
-            <a:ext cx="2559960" cy="804240"/>
+            <a:ext cx="2559600" cy="803880"/>
           </a:xfrm>
           <a:prstGeom prst="rect">
             <a:avLst/>
@@ -20982,7 +21868,7 @@
         <p:spPr>
           <a:xfrm>
             <a:off x="393120" y="3712320"/>
-            <a:ext cx="182520" cy="182520"/>
+            <a:ext cx="182160" cy="182160"/>
           </a:xfrm>
           <a:prstGeom prst="ellipse">
             <a:avLst/>
@@ -21008,6 +21894,11 @@
             <a:noAutofit/>
           </a:bodyPr>
           <a:p>
+            <a:pPr>
+              <a:lnSpc>
+                <a:spcPct val="100000"/>
+              </a:lnSpc>
+            </a:pPr>
             <a:endParaRPr b="0" lang="en-US" sz="1800" spc="-1" strike="noStrike">
               <a:solidFill>
                 <a:srgbClr val="ffffff"/>
@@ -21026,7 +21917,7 @@
         <p:spPr>
           <a:xfrm>
             <a:off x="640080" y="3657600"/>
-            <a:ext cx="2285640" cy="273960"/>
+            <a:ext cx="2285280" cy="273600"/>
           </a:xfrm>
           <a:prstGeom prst="rect">
             <a:avLst/>
@@ -21082,7 +21973,7 @@
         <p:spPr>
           <a:xfrm>
             <a:off x="393120" y="4005000"/>
-            <a:ext cx="182520" cy="182520"/>
+            <a:ext cx="182160" cy="182160"/>
           </a:xfrm>
           <a:prstGeom prst="ellipse">
             <a:avLst/>
@@ -21108,6 +21999,11 @@
             <a:noAutofit/>
           </a:bodyPr>
           <a:p>
+            <a:pPr>
+              <a:lnSpc>
+                <a:spcPct val="100000"/>
+              </a:lnSpc>
+            </a:pPr>
             <a:endParaRPr b="0" lang="en-US" sz="1800" spc="-1" strike="noStrike">
               <a:solidFill>
                 <a:srgbClr val="ffffff"/>
@@ -21126,7 +22022,7 @@
         <p:spPr>
           <a:xfrm>
             <a:off x="640080" y="3950280"/>
-            <a:ext cx="2285640" cy="273960"/>
+            <a:ext cx="2285280" cy="273600"/>
           </a:xfrm>
           <a:prstGeom prst="rect">
             <a:avLst/>
@@ -21182,7 +22078,7 @@
         <p:spPr>
           <a:xfrm>
             <a:off x="393120" y="4297680"/>
-            <a:ext cx="182520" cy="182520"/>
+            <a:ext cx="182160" cy="182160"/>
           </a:xfrm>
           <a:prstGeom prst="ellipse">
             <a:avLst/>
@@ -21208,6 +22104,11 @@
             <a:noAutofit/>
           </a:bodyPr>
           <a:p>
+            <a:pPr>
+              <a:lnSpc>
+                <a:spcPct val="100000"/>
+              </a:lnSpc>
+            </a:pPr>
             <a:endParaRPr b="0" lang="en-US" sz="1800" spc="-1" strike="noStrike">
               <a:solidFill>
                 <a:srgbClr val="ffffff"/>
@@ -21226,7 +22127,7 @@
         <p:spPr>
           <a:xfrm>
             <a:off x="640080" y="4242960"/>
-            <a:ext cx="2285640" cy="273960"/>
+            <a:ext cx="2285280" cy="273600"/>
           </a:xfrm>
           <a:prstGeom prst="rect">
             <a:avLst/>
@@ -21282,7 +22183,7 @@
         <p:spPr>
           <a:xfrm>
             <a:off x="393120" y="4590360"/>
-            <a:ext cx="182520" cy="182520"/>
+            <a:ext cx="182160" cy="182160"/>
           </a:xfrm>
           <a:prstGeom prst="ellipse">
             <a:avLst/>
@@ -21308,6 +22209,11 @@
             <a:noAutofit/>
           </a:bodyPr>
           <a:p>
+            <a:pPr>
+              <a:lnSpc>
+                <a:spcPct val="100000"/>
+              </a:lnSpc>
+            </a:pPr>
             <a:endParaRPr b="0" lang="en-US" sz="1800" spc="-1" strike="noStrike">
               <a:solidFill>
                 <a:srgbClr val="ffffff"/>
@@ -21326,7 +22232,7 @@
         <p:spPr>
           <a:xfrm>
             <a:off x="640080" y="4535280"/>
-            <a:ext cx="2285640" cy="273960"/>
+            <a:ext cx="2285280" cy="273600"/>
           </a:xfrm>
           <a:prstGeom prst="rect">
             <a:avLst/>
@@ -21382,7 +22288,7 @@
         <p:spPr>
           <a:xfrm>
             <a:off x="3182040" y="1280160"/>
-            <a:ext cx="2788560" cy="3565800"/>
+            <a:ext cx="2788200" cy="3565440"/>
           </a:xfrm>
           <a:prstGeom prst="rect">
             <a:avLst/>
@@ -21415,6 +22321,11 @@
             <a:noAutofit/>
           </a:bodyPr>
           <a:p>
+            <a:pPr>
+              <a:lnSpc>
+                <a:spcPct val="100000"/>
+              </a:lnSpc>
+            </a:pPr>
             <a:endParaRPr b="0" lang="en-US" sz="1800" spc="-1" strike="noStrike">
               <a:solidFill>
                 <a:srgbClr val="000000"/>
@@ -21433,7 +22344,7 @@
         <p:spPr>
           <a:xfrm>
             <a:off x="3182040" y="1280160"/>
-            <a:ext cx="2788560" cy="685440"/>
+            <a:ext cx="2788200" cy="685080"/>
           </a:xfrm>
           <a:prstGeom prst="rect">
             <a:avLst/>
@@ -21459,6 +22370,11 @@
             <a:noAutofit/>
           </a:bodyPr>
           <a:p>
+            <a:pPr>
+              <a:lnSpc>
+                <a:spcPct val="100000"/>
+              </a:lnSpc>
+            </a:pPr>
             <a:endParaRPr b="0" lang="en-US" sz="1800" spc="-1" strike="noStrike">
               <a:solidFill>
                 <a:srgbClr val="ffffff"/>
@@ -21477,7 +22393,7 @@
         <p:spPr>
           <a:xfrm>
             <a:off x="3182040" y="1280160"/>
-            <a:ext cx="2788560" cy="685440"/>
+            <a:ext cx="2788200" cy="685080"/>
           </a:xfrm>
           <a:prstGeom prst="rect">
             <a:avLst/>
@@ -21533,7 +22449,7 @@
         <p:spPr>
           <a:xfrm>
             <a:off x="3291840" y="2030040"/>
-            <a:ext cx="2559960" cy="383760"/>
+            <a:ext cx="2559600" cy="383400"/>
           </a:xfrm>
           <a:prstGeom prst="rect">
             <a:avLst/>
@@ -21563,7 +22479,7 @@
               </a:tabLst>
             </a:pPr>
             <a:r>
-              <a:rPr b="1" lang="en-US" sz="1300" spc="97" strike="noStrike">
+              <a:rPr b="1" lang="en-US" sz="1300" spc="94" strike="noStrike">
                 <a:solidFill>
                   <a:srgbClr val="00a896"/>
                 </a:solidFill>
@@ -21589,7 +22505,7 @@
         <p:spPr>
           <a:xfrm>
             <a:off x="3410640" y="2468880"/>
-            <a:ext cx="2331360" cy="273960"/>
+            <a:ext cx="2331000" cy="273600"/>
           </a:xfrm>
           <a:prstGeom prst="rect">
             <a:avLst/>
@@ -21617,6 +22533,11 @@
             <a:noAutofit/>
           </a:bodyPr>
           <a:p>
+            <a:pPr>
+              <a:lnSpc>
+                <a:spcPct val="100000"/>
+              </a:lnSpc>
+            </a:pPr>
             <a:endParaRPr b="0" lang="en-US" sz="1800" spc="-1" strike="noStrike">
               <a:solidFill>
                 <a:srgbClr val="ffffff"/>
@@ -21635,7 +22556,7 @@
         <p:spPr>
           <a:xfrm>
             <a:off x="3410640" y="2468880"/>
-            <a:ext cx="2331360" cy="273960"/>
+            <a:ext cx="2331000" cy="273600"/>
           </a:xfrm>
           <a:prstGeom prst="rect">
             <a:avLst/>
@@ -21691,7 +22612,7 @@
         <p:spPr>
           <a:xfrm>
             <a:off x="3291840" y="2788920"/>
-            <a:ext cx="2559960" cy="804240"/>
+            <a:ext cx="2559600" cy="803880"/>
           </a:xfrm>
           <a:prstGeom prst="rect">
             <a:avLst/>
@@ -21747,7 +22668,7 @@
         <p:spPr>
           <a:xfrm>
             <a:off x="3319200" y="3712320"/>
-            <a:ext cx="182520" cy="182520"/>
+            <a:ext cx="182160" cy="182160"/>
           </a:xfrm>
           <a:prstGeom prst="ellipse">
             <a:avLst/>
@@ -21773,6 +22694,11 @@
             <a:noAutofit/>
           </a:bodyPr>
           <a:p>
+            <a:pPr>
+              <a:lnSpc>
+                <a:spcPct val="100000"/>
+              </a:lnSpc>
+            </a:pPr>
             <a:endParaRPr b="0" lang="en-US" sz="1800" spc="-1" strike="noStrike">
               <a:solidFill>
                 <a:srgbClr val="ffffff"/>
@@ -21791,7 +22717,7 @@
         <p:spPr>
           <a:xfrm>
             <a:off x="3566160" y="3657600"/>
-            <a:ext cx="2285640" cy="273960"/>
+            <a:ext cx="2285280" cy="273600"/>
           </a:xfrm>
           <a:prstGeom prst="rect">
             <a:avLst/>
@@ -21847,7 +22773,7 @@
         <p:spPr>
           <a:xfrm>
             <a:off x="3319200" y="4005000"/>
-            <a:ext cx="182520" cy="182520"/>
+            <a:ext cx="182160" cy="182160"/>
           </a:xfrm>
           <a:prstGeom prst="ellipse">
             <a:avLst/>
@@ -21873,6 +22799,11 @@
             <a:noAutofit/>
           </a:bodyPr>
           <a:p>
+            <a:pPr>
+              <a:lnSpc>
+                <a:spcPct val="100000"/>
+              </a:lnSpc>
+            </a:pPr>
             <a:endParaRPr b="0" lang="en-US" sz="1800" spc="-1" strike="noStrike">
               <a:solidFill>
                 <a:srgbClr val="ffffff"/>
@@ -21891,7 +22822,7 @@
         <p:spPr>
           <a:xfrm>
             <a:off x="3566160" y="3950280"/>
-            <a:ext cx="2285640" cy="273960"/>
+            <a:ext cx="2285280" cy="273600"/>
           </a:xfrm>
           <a:prstGeom prst="rect">
             <a:avLst/>
@@ -21947,7 +22878,7 @@
         <p:spPr>
           <a:xfrm>
             <a:off x="3319200" y="4297680"/>
-            <a:ext cx="182520" cy="182520"/>
+            <a:ext cx="182160" cy="182160"/>
           </a:xfrm>
           <a:prstGeom prst="ellipse">
             <a:avLst/>
@@ -21973,6 +22904,11 @@
             <a:noAutofit/>
           </a:bodyPr>
           <a:p>
+            <a:pPr>
+              <a:lnSpc>
+                <a:spcPct val="100000"/>
+              </a:lnSpc>
+            </a:pPr>
             <a:endParaRPr b="0" lang="en-US" sz="1800" spc="-1" strike="noStrike">
               <a:solidFill>
                 <a:srgbClr val="ffffff"/>
@@ -21991,7 +22927,7 @@
         <p:spPr>
           <a:xfrm>
             <a:off x="3566160" y="4242960"/>
-            <a:ext cx="2285640" cy="273960"/>
+            <a:ext cx="2285280" cy="273600"/>
           </a:xfrm>
           <a:prstGeom prst="rect">
             <a:avLst/>
@@ -22047,7 +22983,7 @@
         <p:spPr>
           <a:xfrm>
             <a:off x="3319200" y="4590360"/>
-            <a:ext cx="182520" cy="182520"/>
+            <a:ext cx="182160" cy="182160"/>
           </a:xfrm>
           <a:prstGeom prst="ellipse">
             <a:avLst/>
@@ -22073,6 +23009,11 @@
             <a:noAutofit/>
           </a:bodyPr>
           <a:p>
+            <a:pPr>
+              <a:lnSpc>
+                <a:spcPct val="100000"/>
+              </a:lnSpc>
+            </a:pPr>
             <a:endParaRPr b="0" lang="en-US" sz="1800" spc="-1" strike="noStrike">
               <a:solidFill>
                 <a:srgbClr val="ffffff"/>
@@ -22091,7 +23032,7 @@
         <p:spPr>
           <a:xfrm>
             <a:off x="3566160" y="4535280"/>
-            <a:ext cx="2285640" cy="273960"/>
+            <a:ext cx="2285280" cy="273600"/>
           </a:xfrm>
           <a:prstGeom prst="rect">
             <a:avLst/>
@@ -22147,7 +23088,7 @@
         <p:spPr>
           <a:xfrm>
             <a:off x="6108120" y="1280160"/>
-            <a:ext cx="2788560" cy="3565800"/>
+            <a:ext cx="2788200" cy="3565440"/>
           </a:xfrm>
           <a:prstGeom prst="rect">
             <a:avLst/>
@@ -22180,6 +23121,11 @@
             <a:noAutofit/>
           </a:bodyPr>
           <a:p>
+            <a:pPr>
+              <a:lnSpc>
+                <a:spcPct val="100000"/>
+              </a:lnSpc>
+            </a:pPr>
             <a:endParaRPr b="0" lang="en-US" sz="1800" spc="-1" strike="noStrike">
               <a:solidFill>
                 <a:srgbClr val="000000"/>
@@ -22198,7 +23144,7 @@
         <p:spPr>
           <a:xfrm>
             <a:off x="6108120" y="1280160"/>
-            <a:ext cx="2788560" cy="685440"/>
+            <a:ext cx="2788200" cy="685080"/>
           </a:xfrm>
           <a:prstGeom prst="rect">
             <a:avLst/>
@@ -22224,6 +23170,11 @@
             <a:noAutofit/>
           </a:bodyPr>
           <a:p>
+            <a:pPr>
+              <a:lnSpc>
+                <a:spcPct val="100000"/>
+              </a:lnSpc>
+            </a:pPr>
             <a:endParaRPr b="0" lang="en-US" sz="1800" spc="-1" strike="noStrike">
               <a:solidFill>
                 <a:srgbClr val="ffffff"/>
@@ -22242,7 +23193,7 @@
         <p:spPr>
           <a:xfrm>
             <a:off x="6108120" y="1280160"/>
-            <a:ext cx="2788560" cy="685440"/>
+            <a:ext cx="2788200" cy="685080"/>
           </a:xfrm>
           <a:prstGeom prst="rect">
             <a:avLst/>
@@ -22298,7 +23249,7 @@
         <p:spPr>
           <a:xfrm>
             <a:off x="6217920" y="2030040"/>
-            <a:ext cx="2559960" cy="383760"/>
+            <a:ext cx="2559600" cy="383400"/>
           </a:xfrm>
           <a:prstGeom prst="rect">
             <a:avLst/>
@@ -22328,7 +23279,7 @@
               </a:tabLst>
             </a:pPr>
             <a:r>
-              <a:rPr b="1" lang="en-US" sz="1300" spc="97" strike="noStrike">
+              <a:rPr b="1" lang="en-US" sz="1300" spc="94" strike="noStrike">
                 <a:solidFill>
                   <a:srgbClr val="1e8449"/>
                 </a:solidFill>
@@ -22354,7 +23305,7 @@
         <p:spPr>
           <a:xfrm>
             <a:off x="6336720" y="2468880"/>
-            <a:ext cx="2331360" cy="273960"/>
+            <a:ext cx="2331000" cy="273600"/>
           </a:xfrm>
           <a:prstGeom prst="rect">
             <a:avLst/>
@@ -22382,6 +23333,11 @@
             <a:noAutofit/>
           </a:bodyPr>
           <a:p>
+            <a:pPr>
+              <a:lnSpc>
+                <a:spcPct val="100000"/>
+              </a:lnSpc>
+            </a:pPr>
             <a:endParaRPr b="0" lang="en-US" sz="1800" spc="-1" strike="noStrike">
               <a:solidFill>
                 <a:srgbClr val="ffffff"/>
@@ -22400,7 +23356,7 @@
         <p:spPr>
           <a:xfrm>
             <a:off x="6336720" y="2468880"/>
-            <a:ext cx="2331360" cy="273960"/>
+            <a:ext cx="2331000" cy="273600"/>
           </a:xfrm>
           <a:prstGeom prst="rect">
             <a:avLst/>
@@ -22456,7 +23412,7 @@
         <p:spPr>
           <a:xfrm>
             <a:off x="6217920" y="2788920"/>
-            <a:ext cx="2559960" cy="804240"/>
+            <a:ext cx="2559600" cy="803880"/>
           </a:xfrm>
           <a:prstGeom prst="rect">
             <a:avLst/>
@@ -22512,7 +23468,7 @@
         <p:spPr>
           <a:xfrm>
             <a:off x="6245280" y="3712320"/>
-            <a:ext cx="182520" cy="182520"/>
+            <a:ext cx="182160" cy="182160"/>
           </a:xfrm>
           <a:prstGeom prst="ellipse">
             <a:avLst/>
@@ -22538,6 +23494,11 @@
             <a:noAutofit/>
           </a:bodyPr>
           <a:p>
+            <a:pPr>
+              <a:lnSpc>
+                <a:spcPct val="100000"/>
+              </a:lnSpc>
+            </a:pPr>
             <a:endParaRPr b="0" lang="en-US" sz="1800" spc="-1" strike="noStrike">
               <a:solidFill>
                 <a:srgbClr val="ffffff"/>
@@ -22556,7 +23517,7 @@
         <p:spPr>
           <a:xfrm>
             <a:off x="6492240" y="3657600"/>
-            <a:ext cx="2285640" cy="273960"/>
+            <a:ext cx="2285280" cy="273600"/>
           </a:xfrm>
           <a:prstGeom prst="rect">
             <a:avLst/>
@@ -22612,7 +23573,7 @@
         <p:spPr>
           <a:xfrm>
             <a:off x="6245280" y="4005000"/>
-            <a:ext cx="182520" cy="182520"/>
+            <a:ext cx="182160" cy="182160"/>
           </a:xfrm>
           <a:prstGeom prst="ellipse">
             <a:avLst/>
@@ -22638,6 +23599,11 @@
             <a:noAutofit/>
           </a:bodyPr>
           <a:p>
+            <a:pPr>
+              <a:lnSpc>
+                <a:spcPct val="100000"/>
+              </a:lnSpc>
+            </a:pPr>
             <a:endParaRPr b="0" lang="en-US" sz="1800" spc="-1" strike="noStrike">
               <a:solidFill>
                 <a:srgbClr val="ffffff"/>
@@ -22656,7 +23622,7 @@
         <p:spPr>
           <a:xfrm>
             <a:off x="6492240" y="3950280"/>
-            <a:ext cx="2285640" cy="273960"/>
+            <a:ext cx="2285280" cy="273600"/>
           </a:xfrm>
           <a:prstGeom prst="rect">
             <a:avLst/>
@@ -22712,7 +23678,7 @@
         <p:spPr>
           <a:xfrm>
             <a:off x="6245280" y="4297680"/>
-            <a:ext cx="182520" cy="182520"/>
+            <a:ext cx="182160" cy="182160"/>
           </a:xfrm>
           <a:prstGeom prst="ellipse">
             <a:avLst/>
@@ -22738,6 +23704,11 @@
             <a:noAutofit/>
           </a:bodyPr>
           <a:p>
+            <a:pPr>
+              <a:lnSpc>
+                <a:spcPct val="100000"/>
+              </a:lnSpc>
+            </a:pPr>
             <a:endParaRPr b="0" lang="en-US" sz="1800" spc="-1" strike="noStrike">
               <a:solidFill>
                 <a:srgbClr val="ffffff"/>
@@ -22756,7 +23727,7 @@
         <p:spPr>
           <a:xfrm>
             <a:off x="6492240" y="4242960"/>
-            <a:ext cx="2285640" cy="273960"/>
+            <a:ext cx="2285280" cy="273600"/>
           </a:xfrm>
           <a:prstGeom prst="rect">
             <a:avLst/>
@@ -22812,7 +23783,7 @@
         <p:spPr>
           <a:xfrm>
             <a:off x="6245280" y="4590360"/>
-            <a:ext cx="182520" cy="182520"/>
+            <a:ext cx="182160" cy="182160"/>
           </a:xfrm>
           <a:prstGeom prst="ellipse">
             <a:avLst/>
@@ -22838,6 +23809,11 @@
             <a:noAutofit/>
           </a:bodyPr>
           <a:p>
+            <a:pPr>
+              <a:lnSpc>
+                <a:spcPct val="100000"/>
+              </a:lnSpc>
+            </a:pPr>
             <a:endParaRPr b="0" lang="en-US" sz="1800" spc="-1" strike="noStrike">
               <a:solidFill>
                 <a:srgbClr val="ffffff"/>
@@ -22856,7 +23832,7 @@
         <p:spPr>
           <a:xfrm>
             <a:off x="6492240" y="4535280"/>
-            <a:ext cx="2285640" cy="273960"/>
+            <a:ext cx="2285280" cy="273600"/>
           </a:xfrm>
           <a:prstGeom prst="rect">
             <a:avLst/>
@@ -22949,7 +23925,7 @@
         <p:spPr>
           <a:xfrm>
             <a:off x="0" y="0"/>
-            <a:ext cx="9143640" cy="776880"/>
+            <a:ext cx="9143280" cy="776520"/>
           </a:xfrm>
           <a:prstGeom prst="rect">
             <a:avLst/>
@@ -22975,6 +23951,11 @@
             <a:noAutofit/>
           </a:bodyPr>
           <a:p>
+            <a:pPr>
+              <a:lnSpc>
+                <a:spcPct val="100000"/>
+              </a:lnSpc>
+            </a:pPr>
             <a:endParaRPr b="0" lang="en-US" sz="1800" spc="-1" strike="noStrike">
               <a:solidFill>
                 <a:srgbClr val="ffffff"/>
@@ -22993,7 +23974,7 @@
         <p:spPr>
           <a:xfrm>
             <a:off x="365760" y="0"/>
-            <a:ext cx="8412120" cy="776880"/>
+            <a:ext cx="8411760" cy="776520"/>
           </a:xfrm>
           <a:prstGeom prst="rect">
             <a:avLst/>
@@ -23023,7 +24004,7 @@
               </a:tabLst>
             </a:pPr>
             <a:r>
-              <a:rPr b="1" lang="en-US" sz="2000" spc="299" strike="noStrike">
+              <a:rPr b="1" lang="en-US" sz="2000" spc="296" strike="noStrike">
                 <a:solidFill>
                   <a:srgbClr val="ffffff"/>
                 </a:solidFill>
@@ -23049,7 +24030,7 @@
         <p:spPr>
           <a:xfrm>
             <a:off x="1517760" y="1847160"/>
-            <a:ext cx="200880" cy="145800"/>
+            <a:ext cx="200520" cy="145440"/>
           </a:xfrm>
           <a:prstGeom prst="rect">
             <a:avLst/>
@@ -23075,6 +24056,11 @@
             <a:noAutofit/>
           </a:bodyPr>
           <a:p>
+            <a:pPr>
+              <a:lnSpc>
+                <a:spcPct val="100000"/>
+              </a:lnSpc>
+            </a:pPr>
             <a:endParaRPr b="0" lang="en-US" sz="1800" spc="-1" strike="noStrike">
               <a:solidFill>
                 <a:srgbClr val="ffffff"/>
@@ -23093,7 +24079,7 @@
         <p:spPr>
           <a:xfrm>
             <a:off x="420480" y="868680"/>
-            <a:ext cx="959760" cy="959760"/>
+            <a:ext cx="959400" cy="959400"/>
           </a:xfrm>
           <a:prstGeom prst="ellipse">
             <a:avLst/>
@@ -23119,6 +24105,11 @@
             <a:noAutofit/>
           </a:bodyPr>
           <a:p>
+            <a:pPr>
+              <a:lnSpc>
+                <a:spcPct val="100000"/>
+              </a:lnSpc>
+            </a:pPr>
             <a:endParaRPr b="0" lang="en-US" sz="1800" spc="-1" strike="noStrike">
               <a:solidFill>
                 <a:srgbClr val="ffffff"/>
@@ -23137,7 +24128,7 @@
         <p:spPr>
           <a:xfrm>
             <a:off x="420480" y="868680"/>
-            <a:ext cx="959760" cy="959760"/>
+            <a:ext cx="959400" cy="959400"/>
           </a:xfrm>
           <a:prstGeom prst="rect">
             <a:avLst/>
@@ -23193,7 +24184,7 @@
         <p:spPr>
           <a:xfrm>
             <a:off x="255960" y="1920240"/>
-            <a:ext cx="1416960" cy="2907360"/>
+            <a:ext cx="1416600" cy="2907000"/>
           </a:xfrm>
           <a:prstGeom prst="rect">
             <a:avLst/>
@@ -23226,6 +24217,11 @@
             <a:noAutofit/>
           </a:bodyPr>
           <a:p>
+            <a:pPr>
+              <a:lnSpc>
+                <a:spcPct val="100000"/>
+              </a:lnSpc>
+            </a:pPr>
             <a:endParaRPr b="0" lang="en-US" sz="1800" spc="-1" strike="noStrike">
               <a:solidFill>
                 <a:srgbClr val="ffffff"/>
@@ -23244,7 +24240,7 @@
         <p:spPr>
           <a:xfrm>
             <a:off x="255960" y="1920240"/>
-            <a:ext cx="1416960" cy="502560"/>
+            <a:ext cx="1416600" cy="502200"/>
           </a:xfrm>
           <a:prstGeom prst="rect">
             <a:avLst/>
@@ -23270,6 +24266,11 @@
             <a:noAutofit/>
           </a:bodyPr>
           <a:p>
+            <a:pPr>
+              <a:lnSpc>
+                <a:spcPct val="100000"/>
+              </a:lnSpc>
+            </a:pPr>
             <a:endParaRPr b="0" lang="en-US" sz="1800" spc="-1" strike="noStrike">
               <a:solidFill>
                 <a:srgbClr val="ffffff"/>
@@ -23288,7 +24289,7 @@
         <p:spPr>
           <a:xfrm>
             <a:off x="255960" y="1920240"/>
-            <a:ext cx="1416960" cy="502560"/>
+            <a:ext cx="1416600" cy="502200"/>
           </a:xfrm>
           <a:prstGeom prst="rect">
             <a:avLst/>
@@ -23369,7 +24370,7 @@
         <p:spPr>
           <a:xfrm>
             <a:off x="347400" y="2487240"/>
-            <a:ext cx="1234080" cy="2267280"/>
+            <a:ext cx="1233720" cy="2266920"/>
           </a:xfrm>
           <a:prstGeom prst="rect">
             <a:avLst/>
@@ -23425,7 +24426,7 @@
         <p:spPr>
           <a:xfrm>
             <a:off x="2980800" y="1847160"/>
-            <a:ext cx="200880" cy="145800"/>
+            <a:ext cx="200520" cy="145440"/>
           </a:xfrm>
           <a:prstGeom prst="rect">
             <a:avLst/>
@@ -23451,6 +24452,11 @@
             <a:noAutofit/>
           </a:bodyPr>
           <a:p>
+            <a:pPr>
+              <a:lnSpc>
+                <a:spcPct val="100000"/>
+              </a:lnSpc>
+            </a:pPr>
             <a:endParaRPr b="0" lang="en-US" sz="1800" spc="-1" strike="noStrike">
               <a:solidFill>
                 <a:srgbClr val="ffffff"/>
@@ -23469,7 +24475,7 @@
         <p:spPr>
           <a:xfrm>
             <a:off x="1883520" y="868680"/>
-            <a:ext cx="959760" cy="959760"/>
+            <a:ext cx="959400" cy="959400"/>
           </a:xfrm>
           <a:prstGeom prst="ellipse">
             <a:avLst/>
@@ -23495,6 +24501,11 @@
             <a:noAutofit/>
           </a:bodyPr>
           <a:p>
+            <a:pPr>
+              <a:lnSpc>
+                <a:spcPct val="100000"/>
+              </a:lnSpc>
+            </a:pPr>
             <a:endParaRPr b="0" lang="en-US" sz="1800" spc="-1" strike="noStrike">
               <a:solidFill>
                 <a:srgbClr val="ffffff"/>
@@ -23513,7 +24524,7 @@
         <p:spPr>
           <a:xfrm>
             <a:off x="1883520" y="868680"/>
-            <a:ext cx="959760" cy="959760"/>
+            <a:ext cx="959400" cy="959400"/>
           </a:xfrm>
           <a:prstGeom prst="rect">
             <a:avLst/>
@@ -23569,7 +24580,7 @@
         <p:spPr>
           <a:xfrm>
             <a:off x="1719000" y="1920240"/>
-            <a:ext cx="1416960" cy="2907360"/>
+            <a:ext cx="1416600" cy="2907000"/>
           </a:xfrm>
           <a:prstGeom prst="rect">
             <a:avLst/>
@@ -23602,6 +24613,11 @@
             <a:noAutofit/>
           </a:bodyPr>
           <a:p>
+            <a:pPr>
+              <a:lnSpc>
+                <a:spcPct val="100000"/>
+              </a:lnSpc>
+            </a:pPr>
             <a:endParaRPr b="0" lang="en-US" sz="1800" spc="-1" strike="noStrike">
               <a:solidFill>
                 <a:srgbClr val="ffffff"/>
@@ -23620,7 +24636,7 @@
         <p:spPr>
           <a:xfrm>
             <a:off x="1719000" y="1920240"/>
-            <a:ext cx="1416960" cy="502560"/>
+            <a:ext cx="1416600" cy="502200"/>
           </a:xfrm>
           <a:prstGeom prst="rect">
             <a:avLst/>
@@ -23646,6 +24662,11 @@
             <a:noAutofit/>
           </a:bodyPr>
           <a:p>
+            <a:pPr>
+              <a:lnSpc>
+                <a:spcPct val="100000"/>
+              </a:lnSpc>
+            </a:pPr>
             <a:endParaRPr b="0" lang="en-US" sz="1800" spc="-1" strike="noStrike">
               <a:solidFill>
                 <a:srgbClr val="ffffff"/>
@@ -23664,7 +24685,7 @@
         <p:spPr>
           <a:xfrm>
             <a:off x="1719000" y="1920240"/>
-            <a:ext cx="1416960" cy="502560"/>
+            <a:ext cx="1416600" cy="502200"/>
           </a:xfrm>
           <a:prstGeom prst="rect">
             <a:avLst/>
@@ -23745,7 +24766,7 @@
         <p:spPr>
           <a:xfrm>
             <a:off x="1810440" y="2487240"/>
-            <a:ext cx="1234080" cy="2267280"/>
+            <a:ext cx="1233720" cy="2266920"/>
           </a:xfrm>
           <a:prstGeom prst="rect">
             <a:avLst/>
@@ -23801,7 +24822,7 @@
         <p:spPr>
           <a:xfrm>
             <a:off x="4443840" y="1847160"/>
-            <a:ext cx="200880" cy="145800"/>
+            <a:ext cx="200520" cy="145440"/>
           </a:xfrm>
           <a:prstGeom prst="rect">
             <a:avLst/>
@@ -23827,6 +24848,11 @@
             <a:noAutofit/>
           </a:bodyPr>
           <a:p>
+            <a:pPr>
+              <a:lnSpc>
+                <a:spcPct val="100000"/>
+              </a:lnSpc>
+            </a:pPr>
             <a:endParaRPr b="0" lang="en-US" sz="1800" spc="-1" strike="noStrike">
               <a:solidFill>
                 <a:srgbClr val="ffffff"/>
@@ -23845,7 +24871,7 @@
         <p:spPr>
           <a:xfrm>
             <a:off x="3346560" y="868680"/>
-            <a:ext cx="959760" cy="959760"/>
+            <a:ext cx="959400" cy="959400"/>
           </a:xfrm>
           <a:prstGeom prst="ellipse">
             <a:avLst/>
@@ -23871,6 +24897,11 @@
             <a:noAutofit/>
           </a:bodyPr>
           <a:p>
+            <a:pPr>
+              <a:lnSpc>
+                <a:spcPct val="100000"/>
+              </a:lnSpc>
+            </a:pPr>
             <a:endParaRPr b="0" lang="en-US" sz="1800" spc="-1" strike="noStrike">
               <a:solidFill>
                 <a:srgbClr val="000000"/>
@@ -23889,7 +24920,7 @@
         <p:spPr>
           <a:xfrm>
             <a:off x="3346560" y="868680"/>
-            <a:ext cx="959760" cy="959760"/>
+            <a:ext cx="959400" cy="959400"/>
           </a:xfrm>
           <a:prstGeom prst="rect">
             <a:avLst/>
@@ -23945,7 +24976,7 @@
         <p:spPr>
           <a:xfrm>
             <a:off x="3182040" y="1920240"/>
-            <a:ext cx="1416960" cy="2907360"/>
+            <a:ext cx="1416600" cy="2907000"/>
           </a:xfrm>
           <a:prstGeom prst="rect">
             <a:avLst/>
@@ -23978,6 +25009,11 @@
             <a:noAutofit/>
           </a:bodyPr>
           <a:p>
+            <a:pPr>
+              <a:lnSpc>
+                <a:spcPct val="100000"/>
+              </a:lnSpc>
+            </a:pPr>
             <a:endParaRPr b="0" lang="en-US" sz="1800" spc="-1" strike="noStrike">
               <a:solidFill>
                 <a:srgbClr val="ffffff"/>
@@ -23996,7 +25032,7 @@
         <p:spPr>
           <a:xfrm>
             <a:off x="3182040" y="1920240"/>
-            <a:ext cx="1416960" cy="502560"/>
+            <a:ext cx="1416600" cy="502200"/>
           </a:xfrm>
           <a:prstGeom prst="rect">
             <a:avLst/>
@@ -24022,6 +25058,11 @@
             <a:noAutofit/>
           </a:bodyPr>
           <a:p>
+            <a:pPr>
+              <a:lnSpc>
+                <a:spcPct val="100000"/>
+              </a:lnSpc>
+            </a:pPr>
             <a:endParaRPr b="0" lang="en-US" sz="1800" spc="-1" strike="noStrike">
               <a:solidFill>
                 <a:srgbClr val="000000"/>
@@ -24040,7 +25081,7 @@
         <p:spPr>
           <a:xfrm>
             <a:off x="3182040" y="1920240"/>
-            <a:ext cx="1416960" cy="502560"/>
+            <a:ext cx="1416600" cy="502200"/>
           </a:xfrm>
           <a:prstGeom prst="rect">
             <a:avLst/>
@@ -24121,7 +25162,7 @@
         <p:spPr>
           <a:xfrm>
             <a:off x="3273480" y="2487240"/>
-            <a:ext cx="1234080" cy="2267280"/>
+            <a:ext cx="1233720" cy="2266920"/>
           </a:xfrm>
           <a:prstGeom prst="rect">
             <a:avLst/>
@@ -24177,7 +25218,7 @@
         <p:spPr>
           <a:xfrm>
             <a:off x="5906880" y="1847160"/>
-            <a:ext cx="200880" cy="145800"/>
+            <a:ext cx="200520" cy="145440"/>
           </a:xfrm>
           <a:prstGeom prst="rect">
             <a:avLst/>
@@ -24203,6 +25244,11 @@
             <a:noAutofit/>
           </a:bodyPr>
           <a:p>
+            <a:pPr>
+              <a:lnSpc>
+                <a:spcPct val="100000"/>
+              </a:lnSpc>
+            </a:pPr>
             <a:endParaRPr b="0" lang="en-US" sz="1800" spc="-1" strike="noStrike">
               <a:solidFill>
                 <a:srgbClr val="ffffff"/>
@@ -24221,7 +25267,7 @@
         <p:spPr>
           <a:xfrm>
             <a:off x="4809600" y="868680"/>
-            <a:ext cx="959760" cy="959760"/>
+            <a:ext cx="959400" cy="959400"/>
           </a:xfrm>
           <a:prstGeom prst="ellipse">
             <a:avLst/>
@@ -24247,6 +25293,11 @@
             <a:noAutofit/>
           </a:bodyPr>
           <a:p>
+            <a:pPr>
+              <a:lnSpc>
+                <a:spcPct val="100000"/>
+              </a:lnSpc>
+            </a:pPr>
             <a:endParaRPr b="0" lang="en-US" sz="1800" spc="-1" strike="noStrike">
               <a:solidFill>
                 <a:srgbClr val="ffffff"/>
@@ -24265,7 +25316,7 @@
         <p:spPr>
           <a:xfrm>
             <a:off x="4809600" y="868680"/>
-            <a:ext cx="959760" cy="959760"/>
+            <a:ext cx="959400" cy="959400"/>
           </a:xfrm>
           <a:prstGeom prst="rect">
             <a:avLst/>
@@ -24321,7 +25372,7 @@
         <p:spPr>
           <a:xfrm>
             <a:off x="4645080" y="1920240"/>
-            <a:ext cx="1416960" cy="2907360"/>
+            <a:ext cx="1416600" cy="2907000"/>
           </a:xfrm>
           <a:prstGeom prst="rect">
             <a:avLst/>
@@ -24354,6 +25405,11 @@
             <a:noAutofit/>
           </a:bodyPr>
           <a:p>
+            <a:pPr>
+              <a:lnSpc>
+                <a:spcPct val="100000"/>
+              </a:lnSpc>
+            </a:pPr>
             <a:endParaRPr b="0" lang="en-US" sz="1800" spc="-1" strike="noStrike">
               <a:solidFill>
                 <a:srgbClr val="ffffff"/>
@@ -24372,7 +25428,7 @@
         <p:spPr>
           <a:xfrm>
             <a:off x="4645080" y="1920240"/>
-            <a:ext cx="1416960" cy="502560"/>
+            <a:ext cx="1416600" cy="502200"/>
           </a:xfrm>
           <a:prstGeom prst="rect">
             <a:avLst/>
@@ -24398,6 +25454,11 @@
             <a:noAutofit/>
           </a:bodyPr>
           <a:p>
+            <a:pPr>
+              <a:lnSpc>
+                <a:spcPct val="100000"/>
+              </a:lnSpc>
+            </a:pPr>
             <a:endParaRPr b="0" lang="en-US" sz="1800" spc="-1" strike="noStrike">
               <a:solidFill>
                 <a:srgbClr val="ffffff"/>
@@ -24416,7 +25477,7 @@
         <p:spPr>
           <a:xfrm>
             <a:off x="4645080" y="1920240"/>
-            <a:ext cx="1416960" cy="502560"/>
+            <a:ext cx="1416600" cy="502200"/>
           </a:xfrm>
           <a:prstGeom prst="rect">
             <a:avLst/>
@@ -24497,7 +25558,7 @@
         <p:spPr>
           <a:xfrm>
             <a:off x="4736520" y="2487240"/>
-            <a:ext cx="1234080" cy="2267280"/>
+            <a:ext cx="1233720" cy="2266920"/>
           </a:xfrm>
           <a:prstGeom prst="rect">
             <a:avLst/>
@@ -24553,7 +25614,7 @@
         <p:spPr>
           <a:xfrm>
             <a:off x="7369920" y="1847160"/>
-            <a:ext cx="200880" cy="145800"/>
+            <a:ext cx="200520" cy="145440"/>
           </a:xfrm>
           <a:prstGeom prst="rect">
             <a:avLst/>
@@ -24579,6 +25640,11 @@
             <a:noAutofit/>
           </a:bodyPr>
           <a:p>
+            <a:pPr>
+              <a:lnSpc>
+                <a:spcPct val="100000"/>
+              </a:lnSpc>
+            </a:pPr>
             <a:endParaRPr b="0" lang="en-US" sz="1800" spc="-1" strike="noStrike">
               <a:solidFill>
                 <a:srgbClr val="ffffff"/>
@@ -24597,7 +25663,7 @@
         <p:spPr>
           <a:xfrm>
             <a:off x="6272640" y="868680"/>
-            <a:ext cx="959760" cy="959760"/>
+            <a:ext cx="959400" cy="959400"/>
           </a:xfrm>
           <a:prstGeom prst="ellipse">
             <a:avLst/>
@@ -24623,6 +25689,11 @@
             <a:noAutofit/>
           </a:bodyPr>
           <a:p>
+            <a:pPr>
+              <a:lnSpc>
+                <a:spcPct val="100000"/>
+              </a:lnSpc>
+            </a:pPr>
             <a:endParaRPr b="0" lang="en-US" sz="1800" spc="-1" strike="noStrike">
               <a:solidFill>
                 <a:srgbClr val="ffffff"/>
@@ -24641,7 +25712,7 @@
         <p:spPr>
           <a:xfrm>
             <a:off x="6272640" y="868680"/>
-            <a:ext cx="959760" cy="959760"/>
+            <a:ext cx="959400" cy="959400"/>
           </a:xfrm>
           <a:prstGeom prst="rect">
             <a:avLst/>
@@ -24697,7 +25768,7 @@
         <p:spPr>
           <a:xfrm>
             <a:off x="6108120" y="1920240"/>
-            <a:ext cx="1416960" cy="2907360"/>
+            <a:ext cx="1416600" cy="2907000"/>
           </a:xfrm>
           <a:prstGeom prst="rect">
             <a:avLst/>
@@ -24730,6 +25801,11 @@
             <a:noAutofit/>
           </a:bodyPr>
           <a:p>
+            <a:pPr>
+              <a:lnSpc>
+                <a:spcPct val="100000"/>
+              </a:lnSpc>
+            </a:pPr>
             <a:endParaRPr b="0" lang="en-US" sz="1800" spc="-1" strike="noStrike">
               <a:solidFill>
                 <a:srgbClr val="ffffff"/>
@@ -24748,7 +25824,7 @@
         <p:spPr>
           <a:xfrm>
             <a:off x="6108120" y="1920240"/>
-            <a:ext cx="1416960" cy="502560"/>
+            <a:ext cx="1416600" cy="502200"/>
           </a:xfrm>
           <a:prstGeom prst="rect">
             <a:avLst/>
@@ -24774,6 +25850,11 @@
             <a:noAutofit/>
           </a:bodyPr>
           <a:p>
+            <a:pPr>
+              <a:lnSpc>
+                <a:spcPct val="100000"/>
+              </a:lnSpc>
+            </a:pPr>
             <a:endParaRPr b="0" lang="en-US" sz="1800" spc="-1" strike="noStrike">
               <a:solidFill>
                 <a:srgbClr val="ffffff"/>
@@ -24792,7 +25873,7 @@
         <p:spPr>
           <a:xfrm>
             <a:off x="6108120" y="1920240"/>
-            <a:ext cx="1416960" cy="502560"/>
+            <a:ext cx="1416600" cy="502200"/>
           </a:xfrm>
           <a:prstGeom prst="rect">
             <a:avLst/>
@@ -24873,7 +25954,7 @@
         <p:spPr>
           <a:xfrm>
             <a:off x="6199560" y="2487240"/>
-            <a:ext cx="1234080" cy="2267280"/>
+            <a:ext cx="1233720" cy="2266920"/>
           </a:xfrm>
           <a:prstGeom prst="rect">
             <a:avLst/>
@@ -24929,7 +26010,7 @@
         <p:spPr>
           <a:xfrm>
             <a:off x="7735680" y="868680"/>
-            <a:ext cx="959760" cy="959760"/>
+            <a:ext cx="959400" cy="959400"/>
           </a:xfrm>
           <a:prstGeom prst="ellipse">
             <a:avLst/>
@@ -24955,6 +26036,11 @@
             <a:noAutofit/>
           </a:bodyPr>
           <a:p>
+            <a:pPr>
+              <a:lnSpc>
+                <a:spcPct val="100000"/>
+              </a:lnSpc>
+            </a:pPr>
             <a:endParaRPr b="0" lang="en-US" sz="1800" spc="-1" strike="noStrike">
               <a:solidFill>
                 <a:srgbClr val="ffffff"/>
@@ -24973,7 +26059,7 @@
         <p:spPr>
           <a:xfrm>
             <a:off x="7735680" y="868680"/>
-            <a:ext cx="959760" cy="959760"/>
+            <a:ext cx="959400" cy="959400"/>
           </a:xfrm>
           <a:prstGeom prst="rect">
             <a:avLst/>
@@ -25029,7 +26115,7 @@
         <p:spPr>
           <a:xfrm>
             <a:off x="7571160" y="1920240"/>
-            <a:ext cx="1416960" cy="2907360"/>
+            <a:ext cx="1416600" cy="2907000"/>
           </a:xfrm>
           <a:prstGeom prst="rect">
             <a:avLst/>
@@ -25062,6 +26148,11 @@
             <a:noAutofit/>
           </a:bodyPr>
           <a:p>
+            <a:pPr>
+              <a:lnSpc>
+                <a:spcPct val="100000"/>
+              </a:lnSpc>
+            </a:pPr>
             <a:endParaRPr b="0" lang="en-US" sz="1800" spc="-1" strike="noStrike">
               <a:solidFill>
                 <a:srgbClr val="ffffff"/>
@@ -25080,7 +26171,7 @@
         <p:spPr>
           <a:xfrm>
             <a:off x="7571160" y="1920240"/>
-            <a:ext cx="1416960" cy="502560"/>
+            <a:ext cx="1416600" cy="502200"/>
           </a:xfrm>
           <a:prstGeom prst="rect">
             <a:avLst/>
@@ -25106,6 +26197,11 @@
             <a:noAutofit/>
           </a:bodyPr>
           <a:p>
+            <a:pPr>
+              <a:lnSpc>
+                <a:spcPct val="100000"/>
+              </a:lnSpc>
+            </a:pPr>
             <a:endParaRPr b="0" lang="en-US" sz="1800" spc="-1" strike="noStrike">
               <a:solidFill>
                 <a:srgbClr val="ffffff"/>
@@ -25124,7 +26220,7 @@
         <p:spPr>
           <a:xfrm>
             <a:off x="7571160" y="1920240"/>
-            <a:ext cx="1416960" cy="502560"/>
+            <a:ext cx="1416600" cy="502200"/>
           </a:xfrm>
           <a:prstGeom prst="rect">
             <a:avLst/>
@@ -25205,7 +26301,7 @@
         <p:spPr>
           <a:xfrm>
             <a:off x="7662600" y="2487240"/>
-            <a:ext cx="1234080" cy="2267280"/>
+            <a:ext cx="1233720" cy="2266920"/>
           </a:xfrm>
           <a:prstGeom prst="rect">
             <a:avLst/>
@@ -25298,7 +26394,7 @@
         <p:spPr>
           <a:xfrm>
             <a:off x="0" y="0"/>
-            <a:ext cx="9143640" cy="776880"/>
+            <a:ext cx="9143280" cy="776520"/>
           </a:xfrm>
           <a:prstGeom prst="rect">
             <a:avLst/>
@@ -25324,6 +26420,11 @@
             <a:noAutofit/>
           </a:bodyPr>
           <a:p>
+            <a:pPr>
+              <a:lnSpc>
+                <a:spcPct val="100000"/>
+              </a:lnSpc>
+            </a:pPr>
             <a:endParaRPr b="0" lang="en-US" sz="1800" spc="-1" strike="noStrike">
               <a:solidFill>
                 <a:srgbClr val="ffffff"/>
@@ -25342,7 +26443,7 @@
         <p:spPr>
           <a:xfrm>
             <a:off x="365760" y="0"/>
-            <a:ext cx="8412120" cy="776880"/>
+            <a:ext cx="8411760" cy="776520"/>
           </a:xfrm>
           <a:prstGeom prst="rect">
             <a:avLst/>
@@ -25372,7 +26473,7 @@
               </a:tabLst>
             </a:pPr>
             <a:r>
-              <a:rPr b="1" lang="en-US" sz="2000" spc="299" strike="noStrike">
+              <a:rPr b="1" lang="en-US" sz="2000" spc="296" strike="noStrike">
                 <a:solidFill>
                   <a:srgbClr val="ffffff"/>
                 </a:solidFill>
@@ -25398,7 +26499,7 @@
         <p:spPr>
           <a:xfrm>
             <a:off x="365760" y="850320"/>
-            <a:ext cx="8412120" cy="347040"/>
+            <a:ext cx="8411760" cy="346680"/>
           </a:xfrm>
           <a:prstGeom prst="rect">
             <a:avLst/>
@@ -25454,7 +26555,7 @@
         <p:spPr>
           <a:xfrm>
             <a:off x="1371600" y="1298520"/>
-            <a:ext cx="2742840" cy="1755360"/>
+            <a:ext cx="2742480" cy="1755000"/>
           </a:xfrm>
           <a:prstGeom prst="rect">
             <a:avLst/>
@@ -25487,6 +26588,11 @@
             <a:noAutofit/>
           </a:bodyPr>
           <a:p>
+            <a:pPr>
+              <a:lnSpc>
+                <a:spcPct val="100000"/>
+              </a:lnSpc>
+            </a:pPr>
             <a:endParaRPr b="0" lang="en-US" sz="1800" spc="-1" strike="noStrike">
               <a:solidFill>
                 <a:srgbClr val="000000"/>
@@ -25505,7 +26611,7 @@
         <p:spPr>
           <a:xfrm>
             <a:off x="1371600" y="1298520"/>
-            <a:ext cx="2742840" cy="548280"/>
+            <a:ext cx="2742480" cy="547920"/>
           </a:xfrm>
           <a:prstGeom prst="rect">
             <a:avLst/>
@@ -25531,6 +26637,11 @@
             <a:noAutofit/>
           </a:bodyPr>
           <a:p>
+            <a:pPr>
+              <a:lnSpc>
+                <a:spcPct val="100000"/>
+              </a:lnSpc>
+            </a:pPr>
             <a:endParaRPr b="0" lang="en-US" sz="1800" spc="-1" strike="noStrike">
               <a:solidFill>
                 <a:srgbClr val="ffffff"/>
@@ -25549,7 +26660,7 @@
         <p:spPr>
           <a:xfrm>
             <a:off x="1371600" y="1298520"/>
-            <a:ext cx="2742840" cy="548280"/>
+            <a:ext cx="2742480" cy="547920"/>
           </a:xfrm>
           <a:prstGeom prst="rect">
             <a:avLst/>
@@ -25614,7 +26725,7 @@
         <p:spPr>
           <a:xfrm>
             <a:off x="1508760" y="1920240"/>
-            <a:ext cx="2468520" cy="1042200"/>
+            <a:ext cx="2468160" cy="1041840"/>
           </a:xfrm>
           <a:prstGeom prst="rect">
             <a:avLst/>
@@ -25670,7 +26781,7 @@
         <p:spPr>
           <a:xfrm>
             <a:off x="5212080" y="1298520"/>
-            <a:ext cx="2742840" cy="1755360"/>
+            <a:ext cx="2742480" cy="1755000"/>
           </a:xfrm>
           <a:prstGeom prst="rect">
             <a:avLst/>
@@ -25703,6 +26814,11 @@
             <a:noAutofit/>
           </a:bodyPr>
           <a:p>
+            <a:pPr>
+              <a:lnSpc>
+                <a:spcPct val="100000"/>
+              </a:lnSpc>
+            </a:pPr>
             <a:endParaRPr b="0" lang="en-US" sz="1800" spc="-1" strike="noStrike">
               <a:solidFill>
                 <a:srgbClr val="000000"/>
@@ -25721,7 +26837,7 @@
         <p:spPr>
           <a:xfrm>
             <a:off x="5212080" y="1298520"/>
-            <a:ext cx="2742840" cy="548280"/>
+            <a:ext cx="2742480" cy="547920"/>
           </a:xfrm>
           <a:prstGeom prst="rect">
             <a:avLst/>
@@ -25747,6 +26863,11 @@
             <a:noAutofit/>
           </a:bodyPr>
           <a:p>
+            <a:pPr>
+              <a:lnSpc>
+                <a:spcPct val="100000"/>
+              </a:lnSpc>
+            </a:pPr>
             <a:endParaRPr b="0" lang="en-US" sz="1800" spc="-1" strike="noStrike">
               <a:solidFill>
                 <a:srgbClr val="ffffff"/>
@@ -25765,7 +26886,7 @@
         <p:spPr>
           <a:xfrm>
             <a:off x="5212080" y="1298520"/>
-            <a:ext cx="2742840" cy="548280"/>
+            <a:ext cx="2742480" cy="547920"/>
           </a:xfrm>
           <a:prstGeom prst="rect">
             <a:avLst/>
@@ -25830,7 +26951,7 @@
         <p:spPr>
           <a:xfrm>
             <a:off x="5349240" y="1920240"/>
-            <a:ext cx="2468520" cy="1042200"/>
+            <a:ext cx="2468160" cy="1041840"/>
           </a:xfrm>
           <a:prstGeom prst="rect">
             <a:avLst/>
@@ -25886,7 +27007,7 @@
         <p:spPr>
           <a:xfrm>
             <a:off x="320040" y="2834640"/>
-            <a:ext cx="2742840" cy="1755360"/>
+            <a:ext cx="2742480" cy="1755000"/>
           </a:xfrm>
           <a:prstGeom prst="rect">
             <a:avLst/>
@@ -25919,6 +27040,11 @@
             <a:noAutofit/>
           </a:bodyPr>
           <a:p>
+            <a:pPr>
+              <a:lnSpc>
+                <a:spcPct val="100000"/>
+              </a:lnSpc>
+            </a:pPr>
             <a:endParaRPr b="0" lang="en-US" sz="1800" spc="-1" strike="noStrike">
               <a:solidFill>
                 <a:srgbClr val="000000"/>
@@ -25937,7 +27063,7 @@
         <p:spPr>
           <a:xfrm>
             <a:off x="320040" y="2834640"/>
-            <a:ext cx="2742840" cy="548280"/>
+            <a:ext cx="2742480" cy="547920"/>
           </a:xfrm>
           <a:prstGeom prst="rect">
             <a:avLst/>
@@ -25963,6 +27089,11 @@
             <a:noAutofit/>
           </a:bodyPr>
           <a:p>
+            <a:pPr>
+              <a:lnSpc>
+                <a:spcPct val="100000"/>
+              </a:lnSpc>
+            </a:pPr>
             <a:endParaRPr b="0" lang="en-US" sz="1800" spc="-1" strike="noStrike">
               <a:solidFill>
                 <a:srgbClr val="000000"/>
@@ -25981,7 +27112,7 @@
         <p:spPr>
           <a:xfrm>
             <a:off x="320040" y="2834640"/>
-            <a:ext cx="2742840" cy="548280"/>
+            <a:ext cx="2742480" cy="547920"/>
           </a:xfrm>
           <a:prstGeom prst="rect">
             <a:avLst/>
@@ -26046,7 +27177,7 @@
         <p:spPr>
           <a:xfrm>
             <a:off x="457200" y="3456360"/>
-            <a:ext cx="2468520" cy="1042200"/>
+            <a:ext cx="2468160" cy="1041840"/>
           </a:xfrm>
           <a:prstGeom prst="rect">
             <a:avLst/>
@@ -26102,7 +27233,7 @@
         <p:spPr>
           <a:xfrm>
             <a:off x="3337560" y="2834640"/>
-            <a:ext cx="2742840" cy="1755360"/>
+            <a:ext cx="2742480" cy="1755000"/>
           </a:xfrm>
           <a:prstGeom prst="rect">
             <a:avLst/>
@@ -26135,6 +27266,11 @@
             <a:noAutofit/>
           </a:bodyPr>
           <a:p>
+            <a:pPr>
+              <a:lnSpc>
+                <a:spcPct val="100000"/>
+              </a:lnSpc>
+            </a:pPr>
             <a:endParaRPr b="0" lang="en-US" sz="1800" spc="-1" strike="noStrike">
               <a:solidFill>
                 <a:srgbClr val="000000"/>
@@ -26153,7 +27289,7 @@
         <p:spPr>
           <a:xfrm>
             <a:off x="3337560" y="2834640"/>
-            <a:ext cx="2742840" cy="548280"/>
+            <a:ext cx="2742480" cy="547920"/>
           </a:xfrm>
           <a:prstGeom prst="rect">
             <a:avLst/>
@@ -26179,6 +27315,11 @@
             <a:noAutofit/>
           </a:bodyPr>
           <a:p>
+            <a:pPr>
+              <a:lnSpc>
+                <a:spcPct val="100000"/>
+              </a:lnSpc>
+            </a:pPr>
             <a:endParaRPr b="0" lang="en-US" sz="1800" spc="-1" strike="noStrike">
               <a:solidFill>
                 <a:srgbClr val="ffffff"/>
@@ -26197,7 +27338,7 @@
         <p:spPr>
           <a:xfrm>
             <a:off x="3337560" y="2834640"/>
-            <a:ext cx="2742840" cy="548280"/>
+            <a:ext cx="2742480" cy="547920"/>
           </a:xfrm>
           <a:prstGeom prst="rect">
             <a:avLst/>
@@ -26262,7 +27403,7 @@
         <p:spPr>
           <a:xfrm>
             <a:off x="3474720" y="3456360"/>
-            <a:ext cx="2468520" cy="1042200"/>
+            <a:ext cx="2468160" cy="1041840"/>
           </a:xfrm>
           <a:prstGeom prst="rect">
             <a:avLst/>
@@ -26318,7 +27459,7 @@
         <p:spPr>
           <a:xfrm>
             <a:off x="6355080" y="2834640"/>
-            <a:ext cx="2742840" cy="1755360"/>
+            <a:ext cx="2742480" cy="1755000"/>
           </a:xfrm>
           <a:prstGeom prst="rect">
             <a:avLst/>
@@ -26351,6 +27492,11 @@
             <a:noAutofit/>
           </a:bodyPr>
           <a:p>
+            <a:pPr>
+              <a:lnSpc>
+                <a:spcPct val="100000"/>
+              </a:lnSpc>
+            </a:pPr>
             <a:endParaRPr b="0" lang="en-US" sz="1800" spc="-1" strike="noStrike">
               <a:solidFill>
                 <a:srgbClr val="000000"/>
@@ -26369,7 +27515,7 @@
         <p:spPr>
           <a:xfrm>
             <a:off x="6355080" y="2834640"/>
-            <a:ext cx="2742840" cy="548280"/>
+            <a:ext cx="2742480" cy="547920"/>
           </a:xfrm>
           <a:prstGeom prst="rect">
             <a:avLst/>
@@ -26395,6 +27541,11 @@
             <a:noAutofit/>
           </a:bodyPr>
           <a:p>
+            <a:pPr>
+              <a:lnSpc>
+                <a:spcPct val="100000"/>
+              </a:lnSpc>
+            </a:pPr>
             <a:endParaRPr b="0" lang="en-US" sz="1800" spc="-1" strike="noStrike">
               <a:solidFill>
                 <a:srgbClr val="ffffff"/>
@@ -26413,7 +27564,7 @@
         <p:spPr>
           <a:xfrm>
             <a:off x="6355080" y="2834640"/>
-            <a:ext cx="2742840" cy="548280"/>
+            <a:ext cx="2742480" cy="547920"/>
           </a:xfrm>
           <a:prstGeom prst="rect">
             <a:avLst/>
@@ -26478,7 +27629,7 @@
         <p:spPr>
           <a:xfrm>
             <a:off x="6492240" y="3456360"/>
-            <a:ext cx="2468520" cy="1042200"/>
+            <a:ext cx="2468160" cy="1041840"/>
           </a:xfrm>
           <a:prstGeom prst="rect">
             <a:avLst/>
@@ -26571,7 +27722,7 @@
         <p:spPr>
           <a:xfrm>
             <a:off x="0" y="0"/>
-            <a:ext cx="9143640" cy="776880"/>
+            <a:ext cx="9143280" cy="776520"/>
           </a:xfrm>
           <a:prstGeom prst="rect">
             <a:avLst/>
@@ -26597,6 +27748,11 @@
             <a:noAutofit/>
           </a:bodyPr>
           <a:p>
+            <a:pPr>
+              <a:lnSpc>
+                <a:spcPct val="100000"/>
+              </a:lnSpc>
+            </a:pPr>
             <a:endParaRPr b="0" lang="en-US" sz="1800" spc="-1" strike="noStrike">
               <a:solidFill>
                 <a:srgbClr val="ffffff"/>
@@ -26615,7 +27771,7 @@
         <p:spPr>
           <a:xfrm>
             <a:off x="365760" y="0"/>
-            <a:ext cx="8412120" cy="776880"/>
+            <a:ext cx="8411760" cy="776520"/>
           </a:xfrm>
           <a:prstGeom prst="rect">
             <a:avLst/>
@@ -26645,7 +27801,7 @@
               </a:tabLst>
             </a:pPr>
             <a:r>
-              <a:rPr b="1" lang="en-US" sz="2000" spc="199" strike="noStrike">
+              <a:rPr b="1" lang="en-US" sz="2000" spc="197" strike="noStrike">
                 <a:solidFill>
                   <a:srgbClr val="ffffff"/>
                 </a:solidFill>
@@ -26671,7 +27827,7 @@
         <p:spPr>
           <a:xfrm>
             <a:off x="868680" y="960120"/>
-            <a:ext cx="1691280" cy="1691280"/>
+            <a:ext cx="1690920" cy="1690920"/>
           </a:xfrm>
           <a:prstGeom prst="ellipse">
             <a:avLst/>
@@ -26704,6 +27860,11 @@
             <a:noAutofit/>
           </a:bodyPr>
           <a:p>
+            <a:pPr>
+              <a:lnSpc>
+                <a:spcPct val="100000"/>
+              </a:lnSpc>
+            </a:pPr>
             <a:endParaRPr b="0" lang="en-US" sz="1800" spc="-1" strike="noStrike">
               <a:solidFill>
                 <a:srgbClr val="ffffff"/>
@@ -26722,7 +27883,7 @@
         <p:spPr>
           <a:xfrm>
             <a:off x="868680" y="960120"/>
-            <a:ext cx="1691280" cy="1691280"/>
+            <a:ext cx="1690920" cy="1690920"/>
           </a:xfrm>
           <a:prstGeom prst="rect">
             <a:avLst/>
@@ -26778,7 +27939,7 @@
         <p:spPr>
           <a:xfrm>
             <a:off x="365760" y="2743200"/>
-            <a:ext cx="2742840" cy="2084400"/>
+            <a:ext cx="2742480" cy="2084040"/>
           </a:xfrm>
           <a:prstGeom prst="rect">
             <a:avLst/>
@@ -26811,6 +27972,11 @@
             <a:noAutofit/>
           </a:bodyPr>
           <a:p>
+            <a:pPr>
+              <a:lnSpc>
+                <a:spcPct val="100000"/>
+              </a:lnSpc>
+            </a:pPr>
             <a:endParaRPr b="0" lang="en-US" sz="1800" spc="-1" strike="noStrike">
               <a:solidFill>
                 <a:srgbClr val="ffffff"/>
@@ -26829,7 +27995,7 @@
         <p:spPr>
           <a:xfrm>
             <a:off x="365760" y="2743200"/>
-            <a:ext cx="2742840" cy="475200"/>
+            <a:ext cx="2742480" cy="474840"/>
           </a:xfrm>
           <a:prstGeom prst="rect">
             <a:avLst/>
@@ -26855,6 +28021,11 @@
             <a:noAutofit/>
           </a:bodyPr>
           <a:p>
+            <a:pPr>
+              <a:lnSpc>
+                <a:spcPct val="100000"/>
+              </a:lnSpc>
+            </a:pPr>
             <a:endParaRPr b="0" lang="en-US" sz="1800" spc="-1" strike="noStrike">
               <a:solidFill>
                 <a:srgbClr val="ffffff"/>
@@ -26873,7 +28044,7 @@
         <p:spPr>
           <a:xfrm>
             <a:off x="365760" y="2743200"/>
-            <a:ext cx="2742840" cy="475200"/>
+            <a:ext cx="2742480" cy="474840"/>
           </a:xfrm>
           <a:prstGeom prst="rect">
             <a:avLst/>
@@ -26929,7 +28100,7 @@
         <p:spPr>
           <a:xfrm>
             <a:off x="475560" y="3273480"/>
-            <a:ext cx="2523240" cy="712800"/>
+            <a:ext cx="2522880" cy="712440"/>
           </a:xfrm>
           <a:prstGeom prst="rect">
             <a:avLst/>
@@ -26985,7 +28156,7 @@
         <p:spPr>
           <a:xfrm>
             <a:off x="475560" y="4069080"/>
-            <a:ext cx="164160" cy="164160"/>
+            <a:ext cx="163800" cy="163800"/>
           </a:xfrm>
           <a:prstGeom prst="ellipse">
             <a:avLst/>
@@ -27011,6 +28182,11 @@
             <a:noAutofit/>
           </a:bodyPr>
           <a:p>
+            <a:pPr>
+              <a:lnSpc>
+                <a:spcPct val="100000"/>
+              </a:lnSpc>
+            </a:pPr>
             <a:endParaRPr b="0" lang="en-US" sz="1800" spc="-1" strike="noStrike">
               <a:solidFill>
                 <a:srgbClr val="ffffff"/>
@@ -27029,7 +28205,7 @@
         <p:spPr>
           <a:xfrm>
             <a:off x="704160" y="4041720"/>
-            <a:ext cx="2285640" cy="182520"/>
+            <a:ext cx="2285280" cy="182160"/>
           </a:xfrm>
           <a:prstGeom prst="rect">
             <a:avLst/>
@@ -27085,7 +28261,7 @@
         <p:spPr>
           <a:xfrm>
             <a:off x="475560" y="4270320"/>
-            <a:ext cx="164160" cy="164160"/>
+            <a:ext cx="163800" cy="163800"/>
           </a:xfrm>
           <a:prstGeom prst="ellipse">
             <a:avLst/>
@@ -27111,6 +28287,11 @@
             <a:noAutofit/>
           </a:bodyPr>
           <a:p>
+            <a:pPr>
+              <a:lnSpc>
+                <a:spcPct val="100000"/>
+              </a:lnSpc>
+            </a:pPr>
             <a:endParaRPr b="0" lang="en-US" sz="1800" spc="-1" strike="noStrike">
               <a:solidFill>
                 <a:srgbClr val="ffffff"/>
@@ -27129,7 +28310,7 @@
         <p:spPr>
           <a:xfrm>
             <a:off x="704160" y="4242960"/>
-            <a:ext cx="2285640" cy="182520"/>
+            <a:ext cx="2285280" cy="182160"/>
           </a:xfrm>
           <a:prstGeom prst="rect">
             <a:avLst/>
@@ -27185,7 +28366,7 @@
         <p:spPr>
           <a:xfrm>
             <a:off x="475560" y="4471560"/>
-            <a:ext cx="164160" cy="164160"/>
+            <a:ext cx="163800" cy="163800"/>
           </a:xfrm>
           <a:prstGeom prst="ellipse">
             <a:avLst/>
@@ -27211,6 +28392,11 @@
             <a:noAutofit/>
           </a:bodyPr>
           <a:p>
+            <a:pPr>
+              <a:lnSpc>
+                <a:spcPct val="100000"/>
+              </a:lnSpc>
+            </a:pPr>
             <a:endParaRPr b="0" lang="en-US" sz="1800" spc="-1" strike="noStrike">
               <a:solidFill>
                 <a:srgbClr val="ffffff"/>
@@ -27229,7 +28415,7 @@
         <p:spPr>
           <a:xfrm>
             <a:off x="704160" y="4443840"/>
-            <a:ext cx="2285640" cy="182520"/>
+            <a:ext cx="2285280" cy="182160"/>
           </a:xfrm>
           <a:prstGeom prst="rect">
             <a:avLst/>
@@ -27285,7 +28471,7 @@
         <p:spPr>
           <a:xfrm>
             <a:off x="475560" y="4672440"/>
-            <a:ext cx="164160" cy="164160"/>
+            <a:ext cx="163800" cy="163800"/>
           </a:xfrm>
           <a:prstGeom prst="ellipse">
             <a:avLst/>
@@ -27311,6 +28497,11 @@
             <a:noAutofit/>
           </a:bodyPr>
           <a:p>
+            <a:pPr>
+              <a:lnSpc>
+                <a:spcPct val="100000"/>
+              </a:lnSpc>
+            </a:pPr>
             <a:endParaRPr b="0" lang="en-US" sz="1800" spc="-1" strike="noStrike">
               <a:solidFill>
                 <a:srgbClr val="ffffff"/>
@@ -27329,7 +28520,7 @@
         <p:spPr>
           <a:xfrm>
             <a:off x="704160" y="4645080"/>
-            <a:ext cx="2285640" cy="182520"/>
+            <a:ext cx="2285280" cy="182160"/>
           </a:xfrm>
           <a:prstGeom prst="rect">
             <a:avLst/>
@@ -27385,7 +28576,7 @@
         <p:spPr>
           <a:xfrm>
             <a:off x="3749040" y="960120"/>
-            <a:ext cx="1691280" cy="1691280"/>
+            <a:ext cx="1690920" cy="1690920"/>
           </a:xfrm>
           <a:prstGeom prst="ellipse">
             <a:avLst/>
@@ -27418,6 +28609,11 @@
             <a:noAutofit/>
           </a:bodyPr>
           <a:p>
+            <a:pPr>
+              <a:lnSpc>
+                <a:spcPct val="100000"/>
+              </a:lnSpc>
+            </a:pPr>
             <a:endParaRPr b="0" lang="en-US" sz="1800" spc="-1" strike="noStrike">
               <a:solidFill>
                 <a:srgbClr val="000000"/>
@@ -27436,7 +28632,7 @@
         <p:spPr>
           <a:xfrm>
             <a:off x="3749040" y="960120"/>
-            <a:ext cx="1691280" cy="1691280"/>
+            <a:ext cx="1690920" cy="1690920"/>
           </a:xfrm>
           <a:prstGeom prst="rect">
             <a:avLst/>
@@ -27492,7 +28688,7 @@
         <p:spPr>
           <a:xfrm>
             <a:off x="3246120" y="2743200"/>
-            <a:ext cx="2742840" cy="2084400"/>
+            <a:ext cx="2742480" cy="2084040"/>
           </a:xfrm>
           <a:prstGeom prst="rect">
             <a:avLst/>
@@ -27525,6 +28721,11 @@
             <a:noAutofit/>
           </a:bodyPr>
           <a:p>
+            <a:pPr>
+              <a:lnSpc>
+                <a:spcPct val="100000"/>
+              </a:lnSpc>
+            </a:pPr>
             <a:endParaRPr b="0" lang="en-US" sz="1800" spc="-1" strike="noStrike">
               <a:solidFill>
                 <a:srgbClr val="ffffff"/>
@@ -27543,7 +28744,7 @@
         <p:spPr>
           <a:xfrm>
             <a:off x="3246120" y="2743200"/>
-            <a:ext cx="2742840" cy="475200"/>
+            <a:ext cx="2742480" cy="474840"/>
           </a:xfrm>
           <a:prstGeom prst="rect">
             <a:avLst/>
@@ -27569,6 +28770,11 @@
             <a:noAutofit/>
           </a:bodyPr>
           <a:p>
+            <a:pPr>
+              <a:lnSpc>
+                <a:spcPct val="100000"/>
+              </a:lnSpc>
+            </a:pPr>
             <a:endParaRPr b="0" lang="en-US" sz="1800" spc="-1" strike="noStrike">
               <a:solidFill>
                 <a:srgbClr val="000000"/>
@@ -27587,7 +28793,7 @@
         <p:spPr>
           <a:xfrm>
             <a:off x="3246120" y="2743200"/>
-            <a:ext cx="2742840" cy="475200"/>
+            <a:ext cx="2742480" cy="474840"/>
           </a:xfrm>
           <a:prstGeom prst="rect">
             <a:avLst/>
@@ -27643,7 +28849,7 @@
         <p:spPr>
           <a:xfrm>
             <a:off x="3355920" y="3273480"/>
-            <a:ext cx="2523240" cy="712800"/>
+            <a:ext cx="2522880" cy="712440"/>
           </a:xfrm>
           <a:prstGeom prst="rect">
             <a:avLst/>
@@ -27699,7 +28905,7 @@
         <p:spPr>
           <a:xfrm>
             <a:off x="3355920" y="4069080"/>
-            <a:ext cx="164160" cy="164160"/>
+            <a:ext cx="163800" cy="163800"/>
           </a:xfrm>
           <a:prstGeom prst="ellipse">
             <a:avLst/>
@@ -27725,6 +28931,11 @@
             <a:noAutofit/>
           </a:bodyPr>
           <a:p>
+            <a:pPr>
+              <a:lnSpc>
+                <a:spcPct val="100000"/>
+              </a:lnSpc>
+            </a:pPr>
             <a:endParaRPr b="0" lang="en-US" sz="1800" spc="-1" strike="noStrike">
               <a:solidFill>
                 <a:srgbClr val="000000"/>
@@ -27743,7 +28954,7 @@
         <p:spPr>
           <a:xfrm>
             <a:off x="3584520" y="4041720"/>
-            <a:ext cx="2285640" cy="182520"/>
+            <a:ext cx="2285280" cy="182160"/>
           </a:xfrm>
           <a:prstGeom prst="rect">
             <a:avLst/>
@@ -27799,7 +29010,7 @@
         <p:spPr>
           <a:xfrm>
             <a:off x="3355920" y="4270320"/>
-            <a:ext cx="164160" cy="164160"/>
+            <a:ext cx="163800" cy="163800"/>
           </a:xfrm>
           <a:prstGeom prst="ellipse">
             <a:avLst/>
@@ -27825,6 +29036,11 @@
             <a:noAutofit/>
           </a:bodyPr>
           <a:p>
+            <a:pPr>
+              <a:lnSpc>
+                <a:spcPct val="100000"/>
+              </a:lnSpc>
+            </a:pPr>
             <a:endParaRPr b="0" lang="en-US" sz="1800" spc="-1" strike="noStrike">
               <a:solidFill>
                 <a:srgbClr val="000000"/>
@@ -27843,7 +29059,7 @@
         <p:spPr>
           <a:xfrm>
             <a:off x="3584520" y="4242960"/>
-            <a:ext cx="2285640" cy="182520"/>
+            <a:ext cx="2285280" cy="182160"/>
           </a:xfrm>
           <a:prstGeom prst="rect">
             <a:avLst/>
@@ -27899,7 +29115,7 @@
         <p:spPr>
           <a:xfrm>
             <a:off x="3355920" y="4471560"/>
-            <a:ext cx="164160" cy="164160"/>
+            <a:ext cx="163800" cy="163800"/>
           </a:xfrm>
           <a:prstGeom prst="ellipse">
             <a:avLst/>
@@ -27925,6 +29141,11 @@
             <a:noAutofit/>
           </a:bodyPr>
           <a:p>
+            <a:pPr>
+              <a:lnSpc>
+                <a:spcPct val="100000"/>
+              </a:lnSpc>
+            </a:pPr>
             <a:endParaRPr b="0" lang="en-US" sz="1800" spc="-1" strike="noStrike">
               <a:solidFill>
                 <a:srgbClr val="000000"/>
@@ -27943,7 +29164,7 @@
         <p:spPr>
           <a:xfrm>
             <a:off x="3584520" y="4443840"/>
-            <a:ext cx="2285640" cy="182520"/>
+            <a:ext cx="2285280" cy="182160"/>
           </a:xfrm>
           <a:prstGeom prst="rect">
             <a:avLst/>
@@ -27999,7 +29220,7 @@
         <p:spPr>
           <a:xfrm>
             <a:off x="3355920" y="4672440"/>
-            <a:ext cx="164160" cy="164160"/>
+            <a:ext cx="163800" cy="163800"/>
           </a:xfrm>
           <a:prstGeom prst="ellipse">
             <a:avLst/>
@@ -28025,6 +29246,11 @@
             <a:noAutofit/>
           </a:bodyPr>
           <a:p>
+            <a:pPr>
+              <a:lnSpc>
+                <a:spcPct val="100000"/>
+              </a:lnSpc>
+            </a:pPr>
             <a:endParaRPr b="0" lang="en-US" sz="1800" spc="-1" strike="noStrike">
               <a:solidFill>
                 <a:srgbClr val="000000"/>
@@ -28043,7 +29269,7 @@
         <p:spPr>
           <a:xfrm>
             <a:off x="3584520" y="4645080"/>
-            <a:ext cx="2285640" cy="182520"/>
+            <a:ext cx="2285280" cy="182160"/>
           </a:xfrm>
           <a:prstGeom prst="rect">
             <a:avLst/>
@@ -28099,7 +29325,7 @@
         <p:spPr>
           <a:xfrm>
             <a:off x="6629400" y="960120"/>
-            <a:ext cx="1691280" cy="1691280"/>
+            <a:ext cx="1690920" cy="1690920"/>
           </a:xfrm>
           <a:prstGeom prst="ellipse">
             <a:avLst/>
@@ -28132,6 +29358,11 @@
             <a:noAutofit/>
           </a:bodyPr>
           <a:p>
+            <a:pPr>
+              <a:lnSpc>
+                <a:spcPct val="100000"/>
+              </a:lnSpc>
+            </a:pPr>
             <a:endParaRPr b="0" lang="en-US" sz="1800" spc="-1" strike="noStrike">
               <a:solidFill>
                 <a:srgbClr val="ffffff"/>
@@ -28150,7 +29381,7 @@
         <p:spPr>
           <a:xfrm>
             <a:off x="6629400" y="960120"/>
-            <a:ext cx="1691280" cy="1691280"/>
+            <a:ext cx="1690920" cy="1690920"/>
           </a:xfrm>
           <a:prstGeom prst="rect">
             <a:avLst/>
@@ -28206,7 +29437,7 @@
         <p:spPr>
           <a:xfrm>
             <a:off x="6126480" y="2743200"/>
-            <a:ext cx="2742840" cy="2084400"/>
+            <a:ext cx="2742480" cy="2084040"/>
           </a:xfrm>
           <a:prstGeom prst="rect">
             <a:avLst/>
@@ -28239,6 +29470,11 @@
             <a:noAutofit/>
           </a:bodyPr>
           <a:p>
+            <a:pPr>
+              <a:lnSpc>
+                <a:spcPct val="100000"/>
+              </a:lnSpc>
+            </a:pPr>
             <a:endParaRPr b="0" lang="en-US" sz="1800" spc="-1" strike="noStrike">
               <a:solidFill>
                 <a:srgbClr val="ffffff"/>
@@ -28257,7 +29493,7 @@
         <p:spPr>
           <a:xfrm>
             <a:off x="6126480" y="2743200"/>
-            <a:ext cx="2742840" cy="475200"/>
+            <a:ext cx="2742480" cy="474840"/>
           </a:xfrm>
           <a:prstGeom prst="rect">
             <a:avLst/>
@@ -28283,6 +29519,11 @@
             <a:noAutofit/>
           </a:bodyPr>
           <a:p>
+            <a:pPr>
+              <a:lnSpc>
+                <a:spcPct val="100000"/>
+              </a:lnSpc>
+            </a:pPr>
             <a:endParaRPr b="0" lang="en-US" sz="1800" spc="-1" strike="noStrike">
               <a:solidFill>
                 <a:srgbClr val="ffffff"/>
@@ -28301,7 +29542,7 @@
         <p:spPr>
           <a:xfrm>
             <a:off x="6126480" y="2743200"/>
-            <a:ext cx="2742840" cy="475200"/>
+            <a:ext cx="2742480" cy="474840"/>
           </a:xfrm>
           <a:prstGeom prst="rect">
             <a:avLst/>
@@ -28357,7 +29598,7 @@
         <p:spPr>
           <a:xfrm>
             <a:off x="6236280" y="3273480"/>
-            <a:ext cx="2523240" cy="712800"/>
+            <a:ext cx="2522880" cy="712440"/>
           </a:xfrm>
           <a:prstGeom prst="rect">
             <a:avLst/>
@@ -28413,7 +29654,7 @@
         <p:spPr>
           <a:xfrm>
             <a:off x="6236280" y="4069080"/>
-            <a:ext cx="164160" cy="164160"/>
+            <a:ext cx="163800" cy="163800"/>
           </a:xfrm>
           <a:prstGeom prst="ellipse">
             <a:avLst/>
@@ -28439,6 +29680,11 @@
             <a:noAutofit/>
           </a:bodyPr>
           <a:p>
+            <a:pPr>
+              <a:lnSpc>
+                <a:spcPct val="100000"/>
+              </a:lnSpc>
+            </a:pPr>
             <a:endParaRPr b="0" lang="en-US" sz="1800" spc="-1" strike="noStrike">
               <a:solidFill>
                 <a:srgbClr val="ffffff"/>
@@ -28457,7 +29703,7 @@
         <p:spPr>
           <a:xfrm>
             <a:off x="6464880" y="4041720"/>
-            <a:ext cx="2285640" cy="182520"/>
+            <a:ext cx="2285280" cy="182160"/>
           </a:xfrm>
           <a:prstGeom prst="rect">
             <a:avLst/>
@@ -28513,7 +29759,7 @@
         <p:spPr>
           <a:xfrm>
             <a:off x="6236280" y="4270320"/>
-            <a:ext cx="164160" cy="164160"/>
+            <a:ext cx="163800" cy="163800"/>
           </a:xfrm>
           <a:prstGeom prst="ellipse">
             <a:avLst/>
@@ -28539,6 +29785,11 @@
             <a:noAutofit/>
           </a:bodyPr>
           <a:p>
+            <a:pPr>
+              <a:lnSpc>
+                <a:spcPct val="100000"/>
+              </a:lnSpc>
+            </a:pPr>
             <a:endParaRPr b="0" lang="en-US" sz="1800" spc="-1" strike="noStrike">
               <a:solidFill>
                 <a:srgbClr val="ffffff"/>
@@ -28557,7 +29808,7 @@
         <p:spPr>
           <a:xfrm>
             <a:off x="6464880" y="4242960"/>
-            <a:ext cx="2285640" cy="182520"/>
+            <a:ext cx="2285280" cy="182160"/>
           </a:xfrm>
           <a:prstGeom prst="rect">
             <a:avLst/>
@@ -28613,7 +29864,7 @@
         <p:spPr>
           <a:xfrm>
             <a:off x="6236280" y="4471560"/>
-            <a:ext cx="164160" cy="164160"/>
+            <a:ext cx="163800" cy="163800"/>
           </a:xfrm>
           <a:prstGeom prst="ellipse">
             <a:avLst/>
@@ -28639,6 +29890,11 @@
             <a:noAutofit/>
           </a:bodyPr>
           <a:p>
+            <a:pPr>
+              <a:lnSpc>
+                <a:spcPct val="100000"/>
+              </a:lnSpc>
+            </a:pPr>
             <a:endParaRPr b="0" lang="en-US" sz="1800" spc="-1" strike="noStrike">
               <a:solidFill>
                 <a:srgbClr val="ffffff"/>
@@ -28657,7 +29913,7 @@
         <p:spPr>
           <a:xfrm>
             <a:off x="6464880" y="4443840"/>
-            <a:ext cx="2285640" cy="182520"/>
+            <a:ext cx="2285280" cy="182160"/>
           </a:xfrm>
           <a:prstGeom prst="rect">
             <a:avLst/>
@@ -28713,7 +29969,7 @@
         <p:spPr>
           <a:xfrm>
             <a:off x="6236280" y="4672440"/>
-            <a:ext cx="164160" cy="164160"/>
+            <a:ext cx="163800" cy="163800"/>
           </a:xfrm>
           <a:prstGeom prst="ellipse">
             <a:avLst/>
@@ -28739,6 +29995,11 @@
             <a:noAutofit/>
           </a:bodyPr>
           <a:p>
+            <a:pPr>
+              <a:lnSpc>
+                <a:spcPct val="100000"/>
+              </a:lnSpc>
+            </a:pPr>
             <a:endParaRPr b="0" lang="en-US" sz="1800" spc="-1" strike="noStrike">
               <a:solidFill>
                 <a:srgbClr val="ffffff"/>
@@ -28757,7 +30018,7 @@
         <p:spPr>
           <a:xfrm>
             <a:off x="6464880" y="4645080"/>
-            <a:ext cx="2285640" cy="182520"/>
+            <a:ext cx="2285280" cy="182160"/>
           </a:xfrm>
           <a:prstGeom prst="rect">
             <a:avLst/>
